--- a/output/fundraising/NeonShift_募資簡報_中文草稿_v1.pptx
+++ b/output/fundraising/NeonShift_募資簡報_中文草稿_v1.pptx
@@ -23,6 +23,11 @@
     <p:sldId id="271" r:id="rId23"/>
     <p:sldId id="272" r:id="rId24"/>
     <p:sldId id="273" r:id="rId25"/>
+    <p:sldId id="274" r:id="rId26"/>
+    <p:sldId id="275" r:id="rId27"/>
+    <p:sldId id="276" r:id="rId28"/>
+    <p:sldId id="277" r:id="rId29"/>
+    <p:sldId id="278" r:id="rId30"/>
   </p:sldIdLst>
   <p:sldSz cx="12191695" cy="6858000" type="screen4x3"/>
   <p:notesSz cx="6858000" cy="9144000"/>
@@ -729,7 +734,7 @@
           <a:lstStyle/>
           <a:p>
             <a:r>
-              <a:t>不把 PG TODO 或設計圖當成功能上線，不把 BRD 的 500 用戶、30% 留存當成實績。程式存在只能說明原型工作進行中，未在此做完整系統驗收。tSKR 為 devnet 測試代幣，無金錢價值、非官方 SKR。</a:t>
+              <a:t>2026-09-15 自動驗證：動畫相關 17 項、新手與既有流程 23 項測試通過，型別檢查通過；是分次驗證，不當作完整端到端驗收。NftReveal 尚為鞋／徽章展示，非所有 metadata 圖片。低階裝置效能、讀屏與理解度待實機。來源：PG-A-17、PG-UX-01、Style §25。</a:t>
             </a:r>
           </a:p>
         </p:txBody>
@@ -799,7 +804,7 @@
           <a:lstStyle/>
           <a:p>
             <a:r>
-              <a:t>全部為建議門檻，不是承諾或業績。再採購指獨立的新付費活動；貢獻毛利＝服務收入減可歸屬雲端、支付、客服、現場與外包交付成本，不等於公司淨利。門檻未達應調整產品、客群或支出。</a:t>
+              <a:t>歷史機制：https://stepnofficial.medium.com/tokeonomics-at-stepn-ee08604e82f1 。負向循環為本案機制推論，非量化因果歸因。當年另有大盤下跌與中國 GPS 限制衝擊：https://www.coindesk.com/markets/2022/05/29/first-mover-asia-bitcoin-extends-losing-streak-new-lunas-crash-like-old-lunas-stepns-china-dilemma 。不將價格下跌等同 STEPN 停止營運。完整對照 docs/economics/stepn-risk-review.md。</a:t>
             </a:r>
           </a:p>
         </p:txBody>
@@ -869,7 +874,7 @@
           <a:lstStyle/>
           <a:p>
             <a:r>
-              <a:t>第 3 年年化場次情境，不是 12 個月目標或 ARR。各情境公式如投影片。品牌案與活動服務的工作範圍分開計費，避免雙算。同一年度總收入保守 140 萬、基準 390 萬、擴張 1,200 萬。未含稅，未扣團隊固定成本及獲客費，無法推論損益兩平。基準情境不足支撐每年 1,200 萬支出，需進一步驗證更高客戶密度／訂閱或降低支出。</a:t>
+              <a:t>來源：tools/tokenomics/stress.mjs 與 docs/economics/stress.csv；常數來自 Rust，未讀當前 RPC。9 組包含 100／1000／10000 錢包與 Lv1／Lv5／40 日上限。此頁選滿階不含 streak 情境。庫存／日需求為理論比值，按筆領取可能先遇不足，不是保證服務天數。固定供給限制增發，但不保證流通價格或現金價值。</a:t>
             </a:r>
           </a:p>
         </p:txBody>
@@ -939,7 +944,7 @@
           <a:lstStyle/>
           <a:p>
             <a:r>
-              <a:t>使用者未提供金額，故採 NT$1,200 萬／12 月示意而非正式募資條件。配置 540+300+180+180=1,200 萬。並非經薪資、聘僱與現場預算驗證的 burn rate；正式募資前需依現有人力、現金、薪資及試辦報價重算。無投資報酬保證、不含代幣募資。</a:t>
+              <a:t>PG-EC-02～05 為 TODO，未改現行合約。現況 clock_in 的代幣轉帳失敗會讓 XP 更新一起回滾；不能單靠把獎勵設為零修復。全站日預算 1000、保留 20000／180 天只是報告範例，非定案；真實獎品需實收且已撥款的成本準備。收入不含參賽本金或自家幣升值；保留既有承諾，僅調整未來活動。募資下一阶段需完成這些技術與需求驗收。</a:t>
             </a:r>
           </a:p>
         </p:txBody>
@@ -1009,7 +1014,7 @@
           <a:lstStyle/>
           <a:p>
             <a:r>
-              <a:t>不虛構創辦人背景、合作方 Logo 或既有投資人。寄出正式募資版本前，必須補姓名、職稱、過往實績、股權／全職投入、聯絡資訊。</a:t>
+              <a:t>不把 PG TODO 或設計圖當成功能上線，不把 BRD 的 500 用戶、30% 留存當成實績。程式存在只能說明原型工作進行中，未在此做完整系統驗收。tSKR 為 devnet 測試代幣，無金錢價值、非官方 SKR。</a:t>
             </a:r>
           </a:p>
         </p:txBody>
@@ -1079,37 +1084,7 @@
           <a:lstStyle/>
           <a:p>
             <a:r>
-              <a:t>S1 Global Wellness Institute｜2025 Global Wellness Economy Monitor</a:t>
-            </a:r>
-          </a:p>
-          <a:p>
-            <a:r>
-              <a:t>https://globalwellnessinstitute.org/wp-content/uploads/2025/11/2025-GWI-WE-Monitor_DIGITAL-FINAL.pdf</a:t>
-            </a:r>
-          </a:p>
-          <a:p>
-            <a:r>
-              <a:t>S2 HFA｜Fitness Industry’s Global Momentum Continued in 2024</a:t>
-            </a:r>
-          </a:p>
-          <a:p>
-            <a:r>
-              <a:t>https://www.healthandfitness.org/fitness-industrys-global-momentum-continued-in-2024-new-report-shows/</a:t>
-            </a:r>
-          </a:p>
-          <a:p>
-            <a:r>
-              <a:t>S3 Solana Mobile｜SKR is Live，2026-07-14</a:t>
-            </a:r>
-          </a:p>
-          <a:p>
-            <a:r>
-              <a:t>https://solanamobile.com/blog/skr-is-live</a:t>
-            </a:r>
-          </a:p>
-          <a:p>
-            <a:r>
-              <a:t>所有外部数据查核日期 2026-09-14；本案價格、家數、收入與募資數字皆為自建情境。</a:t>
+              <a:t>全部為建議門檻，不是承諾或業績。再採購指獨立的新付費活動；貢獻毛利＝服務收入減可歸屬雲端、支付、客服、現場與外包交付成本，不等於公司淨利。門檻未達應調整產品、客群或支出。</a:t>
             </a:r>
           </a:p>
         </p:txBody>
@@ -1179,7 +1154,77 @@
           <a:lstStyle/>
           <a:p>
             <a:r>
-              <a:t>本簡報為中文募資討論草稿，不代表活動合作、收入、投資條件已經成立。商業模型及募資金額以使用者補充資料後修訂。投資重點是參與經營與 B2B 合作；tSKR 是測試代幣且無金錢價值，不是官方 SKR。</a:t>
+              <a:t>第 3 年年化場次情境，不是 12 個月目標或 ARR。各情境公式如投影片。品牌案與活動服務的工作範圍分開計費，避免雙算。同一年度總收入保守 140 萬、基準 390 萬、擴張 1,200 萬。未含稅，未扣團隊固定成本及獲客費，無法推論損益兩平。基準情境不足支撐每年 1,200 萬支出，需進一步驗證更高客戶密度／訂閱或降低支出。</a:t>
+            </a:r>
+          </a:p>
+        </p:txBody>
+      </p:sp>
+      <p:sp>
+        <p:nvSpPr>
+          <p:cNvPr id="4" name="Slide Number Placeholder 3"/>
+          <p:cNvSpPr>
+            <a:spLocks noGrp="1"/>
+          </p:cNvSpPr>
+          <p:nvPr>
+            <p:ph type="sldNum" idx="5" sz="quarter"/>
+          </p:nvPr>
+        </p:nvSpPr>
+        <p:spPr/>
+      </p:sp>
+    </p:spTree>
+  </p:cSld>
+  <p:clrMapOvr>
+    <a:masterClrMapping/>
+  </p:clrMapOvr>
+</p:notes>
+</file>
+
+<file path=ppt/notesSlides/notesSlide19.xml><?xml version="1.0" encoding="utf-8"?>
+<p:notes xmlns:a="http://schemas.openxmlformats.org/drawingml/2006/main" xmlns:p="http://schemas.openxmlformats.org/presentationml/2006/main" xmlns:r="http://schemas.openxmlformats.org/officeDocument/2006/relationships">
+  <p:cSld>
+    <p:spTree>
+      <p:nvGrpSpPr>
+        <p:cNvPr id="1" name=""/>
+        <p:cNvGrpSpPr/>
+        <p:nvPr/>
+      </p:nvGrpSpPr>
+      <p:grpSpPr>
+        <a:xfrm>
+          <a:off x="0" y="0"/>
+          <a:ext cx="0" cy="0"/>
+          <a:chOff x="0" y="0"/>
+          <a:chExt cx="0" cy="0"/>
+        </a:xfrm>
+      </p:grpSpPr>
+      <p:sp>
+        <p:nvSpPr>
+          <p:cNvPr id="2" name="Slide Image Placeholder 1"/>
+          <p:cNvSpPr>
+            <a:spLocks noGrp="1"/>
+          </p:cNvSpPr>
+          <p:nvPr>
+            <p:ph type="sldImg" idx="2"/>
+          </p:nvPr>
+        </p:nvSpPr>
+        <p:spPr/>
+      </p:sp>
+      <p:sp>
+        <p:nvSpPr>
+          <p:cNvPr id="3" name="Notes Placeholder 2"/>
+          <p:cNvSpPr>
+            <a:spLocks noGrp="1"/>
+          </p:cNvSpPr>
+          <p:nvPr>
+            <p:ph type="body" idx="3" sz="quarter"/>
+          </p:nvPr>
+        </p:nvSpPr>
+        <p:spPr/>
+        <p:txBody>
+          <a:bodyPr/>
+          <a:lstStyle/>
+          <a:p>
+            <a:r>
+              <a:t>使用者未提供金額，故採 NT$1,200 萬／12 月示意而非正式募資條件。配置 540+300+180+180=1,200 萬。並非經薪資、聘僱與現場預算驗證的 burn rate；正式募資前需依現有人力、現金、薪資及試辦報價重算。無投資報酬保證、不含代幣募資。</a:t>
             </a:r>
           </a:p>
         </p:txBody>
@@ -1250,6 +1295,316 @@
           <a:p>
             <a:r>
               <a:t>本頁為團隊待驗證的客戶問題假設，非市場調查結論。建議訪談至少 10 位主辦方／品牌及 20 位參與者，先判斷是否願意付費解決。</a:t>
+            </a:r>
+          </a:p>
+        </p:txBody>
+      </p:sp>
+      <p:sp>
+        <p:nvSpPr>
+          <p:cNvPr id="4" name="Slide Number Placeholder 3"/>
+          <p:cNvSpPr>
+            <a:spLocks noGrp="1"/>
+          </p:cNvSpPr>
+          <p:nvPr>
+            <p:ph type="sldNum" idx="5" sz="quarter"/>
+          </p:nvPr>
+        </p:nvSpPr>
+        <p:spPr/>
+      </p:sp>
+    </p:spTree>
+  </p:cSld>
+  <p:clrMapOvr>
+    <a:masterClrMapping/>
+  </p:clrMapOvr>
+</p:notes>
+</file>
+
+<file path=ppt/notesSlides/notesSlide20.xml><?xml version="1.0" encoding="utf-8"?>
+<p:notes xmlns:a="http://schemas.openxmlformats.org/drawingml/2006/main" xmlns:p="http://schemas.openxmlformats.org/presentationml/2006/main" xmlns:r="http://schemas.openxmlformats.org/officeDocument/2006/relationships">
+  <p:cSld>
+    <p:spTree>
+      <p:nvGrpSpPr>
+        <p:cNvPr id="1" name=""/>
+        <p:cNvGrpSpPr/>
+        <p:nvPr/>
+      </p:nvGrpSpPr>
+      <p:grpSpPr>
+        <a:xfrm>
+          <a:off x="0" y="0"/>
+          <a:ext cx="0" cy="0"/>
+          <a:chOff x="0" y="0"/>
+          <a:chExt cx="0" cy="0"/>
+        </a:xfrm>
+      </p:grpSpPr>
+      <p:sp>
+        <p:nvSpPr>
+          <p:cNvPr id="2" name="Slide Image Placeholder 1"/>
+          <p:cNvSpPr>
+            <a:spLocks noGrp="1"/>
+          </p:cNvSpPr>
+          <p:nvPr>
+            <p:ph type="sldImg" idx="2"/>
+          </p:nvPr>
+        </p:nvSpPr>
+        <p:spPr/>
+      </p:sp>
+      <p:sp>
+        <p:nvSpPr>
+          <p:cNvPr id="3" name="Notes Placeholder 2"/>
+          <p:cNvSpPr>
+            <a:spLocks noGrp="1"/>
+          </p:cNvSpPr>
+          <p:nvPr>
+            <p:ph type="body" idx="3" sz="quarter"/>
+          </p:nvPr>
+        </p:nvSpPr>
+        <p:spPr/>
+        <p:txBody>
+          <a:bodyPr/>
+          <a:lstStyle/>
+          <a:p>
+            <a:r>
+              <a:t>不虛構創辦人背景、合作方 Logo 或既有投資人。寄出正式募資版本前，必須補姓名、職稱、過往實績、股權／全職投入、聯絡資訊。</a:t>
+            </a:r>
+          </a:p>
+        </p:txBody>
+      </p:sp>
+      <p:sp>
+        <p:nvSpPr>
+          <p:cNvPr id="4" name="Slide Number Placeholder 3"/>
+          <p:cNvSpPr>
+            <a:spLocks noGrp="1"/>
+          </p:cNvSpPr>
+          <p:nvPr>
+            <p:ph type="sldNum" idx="5" sz="quarter"/>
+          </p:nvPr>
+        </p:nvSpPr>
+        <p:spPr/>
+      </p:sp>
+    </p:spTree>
+  </p:cSld>
+  <p:clrMapOvr>
+    <a:masterClrMapping/>
+  </p:clrMapOvr>
+</p:notes>
+</file>
+
+<file path=ppt/notesSlides/notesSlide21.xml><?xml version="1.0" encoding="utf-8"?>
+<p:notes xmlns:a="http://schemas.openxmlformats.org/drawingml/2006/main" xmlns:p="http://schemas.openxmlformats.org/presentationml/2006/main" xmlns:r="http://schemas.openxmlformats.org/officeDocument/2006/relationships">
+  <p:cSld>
+    <p:spTree>
+      <p:nvGrpSpPr>
+        <p:cNvPr id="1" name=""/>
+        <p:cNvGrpSpPr/>
+        <p:nvPr/>
+      </p:nvGrpSpPr>
+      <p:grpSpPr>
+        <a:xfrm>
+          <a:off x="0" y="0"/>
+          <a:ext cx="0" cy="0"/>
+          <a:chOff x="0" y="0"/>
+          <a:chExt cx="0" cy="0"/>
+        </a:xfrm>
+      </p:grpSpPr>
+      <p:sp>
+        <p:nvSpPr>
+          <p:cNvPr id="2" name="Slide Image Placeholder 1"/>
+          <p:cNvSpPr>
+            <a:spLocks noGrp="1"/>
+          </p:cNvSpPr>
+          <p:nvPr>
+            <p:ph type="sldImg" idx="2"/>
+          </p:nvPr>
+        </p:nvSpPr>
+        <p:spPr/>
+      </p:sp>
+      <p:sp>
+        <p:nvSpPr>
+          <p:cNvPr id="3" name="Notes Placeholder 2"/>
+          <p:cNvSpPr>
+            <a:spLocks noGrp="1"/>
+          </p:cNvSpPr>
+          <p:nvPr>
+            <p:ph type="body" idx="3" sz="quarter"/>
+          </p:nvPr>
+        </p:nvSpPr>
+        <p:spPr/>
+        <p:txBody>
+          <a:bodyPr/>
+          <a:lstStyle/>
+          <a:p>
+            <a:r>
+              <a:t>S1 Global Wellness Institute｜2025 Global Wellness Economy Monitor</a:t>
+            </a:r>
+          </a:p>
+          <a:p>
+            <a:r>
+              <a:t>https://globalwellnessinstitute.org/wp-content/uploads/2025/11/2025-GWI-WE-Monitor_DIGITAL-FINAL.pdf</a:t>
+            </a:r>
+          </a:p>
+          <a:p>
+            <a:r>
+              <a:t>S2 HFA｜Fitness Industry’s Global Momentum Continued in 2024</a:t>
+            </a:r>
+          </a:p>
+          <a:p>
+            <a:r>
+              <a:t>https://www.healthandfitness.org/fitness-industrys-global-momentum-continued-in-2024-new-report-shows/</a:t>
+            </a:r>
+          </a:p>
+          <a:p>
+            <a:r>
+              <a:t>S3 Solana Mobile｜SKR is Live，2026-07-14</a:t>
+            </a:r>
+          </a:p>
+          <a:p>
+            <a:r>
+              <a:t>https://solanamobile.com/blog/skr-is-live</a:t>
+            </a:r>
+          </a:p>
+          <a:p>
+            <a:r>
+              <a:t>所有外部数据查核日期 2026-09-14；本案價格、家數、收入與募資數字皆為自建情境。</a:t>
+            </a:r>
+          </a:p>
+        </p:txBody>
+      </p:sp>
+      <p:sp>
+        <p:nvSpPr>
+          <p:cNvPr id="4" name="Slide Number Placeholder 3"/>
+          <p:cNvSpPr>
+            <a:spLocks noGrp="1"/>
+          </p:cNvSpPr>
+          <p:nvPr>
+            <p:ph type="sldNum" idx="5" sz="quarter"/>
+          </p:nvPr>
+        </p:nvSpPr>
+        <p:spPr/>
+      </p:sp>
+    </p:spTree>
+  </p:cSld>
+  <p:clrMapOvr>
+    <a:masterClrMapping/>
+  </p:clrMapOvr>
+</p:notes>
+</file>
+
+<file path=ppt/notesSlides/notesSlide22.xml><?xml version="1.0" encoding="utf-8"?>
+<p:notes xmlns:a="http://schemas.openxmlformats.org/drawingml/2006/main" xmlns:p="http://schemas.openxmlformats.org/presentationml/2006/main" xmlns:r="http://schemas.openxmlformats.org/officeDocument/2006/relationships">
+  <p:cSld>
+    <p:spTree>
+      <p:nvGrpSpPr>
+        <p:cNvPr id="1" name=""/>
+        <p:cNvGrpSpPr/>
+        <p:nvPr/>
+      </p:nvGrpSpPr>
+      <p:grpSpPr>
+        <a:xfrm>
+          <a:off x="0" y="0"/>
+          <a:ext cx="0" cy="0"/>
+          <a:chOff x="0" y="0"/>
+          <a:chExt cx="0" cy="0"/>
+        </a:xfrm>
+      </p:grpSpPr>
+      <p:sp>
+        <p:nvSpPr>
+          <p:cNvPr id="2" name="Slide Image Placeholder 1"/>
+          <p:cNvSpPr>
+            <a:spLocks noGrp="1"/>
+          </p:cNvSpPr>
+          <p:nvPr>
+            <p:ph type="sldImg" idx="2"/>
+          </p:nvPr>
+        </p:nvSpPr>
+        <p:spPr/>
+      </p:sp>
+      <p:sp>
+        <p:nvSpPr>
+          <p:cNvPr id="3" name="Notes Placeholder 2"/>
+          <p:cNvSpPr>
+            <a:spLocks noGrp="1"/>
+          </p:cNvSpPr>
+          <p:nvPr>
+            <p:ph type="body" idx="3" sz="quarter"/>
+          </p:nvPr>
+        </p:nvSpPr>
+        <p:spPr/>
+        <p:txBody>
+          <a:bodyPr/>
+          <a:lstStyle/>
+          <a:p>
+            <a:r>
+              <a:t>E1／E2 網頁於前次分析讀取，2026-09-16 沿用歷史資料；本次未重新查市場即時數據。E3: docs/economics/stepn-risk-review.md、stress.csv、programs/neonshift-core/src/constants.rs、instructions/clock_in.rs、tournament_math.rs。已驗證预算與守恆斷言；未建模價格／流動性／留存。市場來源 S1～S3 沿用 2026-09-14 查核。</a:t>
+            </a:r>
+          </a:p>
+        </p:txBody>
+      </p:sp>
+      <p:sp>
+        <p:nvSpPr>
+          <p:cNvPr id="4" name="Slide Number Placeholder 3"/>
+          <p:cNvSpPr>
+            <a:spLocks noGrp="1"/>
+          </p:cNvSpPr>
+          <p:nvPr>
+            <p:ph type="sldNum" idx="5" sz="quarter"/>
+          </p:nvPr>
+        </p:nvSpPr>
+        <p:spPr/>
+      </p:sp>
+    </p:spTree>
+  </p:cSld>
+  <p:clrMapOvr>
+    <a:masterClrMapping/>
+  </p:clrMapOvr>
+</p:notes>
+</file>
+
+<file path=ppt/notesSlides/notesSlide23.xml><?xml version="1.0" encoding="utf-8"?>
+<p:notes xmlns:a="http://schemas.openxmlformats.org/drawingml/2006/main" xmlns:p="http://schemas.openxmlformats.org/presentationml/2006/main" xmlns:r="http://schemas.openxmlformats.org/officeDocument/2006/relationships">
+  <p:cSld>
+    <p:spTree>
+      <p:nvGrpSpPr>
+        <p:cNvPr id="1" name=""/>
+        <p:cNvGrpSpPr/>
+        <p:nvPr/>
+      </p:nvGrpSpPr>
+      <p:grpSpPr>
+        <a:xfrm>
+          <a:off x="0" y="0"/>
+          <a:ext cx="0" cy="0"/>
+          <a:chOff x="0" y="0"/>
+          <a:chExt cx="0" cy="0"/>
+        </a:xfrm>
+      </p:grpSpPr>
+      <p:sp>
+        <p:nvSpPr>
+          <p:cNvPr id="2" name="Slide Image Placeholder 1"/>
+          <p:cNvSpPr>
+            <a:spLocks noGrp="1"/>
+          </p:cNvSpPr>
+          <p:nvPr>
+            <p:ph type="sldImg" idx="2"/>
+          </p:nvPr>
+        </p:nvSpPr>
+        <p:spPr/>
+      </p:sp>
+      <p:sp>
+        <p:nvSpPr>
+          <p:cNvPr id="3" name="Notes Placeholder 2"/>
+          <p:cNvSpPr>
+            <a:spLocks noGrp="1"/>
+          </p:cNvSpPr>
+          <p:nvPr>
+            <p:ph type="body" idx="3" sz="quarter"/>
+          </p:nvPr>
+        </p:nvSpPr>
+        <p:spPr/>
+        <p:txBody>
+          <a:bodyPr/>
+          <a:lstStyle/>
+          <a:p>
+            <a:r>
+              <a:t>本簡報為中文募資討論草稿，不代表活動合作、收入、投資條件已經成立。商業模型及募資金額以使用者補充資料後修訂。投資重點是參與經營與 B2B 合作；tSKR 是測試代幣且無金錢價值，不是官方 SKR。</a:t>
             </a:r>
           </a:p>
         </p:txBody>
@@ -4911,7 +5266,7 @@
                 <a:latin typeface="Microsoft JhengHei"/>
                 <a:ea typeface="Microsoft JhengHei"/>
               </a:rPr>
-              <a:t>募資討論稿・2026.09.14｜商業方案／數值假設待確認</a:t>
+              <a:t>募資討論稿・2026.09.16｜商業方案／數值假設待確認</a:t>
             </a:r>
           </a:p>
         </p:txBody>
@@ -5318,7 +5673,7 @@
                 <a:latin typeface="Microsoft JhengHei"/>
                 <a:ea typeface="Microsoft JhengHei"/>
               </a:rPr>
-              <a:t>募資討論稿・2026.09.14｜商業方案／數值假設待確認</a:t>
+              <a:t>募資討論稿・2026.09.16｜商業方案／數值假設待確認</a:t>
             </a:r>
           </a:p>
         </p:txBody>
@@ -6178,7 +6533,7 @@
                 <a:latin typeface="Microsoft JhengHei"/>
                 <a:ea typeface="Microsoft JhengHei"/>
               </a:rPr>
-              <a:t>募資討論稿・2026.09.14｜商業方案／數值假設待確認</a:t>
+              <a:t>募資討論稿・2026.09.16｜商業方案／數值假設待確認</a:t>
             </a:r>
           </a:p>
         </p:txBody>
@@ -6918,7 +7273,7 @@
                 <a:latin typeface="Microsoft JhengHei"/>
                 <a:ea typeface="Microsoft JhengHei"/>
               </a:rPr>
-              <a:t>NEONSHIFT  /  現況與驗證計畫</a:t>
+              <a:t>NEONSHIFT  /  產品體驗｜已實作，待實機驗收</a:t>
             </a:r>
           </a:p>
         </p:txBody>
@@ -6958,7 +7313,7 @@
                 <a:latin typeface="Microsoft JhengHei"/>
                 <a:ea typeface="Microsoft JhengHei"/>
               </a:rPr>
-              <a:t>目前是原型階段，募資用來取得市場證據</a:t>
+              <a:t>讓新玩家看懂玩法，讓努力值得紀念</a:t>
             </a:r>
           </a:p>
         </p:txBody>
@@ -6998,7 +7353,7 @@
                 <a:latin typeface="Microsoft JhengHei"/>
                 <a:ea typeface="Microsoft JhengHei"/>
               </a:rPr>
-              <a:t>依現有專案文件與資產整理；尚未提供可核驗的用戶、營收或合作實績。</a:t>
+              <a:t>新手指南 → 每日任務 → 裝備成長 → 成就收藏；從理解玩法到感受榮耀。</a:t>
             </a:r>
           </a:p>
         </p:txBody>
@@ -7038,7 +7393,7 @@
                 <a:latin typeface="Microsoft JhengHei"/>
                 <a:ea typeface="Microsoft JhengHei"/>
               </a:rPr>
-              <a:t>募資討論稿・2026.09.14｜商業方案／數值假設待確認</a:t>
+              <a:t>募資討論稿・2026.09.16｜商業方案／數值假設待確認</a:t>
             </a:r>
           </a:p>
         </p:txBody>
@@ -7201,7 +7556,7 @@
                 <a:latin typeface="Microsoft JhengHei"/>
                 <a:ea typeface="Microsoft JhengHei"/>
               </a:rPr>
-              <a:t>已具備</a:t>
+              <a:t>第一次就知道怎麼玩</a:t>
             </a:r>
           </a:p>
         </p:txBody>
@@ -7241,7 +7596,7 @@
                 <a:latin typeface="Microsoft JhengHei"/>
                 <a:ea typeface="Microsoft JhengHei"/>
               </a:rPr>
-              <a:t>需求與產品設計文件</a:t>
+              <a:t>四張玩法卡＋首次四步</a:t>
             </a:r>
           </a:p>
           <a:p>
@@ -7258,7 +7613,7 @@
                 <a:latin typeface="Microsoft JhengHei"/>
                 <a:ea typeface="Microsoft JhengHei"/>
               </a:rPr>
-              <a:t>專屬 Logo／啟動畫面視覺</a:t>
+              <a:t>可略過、個人頁可重看</a:t>
             </a:r>
           </a:p>
           <a:p>
@@ -7275,7 +7630,7 @@
                 <a:latin typeface="Microsoft JhengHei"/>
                 <a:ea typeface="Microsoft JhengHei"/>
               </a:rPr>
-              <a:t>部分程式模組與原型工作</a:t>
+              <a:t>繁中／英文同步</a:t>
             </a:r>
           </a:p>
         </p:txBody>
@@ -7398,7 +7753,7 @@
                 <a:latin typeface="Microsoft JhengHei"/>
                 <a:ea typeface="Microsoft JhengHei"/>
               </a:rPr>
-              <a:t>下一步驗證</a:t>
+              <a:t>取得 NFT 的榮耀感</a:t>
             </a:r>
           </a:p>
         </p:txBody>
@@ -7438,7 +7793,7 @@
                 <a:latin typeface="Microsoft JhengHei"/>
                 <a:ea typeface="Microsoft JhengHei"/>
               </a:rPr>
-              <a:t>真實任務與活動端到端流程</a:t>
+              <a:t>卡背翻轉、金色光環</a:t>
             </a:r>
           </a:p>
           <a:p>
@@ -7455,7 +7810,7 @@
                 <a:latin typeface="Microsoft JhengHei"/>
                 <a:ea typeface="Microsoft JhengHei"/>
               </a:rPr>
-              <a:t>主辦方願付價格</a:t>
+              <a:t>粒子與卡面掃光</a:t>
             </a:r>
           </a:p>
           <a:p>
@@ -7472,7 +7827,7 @@
                 <a:latin typeface="Microsoft JhengHei"/>
                 <a:ea typeface="Microsoft JhengHei"/>
               </a:rPr>
-              <a:t>現場交付成本與錯誤率</a:t>
+              <a:t>新領取成功才揭曉</a:t>
             </a:r>
           </a:p>
         </p:txBody>
@@ -7595,7 +7950,7 @@
                 <a:latin typeface="Microsoft JhengHei"/>
                 <a:ea typeface="Microsoft JhengHei"/>
               </a:rPr>
-              <a:t>尚待補齊</a:t>
+              <a:t>升降等都有回饋</a:t>
             </a:r>
           </a:p>
         </p:txBody>
@@ -7635,7 +7990,7 @@
                 <a:latin typeface="Microsoft JhengHei"/>
                 <a:ea typeface="Microsoft JhengHei"/>
               </a:rPr>
-              <a:t>正式團隊履歷與分工</a:t>
+              <a:t>升等：能量擴散與進場</a:t>
             </a:r>
           </a:p>
           <a:p>
@@ -7652,7 +8007,7 @@
                 <a:latin typeface="Microsoft JhengHei"/>
                 <a:ea typeface="Microsoft JhengHei"/>
               </a:rPr>
-              <a:t>已簽合作／意向書</a:t>
+              <a:t>降等：冷色收縮與下沉</a:t>
             </a:r>
           </a:p>
           <a:p>
@@ -7669,7 +8024,7 @@
                 <a:latin typeface="Microsoft JhengHei"/>
                 <a:ea typeface="Microsoft JhengHei"/>
               </a:rPr>
-              <a:t>用戶留存與實收營收</a:t>
+              <a:t>支援減少動態效果</a:t>
             </a:r>
           </a:p>
         </p:txBody>
@@ -7778,7 +8133,7 @@
                 <a:latin typeface="Microsoft JhengHei"/>
                 <a:ea typeface="Microsoft JhengHei"/>
               </a:rPr>
-              <a:t>NEONSHIFT  /  募資後里程碑提案</a:t>
+              <a:t>NEONSHIFT  /  經濟設計｜機制分析，不是價格預測</a:t>
             </a:r>
           </a:p>
         </p:txBody>
@@ -7818,7 +8173,7 @@
                 <a:latin typeface="Microsoft JhengHei"/>
                 <a:ea typeface="Microsoft JhengHei"/>
               </a:rPr>
-              <a:t>12 個月，依驗證結果逐階段投入</a:t>
+              <a:t>STEPN 的教訓：獎勵需求不能只靠再投資</a:t>
             </a:r>
           </a:p>
         </p:txBody>
@@ -7858,7 +8213,7 @@
                 <a:latin typeface="Microsoft JhengHei"/>
                 <a:ea typeface="Microsoft JhengHei"/>
               </a:rPr>
-              <a:t>這是商業驗證排程，不取代原黑客松開發時程；各階段目標均未達成。</a:t>
+              <a:t>2022 年官方描述：GST 可增發；升級與鑄鞋消耗代幣；新玩家與擴充裝備帶來購買需求。</a:t>
             </a:r>
           </a:p>
         </p:txBody>
@@ -7898,7 +8253,7 @@
                 <a:latin typeface="Microsoft JhengHei"/>
                 <a:ea typeface="Microsoft JhengHei"/>
               </a:rPr>
-              <a:t>募資討論稿・2026.09.14｜商業方案／數值假設待確認</a:t>
+              <a:t>募資討論稿・2026.09.16｜商業方案／數值假設待確認</a:t>
             </a:r>
           </a:p>
         </p:txBody>
@@ -8061,7 +8416,7 @@
                 <a:latin typeface="Microsoft JhengHei"/>
                 <a:ea typeface="Microsoft JhengHei"/>
               </a:rPr>
-              <a:t>0–3 個月</a:t>
+              <a:t>需求的脆弱點</a:t>
             </a:r>
           </a:p>
         </p:txBody>
@@ -8101,7 +8456,7 @@
                 <a:latin typeface="Microsoft JhengHei"/>
                 <a:ea typeface="Microsoft JhengHei"/>
               </a:rPr>
-              <a:t>招募 3 家設計合作夥伴</a:t>
+              <a:t>若消耗是為了未來賺更多</a:t>
             </a:r>
           </a:p>
           <a:p>
@@ -8118,7 +8473,7 @@
                 <a:latin typeface="Microsoft JhengHei"/>
                 <a:ea typeface="Microsoft JhengHei"/>
               </a:rPr>
-              <a:t>至少完成 1 場試辦</a:t>
+              <a:t>收益预期轉弱時</a:t>
             </a:r>
           </a:p>
           <a:p>
@@ -8135,7 +8490,7 @@
                 <a:latin typeface="Microsoft JhengHei"/>
                 <a:ea typeface="Microsoft JhengHei"/>
               </a:rPr>
-              <a:t>核驗報到、領取與成績對帳</a:t>
+              <a:t>再投資需求也可能減少</a:t>
             </a:r>
           </a:p>
         </p:txBody>
@@ -8258,7 +8613,7 @@
                 <a:latin typeface="Microsoft JhengHei"/>
                 <a:ea typeface="Microsoft JhengHei"/>
               </a:rPr>
-              <a:t>4–6 個月</a:t>
+              <a:t>已有的不同</a:t>
             </a:r>
           </a:p>
         </p:txBody>
@@ -8298,7 +8653,7 @@
                 <a:latin typeface="Microsoft JhengHei"/>
                 <a:ea typeface="Microsoft JhengHei"/>
               </a:rPr>
-              <a:t>累計 5 場付費活動</a:t>
+              <a:t>免費初始鞋與免費升級</a:t>
             </a:r>
           </a:p>
           <a:p>
@@ -8315,7 +8670,7 @@
                 <a:latin typeface="Microsoft JhengHei"/>
                 <a:ea typeface="Microsoft JhengHei"/>
               </a:rPr>
-              <a:t>至少 2 家主辦方再採購</a:t>
+              <a:t>NFT 作為成就收藏</a:t>
             </a:r>
           </a:p>
           <a:p>
@@ -8332,7 +8687,7 @@
                 <a:latin typeface="Microsoft JhengHei"/>
                 <a:ea typeface="Microsoft JhengHei"/>
               </a:rPr>
-              <a:t>分開追蹤軟體與現場成本</a:t>
+              <a:t>探索冊外觀無收益加成</a:t>
             </a:r>
           </a:p>
         </p:txBody>
@@ -8455,7 +8810,7 @@
                 <a:latin typeface="Microsoft JhengHei"/>
                 <a:ea typeface="Microsoft JhengHei"/>
               </a:rPr>
-              <a:t>7–12 個月</a:t>
+              <a:t>仍未解決</a:t>
             </a:r>
           </a:p>
         </p:txBody>
@@ -8495,7 +8850,7 @@
                 <a:latin typeface="Microsoft JhengHei"/>
                 <a:ea typeface="Microsoft JhengHei"/>
               </a:rPr>
-              <a:t>累計 10 家付費主辦方</a:t>
+              <a:t>固定供給仍可能領完</a:t>
             </a:r>
           </a:p>
           <a:p>
@@ -8512,7 +8867,7 @@
                 <a:latin typeface="Microsoft JhengHei"/>
                 <a:ea typeface="Microsoft JhengHei"/>
               </a:rPr>
-              <a:t>建立下一期續約管線</a:t>
+              <a:t>單人限額不是全站預算</a:t>
             </a:r>
           </a:p>
           <a:p>
@@ -8529,7 +8884,47 @@
                 <a:latin typeface="Microsoft JhengHei"/>
                 <a:ea typeface="Microsoft JhengHei"/>
               </a:rPr>
-              <a:t>單場貢獻毛利轉正</a:t>
+              <a:t>競技場不是外部收入</a:t>
+            </a:r>
+          </a:p>
+        </p:txBody>
+      </p:sp>
+      <p:sp>
+        <p:nvSpPr>
+          <p:cNvPr id="20" name="TextBox 19"/>
+          <p:cNvSpPr txBox="1"/>
+          <p:nvPr/>
+        </p:nvSpPr>
+        <p:spPr>
+          <a:xfrm>
+            <a:off x="694944" y="6062472"/>
+            <a:ext cx="10698480" cy="274320"/>
+          </a:xfrm>
+          <a:prstGeom prst="rect">
+            <a:avLst/>
+          </a:prstGeom>
+          <a:noFill/>
+        </p:spPr>
+        <p:txBody>
+          <a:bodyPr wrap="square" lIns="9144" rIns="9144" tIns="9144" bIns="9144">
+            <a:spAutoFit/>
+          </a:bodyPr>
+          <a:lstStyle/>
+          <a:p>
+            <a:pPr>
+              <a:spcAft>
+                <a:spcPts val="800"/>
+              </a:spcAft>
+            </a:pPr>
+            <a:r>
+              <a:rPr sz="1100" b="0">
+                <a:solidFill>
+                  <a:srgbClr val="AAB7CC"/>
+                </a:solidFill>
+                <a:latin typeface="Microsoft JhengHei"/>
+                <a:ea typeface="Microsoft JhengHei"/>
+              </a:rPr>
+              <a:t>來源：STEPN 官方 2022-05-10；市場衝擊另見講稿。上述因果為本案分析。</a:t>
             </a:r>
           </a:p>
         </p:txBody>
@@ -8638,7 +9033,7 @@
                 <a:latin typeface="Microsoft JhengHei"/>
                 <a:ea typeface="Microsoft JhengHei"/>
               </a:rPr>
-              <a:t>NEONSHIFT  /  第 3 年年度營收情境｜非 ARR、非財測承諾</a:t>
+              <a:t>NEONSHIFT  /  壓力試算｜不是實際鏈上餘額</a:t>
             </a:r>
           </a:p>
         </p:txBody>
@@ -8678,7 +9073,7 @@
                 <a:latin typeface="Microsoft JhengHei"/>
                 <a:ea typeface="Microsoft JhengHei"/>
               </a:rPr>
-              <a:t>以可追溯假設，建立收入情境</a:t>
+              <a:t>成長越快，越需要全站獎勵預算</a:t>
             </a:r>
           </a:p>
         </p:txBody>
@@ -8718,7 +9113,7 @@
                 <a:latin typeface="Microsoft JhengHei"/>
                 <a:ea typeface="Microsoft JhengHei"/>
               </a:rPr>
-              <a:t>台幣萬元；服務收入不包含獎品、代收款與代幣。</a:t>
+              <a:t>假設初始金庫 200,000 tSKR；滿階每錢包每天雙任務領 33；無補庫、無回流。</a:t>
             </a:r>
           </a:p>
         </p:txBody>
@@ -8758,7 +9153,7 @@
                 <a:latin typeface="Microsoft JhengHei"/>
                 <a:ea typeface="Microsoft JhengHei"/>
               </a:rPr>
-              <a:t>募資討論稿・2026.09.14｜商業方案／數值假設待確認</a:t>
+              <a:t>募資討論稿・2026.09.16｜商業方案／數值假設待確認</a:t>
             </a:r>
           </a:p>
         </p:txBody>
@@ -8811,8 +9206,8 @@
         </p:nvSpPr>
         <p:spPr>
           <a:xfrm>
-            <a:off x="685800" y="2560320"/>
-            <a:ext cx="10789920" cy="822960"/>
+            <a:off x="676656" y="2606040"/>
+            <a:ext cx="3474720" cy="2286000"/>
           </a:xfrm>
           <a:prstGeom prst="roundRect">
             <a:avLst/>
@@ -8854,34 +9249,34 @@
         </p:nvSpPr>
         <p:spPr>
           <a:xfrm>
-            <a:off x="886968" y="2724912"/>
-            <a:ext cx="1097280" cy="365760"/>
-          </a:xfrm>
-          <a:prstGeom prst="rect">
-            <a:avLst/>
-          </a:prstGeom>
-          <a:noFill/>
-        </p:spPr>
-        <p:txBody>
-          <a:bodyPr wrap="square" lIns="9144" rIns="9144" tIns="9144" bIns="9144">
-            <a:spAutoFit/>
-          </a:bodyPr>
-          <a:lstStyle/>
-          <a:p>
-            <a:pPr>
-              <a:spcAft>
-                <a:spcPts val="800"/>
-              </a:spcAft>
-            </a:pPr>
-            <a:r>
-              <a:rPr sz="2000" b="1">
-                <a:solidFill>
-                  <a:srgbClr val="30EBC8"/>
-                </a:solidFill>
-                <a:latin typeface="Microsoft JhengHei"/>
-                <a:ea typeface="Microsoft JhengHei"/>
-              </a:rPr>
-              <a:t>保守</a:t>
+            <a:off x="859536" y="2999232"/>
+            <a:ext cx="3108960" cy="731520"/>
+          </a:xfrm>
+          <a:prstGeom prst="rect">
+            <a:avLst/>
+          </a:prstGeom>
+          <a:noFill/>
+        </p:spPr>
+        <p:txBody>
+          <a:bodyPr wrap="square" lIns="9144" rIns="9144" tIns="9144" bIns="9144">
+            <a:spAutoFit/>
+          </a:bodyPr>
+          <a:lstStyle/>
+          <a:p>
+            <a:pPr>
+              <a:spcAft>
+                <a:spcPts val="800"/>
+              </a:spcAft>
+            </a:pPr>
+            <a:r>
+              <a:rPr sz="3400" b="1">
+                <a:solidFill>
+                  <a:srgbClr val="FFCB66"/>
+                </a:solidFill>
+                <a:latin typeface="Microsoft JhengHei"/>
+                <a:ea typeface="Microsoft JhengHei"/>
+              </a:rPr>
+              <a:t>60.61 天</a:t>
             </a:r>
           </a:p>
         </p:txBody>
@@ -8894,128 +9289,48 @@
         </p:nvSpPr>
         <p:spPr>
           <a:xfrm>
-            <a:off x="2084831" y="2724912"/>
-            <a:ext cx="3657600" cy="365760"/>
-          </a:xfrm>
-          <a:prstGeom prst="rect">
-            <a:avLst/>
-          </a:prstGeom>
-          <a:noFill/>
-        </p:spPr>
-        <p:txBody>
-          <a:bodyPr wrap="square" lIns="9144" rIns="9144" tIns="9144" bIns="9144">
-            <a:spAutoFit/>
-          </a:bodyPr>
-          <a:lstStyle/>
-          <a:p>
-            <a:pPr>
-              <a:spcAft>
-                <a:spcPts val="800"/>
-              </a:spcAft>
-            </a:pPr>
-            <a:r>
-              <a:rPr sz="1700" b="0">
+            <a:off x="859536" y="4041648"/>
+            <a:ext cx="3108960" cy="457200"/>
+          </a:xfrm>
+          <a:prstGeom prst="rect">
+            <a:avLst/>
+          </a:prstGeom>
+          <a:noFill/>
+        </p:spPr>
+        <p:txBody>
+          <a:bodyPr wrap="square" lIns="9144" rIns="9144" tIns="9144" bIns="9144">
+            <a:spAutoFit/>
+          </a:bodyPr>
+          <a:lstStyle/>
+          <a:p>
+            <a:pPr>
+              <a:spcAft>
+                <a:spcPts val="800"/>
+              </a:spcAft>
+            </a:pPr>
+            <a:r>
+              <a:rPr sz="1800" b="0">
                 <a:solidFill>
                   <a:srgbClr val="F4F8FF"/>
                 </a:solidFill>
                 <a:latin typeface="Microsoft JhengHei"/>
                 <a:ea typeface="Microsoft JhengHei"/>
               </a:rPr>
-              <a:t>10 × 3 × 3 萬 = 90 萬</a:t>
-            </a:r>
-          </a:p>
-        </p:txBody>
-      </p:sp>
-      <p:sp>
-        <p:nvSpPr>
-          <p:cNvPr id="11" name="TextBox 10"/>
-          <p:cNvSpPr txBox="1"/>
-          <p:nvPr/>
-        </p:nvSpPr>
-        <p:spPr>
-          <a:xfrm>
-            <a:off x="5897880" y="2724912"/>
-            <a:ext cx="3017520" cy="365760"/>
-          </a:xfrm>
-          <a:prstGeom prst="rect">
-            <a:avLst/>
-          </a:prstGeom>
-          <a:noFill/>
-        </p:spPr>
-        <p:txBody>
-          <a:bodyPr wrap="square" lIns="9144" rIns="9144" tIns="9144" bIns="9144">
-            <a:spAutoFit/>
-          </a:bodyPr>
-          <a:lstStyle/>
-          <a:p>
-            <a:pPr>
-              <a:spcAft>
-                <a:spcPts val="800"/>
-              </a:spcAft>
-            </a:pPr>
-            <a:r>
-              <a:rPr sz="1700" b="0">
-                <a:solidFill>
-                  <a:srgbClr val="AAB7CC"/>
-                </a:solidFill>
-                <a:latin typeface="Microsoft JhengHei"/>
-                <a:ea typeface="Microsoft JhengHei"/>
-              </a:rPr>
-              <a:t>5 × 10 萬 = 50 萬</a:t>
-            </a:r>
-          </a:p>
-        </p:txBody>
-      </p:sp>
-      <p:sp>
-        <p:nvSpPr>
-          <p:cNvPr id="12" name="TextBox 11"/>
-          <p:cNvSpPr txBox="1"/>
-          <p:nvPr/>
-        </p:nvSpPr>
-        <p:spPr>
-          <a:xfrm>
-            <a:off x="9509760" y="2688336"/>
-            <a:ext cx="1737360" cy="457200"/>
-          </a:xfrm>
-          <a:prstGeom prst="rect">
-            <a:avLst/>
-          </a:prstGeom>
-          <a:noFill/>
-        </p:spPr>
-        <p:txBody>
-          <a:bodyPr wrap="square" lIns="9144" rIns="9144" tIns="9144" bIns="9144">
-            <a:spAutoFit/>
-          </a:bodyPr>
-          <a:lstStyle/>
-          <a:p>
-            <a:pPr>
-              <a:spcAft>
-                <a:spcPts val="800"/>
-              </a:spcAft>
-            </a:pPr>
-            <a:r>
-              <a:rPr sz="2300" b="1">
-                <a:solidFill>
-                  <a:srgbClr val="F4F8FF"/>
-                </a:solidFill>
-                <a:latin typeface="Microsoft JhengHei"/>
-                <a:ea typeface="Microsoft JhengHei"/>
-              </a:rPr>
-              <a:t>140 萬</a:t>
-            </a:r>
-          </a:p>
-        </p:txBody>
-      </p:sp>
-      <p:sp>
-        <p:nvSpPr>
-          <p:cNvPr id="13" name="Rounded Rectangle 12"/>
+              <a:t>100 個合格錢包</a:t>
+            </a:r>
+          </a:p>
+        </p:txBody>
+      </p:sp>
+      <p:sp>
+        <p:nvSpPr>
+          <p:cNvPr id="11" name="Rounded Rectangle 10"/>
           <p:cNvSpPr/>
           <p:nvPr/>
         </p:nvSpPr>
         <p:spPr>
           <a:xfrm>
-            <a:off x="685800" y="3529584"/>
-            <a:ext cx="10789920" cy="822960"/>
+            <a:off x="4361688" y="2606040"/>
+            <a:ext cx="3474720" cy="2286000"/>
           </a:xfrm>
           <a:prstGeom prst="roundRect">
             <a:avLst/>
@@ -9051,174 +9366,94 @@
       </p:sp>
       <p:sp>
         <p:nvSpPr>
-          <p:cNvPr id="14" name="TextBox 13"/>
-          <p:cNvSpPr txBox="1"/>
-          <p:nvPr/>
-        </p:nvSpPr>
-        <p:spPr>
-          <a:xfrm>
-            <a:off x="886968" y="3694176"/>
-            <a:ext cx="1097280" cy="365760"/>
-          </a:xfrm>
-          <a:prstGeom prst="rect">
-            <a:avLst/>
-          </a:prstGeom>
-          <a:noFill/>
-        </p:spPr>
-        <p:txBody>
-          <a:bodyPr wrap="square" lIns="9144" rIns="9144" tIns="9144" bIns="9144">
-            <a:spAutoFit/>
-          </a:bodyPr>
-          <a:lstStyle/>
-          <a:p>
-            <a:pPr>
-              <a:spcAft>
-                <a:spcPts val="800"/>
-              </a:spcAft>
-            </a:pPr>
-            <a:r>
-              <a:rPr sz="2000" b="1">
-                <a:solidFill>
-                  <a:srgbClr val="30EBC8"/>
-                </a:solidFill>
-                <a:latin typeface="Microsoft JhengHei"/>
-                <a:ea typeface="Microsoft JhengHei"/>
-              </a:rPr>
-              <a:t>基準</a:t>
-            </a:r>
-          </a:p>
-        </p:txBody>
-      </p:sp>
-      <p:sp>
-        <p:nvSpPr>
-          <p:cNvPr id="15" name="TextBox 14"/>
-          <p:cNvSpPr txBox="1"/>
-          <p:nvPr/>
-        </p:nvSpPr>
-        <p:spPr>
-          <a:xfrm>
-            <a:off x="2084831" y="3694176"/>
-            <a:ext cx="3657600" cy="365760"/>
-          </a:xfrm>
-          <a:prstGeom prst="rect">
-            <a:avLst/>
-          </a:prstGeom>
-          <a:noFill/>
-        </p:spPr>
-        <p:txBody>
-          <a:bodyPr wrap="square" lIns="9144" rIns="9144" tIns="9144" bIns="9144">
-            <a:spAutoFit/>
-          </a:bodyPr>
-          <a:lstStyle/>
-          <a:p>
-            <a:pPr>
-              <a:spcAft>
-                <a:spcPts val="800"/>
-              </a:spcAft>
-            </a:pPr>
-            <a:r>
-              <a:rPr sz="1700" b="0">
+          <p:cNvPr id="12" name="TextBox 11"/>
+          <p:cNvSpPr txBox="1"/>
+          <p:nvPr/>
+        </p:nvSpPr>
+        <p:spPr>
+          <a:xfrm>
+            <a:off x="4544568" y="2999232"/>
+            <a:ext cx="3108960" cy="731520"/>
+          </a:xfrm>
+          <a:prstGeom prst="rect">
+            <a:avLst/>
+          </a:prstGeom>
+          <a:noFill/>
+        </p:spPr>
+        <p:txBody>
+          <a:bodyPr wrap="square" lIns="9144" rIns="9144" tIns="9144" bIns="9144">
+            <a:spAutoFit/>
+          </a:bodyPr>
+          <a:lstStyle/>
+          <a:p>
+            <a:pPr>
+              <a:spcAft>
+                <a:spcPts val="800"/>
+              </a:spcAft>
+            </a:pPr>
+            <a:r>
+              <a:rPr sz="3400" b="1">
+                <a:solidFill>
+                  <a:srgbClr val="FFCB66"/>
+                </a:solidFill>
+                <a:latin typeface="Microsoft JhengHei"/>
+                <a:ea typeface="Microsoft JhengHei"/>
+              </a:rPr>
+              <a:t>6.06 天</a:t>
+            </a:r>
+          </a:p>
+        </p:txBody>
+      </p:sp>
+      <p:sp>
+        <p:nvSpPr>
+          <p:cNvPr id="13" name="TextBox 12"/>
+          <p:cNvSpPr txBox="1"/>
+          <p:nvPr/>
+        </p:nvSpPr>
+        <p:spPr>
+          <a:xfrm>
+            <a:off x="4544568" y="4041648"/>
+            <a:ext cx="3108960" cy="457200"/>
+          </a:xfrm>
+          <a:prstGeom prst="rect">
+            <a:avLst/>
+          </a:prstGeom>
+          <a:noFill/>
+        </p:spPr>
+        <p:txBody>
+          <a:bodyPr wrap="square" lIns="9144" rIns="9144" tIns="9144" bIns="9144">
+            <a:spAutoFit/>
+          </a:bodyPr>
+          <a:lstStyle/>
+          <a:p>
+            <a:pPr>
+              <a:spcAft>
+                <a:spcPts val="800"/>
+              </a:spcAft>
+            </a:pPr>
+            <a:r>
+              <a:rPr sz="1800" b="0">
                 <a:solidFill>
                   <a:srgbClr val="F4F8FF"/>
                 </a:solidFill>
                 <a:latin typeface="Microsoft JhengHei"/>
                 <a:ea typeface="Microsoft JhengHei"/>
               </a:rPr>
-              <a:t>20 × 4 × 3 萬 = 240 萬</a:t>
-            </a:r>
-          </a:p>
-        </p:txBody>
-      </p:sp>
-      <p:sp>
-        <p:nvSpPr>
-          <p:cNvPr id="16" name="TextBox 15"/>
-          <p:cNvSpPr txBox="1"/>
-          <p:nvPr/>
-        </p:nvSpPr>
-        <p:spPr>
-          <a:xfrm>
-            <a:off x="5897880" y="3694176"/>
-            <a:ext cx="3017520" cy="365760"/>
-          </a:xfrm>
-          <a:prstGeom prst="rect">
-            <a:avLst/>
-          </a:prstGeom>
-          <a:noFill/>
-        </p:spPr>
-        <p:txBody>
-          <a:bodyPr wrap="square" lIns="9144" rIns="9144" tIns="9144" bIns="9144">
-            <a:spAutoFit/>
-          </a:bodyPr>
-          <a:lstStyle/>
-          <a:p>
-            <a:pPr>
-              <a:spcAft>
-                <a:spcPts val="800"/>
-              </a:spcAft>
-            </a:pPr>
-            <a:r>
-              <a:rPr sz="1700" b="0">
-                <a:solidFill>
-                  <a:srgbClr val="AAB7CC"/>
-                </a:solidFill>
-                <a:latin typeface="Microsoft JhengHei"/>
-                <a:ea typeface="Microsoft JhengHei"/>
-              </a:rPr>
-              <a:t>15 × 10 萬 = 150 萬</a:t>
-            </a:r>
-          </a:p>
-        </p:txBody>
-      </p:sp>
-      <p:sp>
-        <p:nvSpPr>
-          <p:cNvPr id="17" name="TextBox 16"/>
-          <p:cNvSpPr txBox="1"/>
-          <p:nvPr/>
-        </p:nvSpPr>
-        <p:spPr>
-          <a:xfrm>
-            <a:off x="9509760" y="3657600"/>
-            <a:ext cx="1737360" cy="457200"/>
-          </a:xfrm>
-          <a:prstGeom prst="rect">
-            <a:avLst/>
-          </a:prstGeom>
-          <a:noFill/>
-        </p:spPr>
-        <p:txBody>
-          <a:bodyPr wrap="square" lIns="9144" rIns="9144" tIns="9144" bIns="9144">
-            <a:spAutoFit/>
-          </a:bodyPr>
-          <a:lstStyle/>
-          <a:p>
-            <a:pPr>
-              <a:spcAft>
-                <a:spcPts val="800"/>
-              </a:spcAft>
-            </a:pPr>
-            <a:r>
-              <a:rPr sz="2300" b="1">
-                <a:solidFill>
-                  <a:srgbClr val="F4F8FF"/>
-                </a:solidFill>
-                <a:latin typeface="Microsoft JhengHei"/>
-                <a:ea typeface="Microsoft JhengHei"/>
-              </a:rPr>
-              <a:t>390 萬</a:t>
-            </a:r>
-          </a:p>
-        </p:txBody>
-      </p:sp>
-      <p:sp>
-        <p:nvSpPr>
-          <p:cNvPr id="18" name="Rounded Rectangle 17"/>
+              <a:t>1,000 個合格錢包</a:t>
+            </a:r>
+          </a:p>
+        </p:txBody>
+      </p:sp>
+      <p:sp>
+        <p:nvSpPr>
+          <p:cNvPr id="14" name="Rounded Rectangle 13"/>
           <p:cNvSpPr/>
           <p:nvPr/>
         </p:nvSpPr>
         <p:spPr>
           <a:xfrm>
-            <a:off x="685800" y="4498848"/>
-            <a:ext cx="10789920" cy="822960"/>
+            <a:off x="8046720" y="2606040"/>
+            <a:ext cx="3474720" cy="2286000"/>
           </a:xfrm>
           <a:prstGeom prst="roundRect">
             <a:avLst/>
@@ -9254,54 +9489,94 @@
       </p:sp>
       <p:sp>
         <p:nvSpPr>
-          <p:cNvPr id="19" name="TextBox 18"/>
-          <p:cNvSpPr txBox="1"/>
-          <p:nvPr/>
-        </p:nvSpPr>
-        <p:spPr>
-          <a:xfrm>
-            <a:off x="886968" y="4663440"/>
-            <a:ext cx="1097280" cy="365760"/>
-          </a:xfrm>
-          <a:prstGeom prst="rect">
-            <a:avLst/>
-          </a:prstGeom>
-          <a:noFill/>
-        </p:spPr>
-        <p:txBody>
-          <a:bodyPr wrap="square" lIns="9144" rIns="9144" tIns="9144" bIns="9144">
-            <a:spAutoFit/>
-          </a:bodyPr>
-          <a:lstStyle/>
-          <a:p>
-            <a:pPr>
-              <a:spcAft>
-                <a:spcPts val="800"/>
-              </a:spcAft>
-            </a:pPr>
-            <a:r>
-              <a:rPr sz="2000" b="1">
-                <a:solidFill>
-                  <a:srgbClr val="30EBC8"/>
-                </a:solidFill>
-                <a:latin typeface="Microsoft JhengHei"/>
-                <a:ea typeface="Microsoft JhengHei"/>
-              </a:rPr>
-              <a:t>擴張</a:t>
-            </a:r>
-          </a:p>
-        </p:txBody>
-      </p:sp>
-      <p:sp>
-        <p:nvSpPr>
-          <p:cNvPr id="20" name="TextBox 19"/>
-          <p:cNvSpPr txBox="1"/>
-          <p:nvPr/>
-        </p:nvSpPr>
-        <p:spPr>
-          <a:xfrm>
-            <a:off x="2084831" y="4663440"/>
-            <a:ext cx="3657600" cy="365760"/>
+          <p:cNvPr id="15" name="TextBox 14"/>
+          <p:cNvSpPr txBox="1"/>
+          <p:nvPr/>
+        </p:nvSpPr>
+        <p:spPr>
+          <a:xfrm>
+            <a:off x="8229600" y="2999232"/>
+            <a:ext cx="3108960" cy="731520"/>
+          </a:xfrm>
+          <a:prstGeom prst="rect">
+            <a:avLst/>
+          </a:prstGeom>
+          <a:noFill/>
+        </p:spPr>
+        <p:txBody>
+          <a:bodyPr wrap="square" lIns="9144" rIns="9144" tIns="9144" bIns="9144">
+            <a:spAutoFit/>
+          </a:bodyPr>
+          <a:lstStyle/>
+          <a:p>
+            <a:pPr>
+              <a:spcAft>
+                <a:spcPts val="800"/>
+              </a:spcAft>
+            </a:pPr>
+            <a:r>
+              <a:rPr sz="3400" b="1">
+                <a:solidFill>
+                  <a:srgbClr val="FFCB66"/>
+                </a:solidFill>
+                <a:latin typeface="Microsoft JhengHei"/>
+                <a:ea typeface="Microsoft JhengHei"/>
+              </a:rPr>
+              <a:t>0.61 天</a:t>
+            </a:r>
+          </a:p>
+        </p:txBody>
+      </p:sp>
+      <p:sp>
+        <p:nvSpPr>
+          <p:cNvPr id="16" name="TextBox 15"/>
+          <p:cNvSpPr txBox="1"/>
+          <p:nvPr/>
+        </p:nvSpPr>
+        <p:spPr>
+          <a:xfrm>
+            <a:off x="8229600" y="4041648"/>
+            <a:ext cx="3108960" cy="457200"/>
+          </a:xfrm>
+          <a:prstGeom prst="rect">
+            <a:avLst/>
+          </a:prstGeom>
+          <a:noFill/>
+        </p:spPr>
+        <p:txBody>
+          <a:bodyPr wrap="square" lIns="9144" rIns="9144" tIns="9144" bIns="9144">
+            <a:spAutoFit/>
+          </a:bodyPr>
+          <a:lstStyle/>
+          <a:p>
+            <a:pPr>
+              <a:spcAft>
+                <a:spcPts val="800"/>
+              </a:spcAft>
+            </a:pPr>
+            <a:r>
+              <a:rPr sz="1800" b="0">
+                <a:solidFill>
+                  <a:srgbClr val="F4F8FF"/>
+                </a:solidFill>
+                <a:latin typeface="Microsoft JhengHei"/>
+                <a:ea typeface="Microsoft JhengHei"/>
+              </a:rPr>
+              <a:t>10,000 個合格錢包</a:t>
+            </a:r>
+          </a:p>
+        </p:txBody>
+      </p:sp>
+      <p:sp>
+        <p:nvSpPr>
+          <p:cNvPr id="17" name="TextBox 16"/>
+          <p:cNvSpPr txBox="1"/>
+          <p:nvPr/>
+        </p:nvSpPr>
+        <p:spPr>
+          <a:xfrm>
+            <a:off x="731520" y="5148072"/>
+            <a:ext cx="10607040" cy="365760"/>
           </a:xfrm>
           <a:prstGeom prst="rect">
             <a:avLst/>
@@ -9327,247 +9602,47 @@
                 <a:latin typeface="Microsoft JhengHei"/>
                 <a:ea typeface="Microsoft JhengHei"/>
               </a:rPr>
-              <a:t>50 × 6 × 3 萬 = 900 萬</a:t>
-            </a:r>
-          </a:p>
-        </p:txBody>
-      </p:sp>
-      <p:sp>
-        <p:nvSpPr>
-          <p:cNvPr id="21" name="TextBox 20"/>
-          <p:cNvSpPr txBox="1"/>
-          <p:nvPr/>
-        </p:nvSpPr>
-        <p:spPr>
-          <a:xfrm>
-            <a:off x="5897880" y="4663440"/>
-            <a:ext cx="3017520" cy="365760"/>
-          </a:xfrm>
-          <a:prstGeom prst="rect">
-            <a:avLst/>
-          </a:prstGeom>
-          <a:noFill/>
-        </p:spPr>
-        <p:txBody>
-          <a:bodyPr wrap="square" lIns="9144" rIns="9144" tIns="9144" bIns="9144">
-            <a:spAutoFit/>
-          </a:bodyPr>
-          <a:lstStyle/>
-          <a:p>
-            <a:pPr>
-              <a:spcAft>
-                <a:spcPts val="800"/>
-              </a:spcAft>
-            </a:pPr>
-            <a:r>
-              <a:rPr sz="1700" b="0">
+              <a:t>公式：200,000 ÷（合格錢包數 × 33）。錢包不等於真人。</a:t>
+            </a:r>
+          </a:p>
+        </p:txBody>
+      </p:sp>
+      <p:sp>
+        <p:nvSpPr>
+          <p:cNvPr id="18" name="TextBox 17"/>
+          <p:cNvSpPr txBox="1"/>
+          <p:nvPr/>
+        </p:nvSpPr>
+        <p:spPr>
+          <a:xfrm>
+            <a:off x="731520" y="5623560"/>
+            <a:ext cx="10607040" cy="365760"/>
+          </a:xfrm>
+          <a:prstGeom prst="rect">
+            <a:avLst/>
+          </a:prstGeom>
+          <a:noFill/>
+        </p:spPr>
+        <p:txBody>
+          <a:bodyPr wrap="square" lIns="9144" rIns="9144" tIns="9144" bIns="9144">
+            <a:spAutoFit/>
+          </a:bodyPr>
+          <a:lstStyle/>
+          <a:p>
+            <a:pPr>
+              <a:spcAft>
+                <a:spcPts val="800"/>
+              </a:spcAft>
+            </a:pPr>
+            <a:r>
+              <a:rPr sz="1400" b="0">
                 <a:solidFill>
                   <a:srgbClr val="AAB7CC"/>
                 </a:solidFill>
                 <a:latin typeface="Microsoft JhengHei"/>
                 <a:ea typeface="Microsoft JhengHei"/>
               </a:rPr>
-              <a:t>30 × 10 萬 = 300 萬</a:t>
-            </a:r>
-          </a:p>
-        </p:txBody>
-      </p:sp>
-      <p:sp>
-        <p:nvSpPr>
-          <p:cNvPr id="22" name="TextBox 21"/>
-          <p:cNvSpPr txBox="1"/>
-          <p:nvPr/>
-        </p:nvSpPr>
-        <p:spPr>
-          <a:xfrm>
-            <a:off x="9509760" y="4626864"/>
-            <a:ext cx="1737360" cy="457200"/>
-          </a:xfrm>
-          <a:prstGeom prst="rect">
-            <a:avLst/>
-          </a:prstGeom>
-          <a:noFill/>
-        </p:spPr>
-        <p:txBody>
-          <a:bodyPr wrap="square" lIns="9144" rIns="9144" tIns="9144" bIns="9144">
-            <a:spAutoFit/>
-          </a:bodyPr>
-          <a:lstStyle/>
-          <a:p>
-            <a:pPr>
-              <a:spcAft>
-                <a:spcPts val="800"/>
-              </a:spcAft>
-            </a:pPr>
-            <a:r>
-              <a:rPr sz="2300" b="1">
-                <a:solidFill>
-                  <a:srgbClr val="F4F8FF"/>
-                </a:solidFill>
-                <a:latin typeface="Microsoft JhengHei"/>
-                <a:ea typeface="Microsoft JhengHei"/>
-              </a:rPr>
-              <a:t>1,200 萬</a:t>
-            </a:r>
-          </a:p>
-        </p:txBody>
-      </p:sp>
-      <p:sp>
-        <p:nvSpPr>
-          <p:cNvPr id="23" name="TextBox 22"/>
-          <p:cNvSpPr txBox="1"/>
-          <p:nvPr/>
-        </p:nvSpPr>
-        <p:spPr>
-          <a:xfrm>
-            <a:off x="2084831" y="2148840"/>
-            <a:ext cx="3657600" cy="274320"/>
-          </a:xfrm>
-          <a:prstGeom prst="rect">
-            <a:avLst/>
-          </a:prstGeom>
-          <a:noFill/>
-        </p:spPr>
-        <p:txBody>
-          <a:bodyPr wrap="square" lIns="9144" rIns="9144" tIns="9144" bIns="9144">
-            <a:spAutoFit/>
-          </a:bodyPr>
-          <a:lstStyle/>
-          <a:p>
-            <a:pPr>
-              <a:spcAft>
-                <a:spcPts val="800"/>
-              </a:spcAft>
-            </a:pPr>
-            <a:r>
-              <a:rPr sz="1200" b="0">
-                <a:solidFill>
-                  <a:srgbClr val="AAB7CC"/>
-                </a:solidFill>
-                <a:latin typeface="Microsoft JhengHei"/>
-                <a:ea typeface="Microsoft JhengHei"/>
-              </a:rPr>
-              <a:t>主辦方 × 年場次 × 單價</a:t>
-            </a:r>
-          </a:p>
-        </p:txBody>
-      </p:sp>
-      <p:sp>
-        <p:nvSpPr>
-          <p:cNvPr id="24" name="TextBox 23"/>
-          <p:cNvSpPr txBox="1"/>
-          <p:nvPr/>
-        </p:nvSpPr>
-        <p:spPr>
-          <a:xfrm>
-            <a:off x="5897880" y="2148840"/>
-            <a:ext cx="3017520" cy="274320"/>
-          </a:xfrm>
-          <a:prstGeom prst="rect">
-            <a:avLst/>
-          </a:prstGeom>
-          <a:noFill/>
-        </p:spPr>
-        <p:txBody>
-          <a:bodyPr wrap="square" lIns="9144" rIns="9144" tIns="9144" bIns="9144">
-            <a:spAutoFit/>
-          </a:bodyPr>
-          <a:lstStyle/>
-          <a:p>
-            <a:pPr>
-              <a:spcAft>
-                <a:spcPts val="800"/>
-              </a:spcAft>
-            </a:pPr>
-            <a:r>
-              <a:rPr sz="1200" b="0">
-                <a:solidFill>
-                  <a:srgbClr val="AAB7CC"/>
-                </a:solidFill>
-                <a:latin typeface="Microsoft JhengHei"/>
-                <a:ea typeface="Microsoft JhengHei"/>
-              </a:rPr>
-              <a:t>獨立品牌專案 × 單價</a:t>
-            </a:r>
-          </a:p>
-        </p:txBody>
-      </p:sp>
-      <p:sp>
-        <p:nvSpPr>
-          <p:cNvPr id="25" name="TextBox 24"/>
-          <p:cNvSpPr txBox="1"/>
-          <p:nvPr/>
-        </p:nvSpPr>
-        <p:spPr>
-          <a:xfrm>
-            <a:off x="9509760" y="2148840"/>
-            <a:ext cx="1371600" cy="274320"/>
-          </a:xfrm>
-          <a:prstGeom prst="rect">
-            <a:avLst/>
-          </a:prstGeom>
-          <a:noFill/>
-        </p:spPr>
-        <p:txBody>
-          <a:bodyPr wrap="square" lIns="9144" rIns="9144" tIns="9144" bIns="9144">
-            <a:spAutoFit/>
-          </a:bodyPr>
-          <a:lstStyle/>
-          <a:p>
-            <a:pPr>
-              <a:spcAft>
-                <a:spcPts val="800"/>
-              </a:spcAft>
-            </a:pPr>
-            <a:r>
-              <a:rPr sz="1200" b="0">
-                <a:solidFill>
-                  <a:srgbClr val="AAB7CC"/>
-                </a:solidFill>
-                <a:latin typeface="Microsoft JhengHei"/>
-                <a:ea typeface="Microsoft JhengHei"/>
-              </a:rPr>
-              <a:t>合計</a:t>
-            </a:r>
-          </a:p>
-        </p:txBody>
-      </p:sp>
-      <p:sp>
-        <p:nvSpPr>
-          <p:cNvPr id="26" name="TextBox 25"/>
-          <p:cNvSpPr txBox="1"/>
-          <p:nvPr/>
-        </p:nvSpPr>
-        <p:spPr>
-          <a:xfrm>
-            <a:off x="713232" y="5696712"/>
-            <a:ext cx="10789920" cy="365760"/>
-          </a:xfrm>
-          <a:prstGeom prst="rect">
-            <a:avLst/>
-          </a:prstGeom>
-          <a:noFill/>
-        </p:spPr>
-        <p:txBody>
-          <a:bodyPr wrap="square" lIns="9144" rIns="9144" tIns="9144" bIns="9144">
-            <a:spAutoFit/>
-          </a:bodyPr>
-          <a:lstStyle/>
-          <a:p>
-            <a:pPr>
-              <a:spcAft>
-                <a:spcPts val="800"/>
-              </a:spcAft>
-            </a:pPr>
-            <a:r>
-              <a:rPr sz="1500" b="0">
-                <a:solidFill>
-                  <a:srgbClr val="FFCB66"/>
-                </a:solidFill>
-                <a:latin typeface="Microsoft JhengHei"/>
-                <a:ea typeface="Microsoft JhengHei"/>
-              </a:rPr>
-              <a:t>單場假設：收入 3 萬 − 直接成本 1.2 萬 = 貢獻 1.8 萬（60%）；成本待試辦驗證。</a:t>
+              <a:t>固定等級庫存試算；不含成長過程、行為、價格或流動性預測。</a:t>
             </a:r>
           </a:p>
         </p:txBody>
@@ -9676,7 +9751,7 @@
                 <a:latin typeface="Microsoft JhengHei"/>
                 <a:ea typeface="Microsoft JhengHei"/>
               </a:rPr>
-              <a:t>NEONSHIFT  /  募資方案｜可調整假設，尚未定案</a:t>
+              <a:t>NEONSHIFT  /  經濟保護｜待實作與驗證</a:t>
             </a:r>
           </a:p>
         </p:txBody>
@@ -9716,7 +9791,7 @@
                 <a:latin typeface="Microsoft JhengHei"/>
                 <a:ea typeface="Microsoft JhengHei"/>
               </a:rPr>
-              <a:t>建議募資 NT$1,200 萬，取得 12 個月驗證窗口</a:t>
+              <a:t>把遊戲成長、獎勵預算與真實收入分開</a:t>
             </a:r>
           </a:p>
         </p:txBody>
@@ -9756,7 +9831,7 @@
                 <a:latin typeface="Microsoft JhengHei"/>
                 <a:ea typeface="Microsoft JhengHei"/>
               </a:rPr>
-              <a:t>以約 NT$100 萬／月的含緩衝現金配置示意；估值、股權比例與工具待議。</a:t>
+              <a:t>驗收目標：沒有新玩家買幣、沒有幣價上漲，遊戲仍能提供核心體驗。</a:t>
             </a:r>
           </a:p>
         </p:txBody>
@@ -9796,7 +9871,7 @@
                 <a:latin typeface="Microsoft JhengHei"/>
                 <a:ea typeface="Microsoft JhengHei"/>
               </a:rPr>
-              <a:t>募資討論稿・2026.09.14｜商業方案／數值假設待確認</a:t>
+              <a:t>募資討論稿・2026.09.16｜商業方案／數值假設待確認</a:t>
             </a:r>
           </a:p>
         </p:txBody>
@@ -9843,60 +9918,20 @@
       </p:sp>
       <p:sp>
         <p:nvSpPr>
-          <p:cNvPr id="8" name="TextBox 7"/>
-          <p:cNvSpPr txBox="1"/>
-          <p:nvPr/>
-        </p:nvSpPr>
-        <p:spPr>
-          <a:xfrm>
-            <a:off x="731520" y="2560320"/>
-            <a:ext cx="3657600" cy="365760"/>
-          </a:xfrm>
-          <a:prstGeom prst="rect">
-            <a:avLst/>
-          </a:prstGeom>
-          <a:noFill/>
-        </p:spPr>
-        <p:txBody>
-          <a:bodyPr wrap="square" lIns="9144" rIns="9144" tIns="9144" bIns="9144">
-            <a:spAutoFit/>
-          </a:bodyPr>
-          <a:lstStyle/>
-          <a:p>
-            <a:pPr>
-              <a:spcAft>
-                <a:spcPts val="800"/>
-              </a:spcAft>
-            </a:pPr>
-            <a:r>
-              <a:rPr sz="1800" b="0">
-                <a:solidFill>
-                  <a:srgbClr val="F4F8FF"/>
-                </a:solidFill>
-                <a:latin typeface="Microsoft JhengHei"/>
-                <a:ea typeface="Microsoft JhengHei"/>
-              </a:rPr>
-              <a:t>产品與體驗</a:t>
-            </a:r>
-          </a:p>
-        </p:txBody>
-      </p:sp>
-      <p:sp>
-        <p:nvSpPr>
-          <p:cNvPr id="9" name="Rounded Rectangle 8"/>
+          <p:cNvPr id="8" name="Rounded Rectangle 7"/>
           <p:cNvSpPr/>
           <p:nvPr/>
         </p:nvSpPr>
         <p:spPr>
           <a:xfrm>
-            <a:off x="4389120" y="2633472"/>
-            <a:ext cx="4114800" cy="173736"/>
+            <a:off x="676656" y="2514600"/>
+            <a:ext cx="3477768" cy="3063240"/>
           </a:xfrm>
           <a:prstGeom prst="roundRect">
             <a:avLst/>
           </a:prstGeom>
           <a:solidFill>
-            <a:srgbClr val="30EBC8"/>
+            <a:srgbClr val="0B1020"/>
           </a:solidFill>
           <a:ln>
             <a:noFill/>
@@ -9926,40 +9961,80 @@
       </p:sp>
       <p:sp>
         <p:nvSpPr>
+          <p:cNvPr id="9" name="TextBox 8"/>
+          <p:cNvSpPr txBox="1"/>
+          <p:nvPr/>
+        </p:nvSpPr>
+        <p:spPr>
+          <a:xfrm>
+            <a:off x="886968" y="2715768"/>
+            <a:ext cx="3057144" cy="320040"/>
+          </a:xfrm>
+          <a:prstGeom prst="rect">
+            <a:avLst/>
+          </a:prstGeom>
+          <a:noFill/>
+        </p:spPr>
+        <p:txBody>
+          <a:bodyPr wrap="square" lIns="9144" rIns="9144" tIns="9144" bIns="9144">
+            <a:spAutoFit/>
+          </a:bodyPr>
+          <a:lstStyle/>
+          <a:p>
+            <a:pPr>
+              <a:spcAft>
+                <a:spcPts val="800"/>
+              </a:spcAft>
+            </a:pPr>
+            <a:r>
+              <a:rPr sz="1300" b="0">
+                <a:solidFill>
+                  <a:srgbClr val="30EBC8"/>
+                </a:solidFill>
+                <a:latin typeface="Microsoft JhengHei"/>
+                <a:ea typeface="Microsoft JhengHei"/>
+              </a:rPr>
+              <a:t>01</a:t>
+            </a:r>
+          </a:p>
+        </p:txBody>
+      </p:sp>
+      <p:sp>
+        <p:nvSpPr>
           <p:cNvPr id="10" name="TextBox 9"/>
           <p:cNvSpPr txBox="1"/>
           <p:nvPr/>
         </p:nvSpPr>
         <p:spPr>
           <a:xfrm>
-            <a:off x="9144000" y="2560320"/>
-            <a:ext cx="2286000" cy="365760"/>
-          </a:xfrm>
-          <a:prstGeom prst="rect">
-            <a:avLst/>
-          </a:prstGeom>
-          <a:noFill/>
-        </p:spPr>
-        <p:txBody>
-          <a:bodyPr wrap="square" lIns="9144" rIns="9144" tIns="9144" bIns="9144">
-            <a:spAutoFit/>
-          </a:bodyPr>
-          <a:lstStyle/>
-          <a:p>
-            <a:pPr>
-              <a:spcAft>
-                <a:spcPts val="800"/>
-              </a:spcAft>
-            </a:pPr>
-            <a:r>
-              <a:rPr sz="1800" b="0">
+            <a:off x="886968" y="3236976"/>
+            <a:ext cx="3057144" cy="530352"/>
+          </a:xfrm>
+          <a:prstGeom prst="rect">
+            <a:avLst/>
+          </a:prstGeom>
+          <a:noFill/>
+        </p:spPr>
+        <p:txBody>
+          <a:bodyPr wrap="square" lIns="9144" rIns="9144" tIns="9144" bIns="9144">
+            <a:spAutoFit/>
+          </a:bodyPr>
+          <a:lstStyle/>
+          <a:p>
+            <a:pPr>
+              <a:spcAft>
+                <a:spcPts val="800"/>
+              </a:spcAft>
+            </a:pPr>
+            <a:r>
+              <a:rPr sz="2200" b="1">
                 <a:solidFill>
                   <a:srgbClr val="F4F8FF"/>
                 </a:solidFill>
                 <a:latin typeface="Microsoft JhengHei"/>
                 <a:ea typeface="Microsoft JhengHei"/>
               </a:rPr>
-              <a:t>45%  /  540 萬</a:t>
+              <a:t>成長不中斷</a:t>
             </a:r>
           </a:p>
         </p:txBody>
@@ -9972,34 +10047,68 @@
         </p:nvSpPr>
         <p:spPr>
           <a:xfrm>
-            <a:off x="731520" y="3246120"/>
-            <a:ext cx="3657600" cy="365760"/>
-          </a:xfrm>
-          <a:prstGeom prst="rect">
-            <a:avLst/>
-          </a:prstGeom>
-          <a:noFill/>
-        </p:spPr>
-        <p:txBody>
-          <a:bodyPr wrap="square" lIns="9144" rIns="9144" tIns="9144" bIns="9144">
-            <a:spAutoFit/>
-          </a:bodyPr>
-          <a:lstStyle/>
-          <a:p>
-            <a:pPr>
-              <a:spcAft>
-                <a:spcPts val="800"/>
-              </a:spcAft>
-            </a:pPr>
-            <a:r>
-              <a:rPr sz="1800" b="0">
-                <a:solidFill>
-                  <a:srgbClr val="F4F8FF"/>
-                </a:solidFill>
-                <a:latin typeface="Microsoft JhengHei"/>
-                <a:ea typeface="Microsoft JhengHei"/>
-              </a:rPr>
-              <a:t>合作試辦與客戶開發</a:t>
+            <a:off x="886968" y="3931920"/>
+            <a:ext cx="3057144" cy="1508760"/>
+          </a:xfrm>
+          <a:prstGeom prst="rect">
+            <a:avLst/>
+          </a:prstGeom>
+          <a:noFill/>
+        </p:spPr>
+        <p:txBody>
+          <a:bodyPr wrap="square" lIns="9144" rIns="9144" tIns="9144" bIns="9144">
+            <a:spAutoFit/>
+          </a:bodyPr>
+          <a:lstStyle/>
+          <a:p>
+            <a:pPr>
+              <a:spcAft>
+                <a:spcPts val="800"/>
+              </a:spcAft>
+            </a:pPr>
+            <a:r>
+              <a:rPr sz="1700" b="0">
+                <a:solidFill>
+                  <a:srgbClr val="AAB7CC"/>
+                </a:solidFill>
+                <a:latin typeface="Microsoft JhengHei"/>
+                <a:ea typeface="Microsoft JhengHei"/>
+              </a:rPr>
+              <a:t>打卡與代幣轉帳拆分</a:t>
+            </a:r>
+          </a:p>
+          <a:p>
+            <a:pPr>
+              <a:spcAft>
+                <a:spcPts val="800"/>
+              </a:spcAft>
+            </a:pPr>
+            <a:r>
+              <a:rPr sz="1700" b="0">
+                <a:solidFill>
+                  <a:srgbClr val="AAB7CC"/>
+                </a:solidFill>
+                <a:latin typeface="Microsoft JhengHei"/>
+                <a:ea typeface="Microsoft JhengHei"/>
+              </a:rPr>
+              <a:t>金庫為零仍累積進度</a:t>
+            </a:r>
+          </a:p>
+          <a:p>
+            <a:pPr>
+              <a:spcAft>
+                <a:spcPts val="800"/>
+              </a:spcAft>
+            </a:pPr>
+            <a:r>
+              <a:rPr sz="1700" b="0">
+                <a:solidFill>
+                  <a:srgbClr val="AAB7CC"/>
+                </a:solidFill>
+                <a:latin typeface="Microsoft JhengHei"/>
+                <a:ea typeface="Microsoft JhengHei"/>
+              </a:rPr>
+              <a:t>不產生未撥款欠款</a:t>
             </a:r>
           </a:p>
         </p:txBody>
@@ -10012,14 +10121,14 @@
         </p:nvSpPr>
         <p:spPr>
           <a:xfrm>
-            <a:off x="4389120" y="3319272"/>
-            <a:ext cx="2286000" cy="173736"/>
+            <a:off x="4355592" y="2514600"/>
+            <a:ext cx="3477768" cy="3063240"/>
           </a:xfrm>
           <a:prstGeom prst="roundRect">
             <a:avLst/>
           </a:prstGeom>
           <a:solidFill>
-            <a:srgbClr val="24C8FF"/>
+            <a:srgbClr val="0B1020"/>
           </a:solidFill>
           <a:ln>
             <a:noFill/>
@@ -10055,94 +10164,168 @@
         </p:nvSpPr>
         <p:spPr>
           <a:xfrm>
-            <a:off x="9144000" y="3246120"/>
-            <a:ext cx="2286000" cy="365760"/>
-          </a:xfrm>
-          <a:prstGeom prst="rect">
-            <a:avLst/>
-          </a:prstGeom>
-          <a:noFill/>
-        </p:spPr>
-        <p:txBody>
-          <a:bodyPr wrap="square" lIns="9144" rIns="9144" tIns="9144" bIns="9144">
-            <a:spAutoFit/>
-          </a:bodyPr>
-          <a:lstStyle/>
-          <a:p>
-            <a:pPr>
-              <a:spcAft>
-                <a:spcPts val="800"/>
-              </a:spcAft>
-            </a:pPr>
-            <a:r>
-              <a:rPr sz="1800" b="0">
+            <a:off x="4565904" y="2715768"/>
+            <a:ext cx="3057144" cy="320040"/>
+          </a:xfrm>
+          <a:prstGeom prst="rect">
+            <a:avLst/>
+          </a:prstGeom>
+          <a:noFill/>
+        </p:spPr>
+        <p:txBody>
+          <a:bodyPr wrap="square" lIns="9144" rIns="9144" tIns="9144" bIns="9144">
+            <a:spAutoFit/>
+          </a:bodyPr>
+          <a:lstStyle/>
+          <a:p>
+            <a:pPr>
+              <a:spcAft>
+                <a:spcPts val="800"/>
+              </a:spcAft>
+            </a:pPr>
+            <a:r>
+              <a:rPr sz="1300" b="0">
+                <a:solidFill>
+                  <a:srgbClr val="30EBC8"/>
+                </a:solidFill>
+                <a:latin typeface="Microsoft JhengHei"/>
+                <a:ea typeface="Microsoft JhengHei"/>
+              </a:rPr>
+              <a:t>02</a:t>
+            </a:r>
+          </a:p>
+        </p:txBody>
+      </p:sp>
+      <p:sp>
+        <p:nvSpPr>
+          <p:cNvPr id="14" name="TextBox 13"/>
+          <p:cNvSpPr txBox="1"/>
+          <p:nvPr/>
+        </p:nvSpPr>
+        <p:spPr>
+          <a:xfrm>
+            <a:off x="4565904" y="3236976"/>
+            <a:ext cx="3057144" cy="530352"/>
+          </a:xfrm>
+          <a:prstGeom prst="rect">
+            <a:avLst/>
+          </a:prstGeom>
+          <a:noFill/>
+        </p:spPr>
+        <p:txBody>
+          <a:bodyPr wrap="square" lIns="9144" rIns="9144" tIns="9144" bIns="9144">
+            <a:spAutoFit/>
+          </a:bodyPr>
+          <a:lstStyle/>
+          <a:p>
+            <a:pPr>
+              <a:spcAft>
+                <a:spcPts val="800"/>
+              </a:spcAft>
+            </a:pPr>
+            <a:r>
+              <a:rPr sz="2200" b="1">
                 <a:solidFill>
                   <a:srgbClr val="F4F8FF"/>
                 </a:solidFill>
                 <a:latin typeface="Microsoft JhengHei"/>
                 <a:ea typeface="Microsoft JhengHei"/>
               </a:rPr>
-              <a:t>25%  /  300 萬</a:t>
-            </a:r>
-          </a:p>
-        </p:txBody>
-      </p:sp>
-      <p:sp>
-        <p:nvSpPr>
-          <p:cNvPr id="14" name="TextBox 13"/>
-          <p:cNvSpPr txBox="1"/>
-          <p:nvPr/>
-        </p:nvSpPr>
-        <p:spPr>
-          <a:xfrm>
-            <a:off x="731520" y="3931920"/>
-            <a:ext cx="3657600" cy="365760"/>
-          </a:xfrm>
-          <a:prstGeom prst="rect">
-            <a:avLst/>
-          </a:prstGeom>
-          <a:noFill/>
-        </p:spPr>
-        <p:txBody>
-          <a:bodyPr wrap="square" lIns="9144" rIns="9144" tIns="9144" bIns="9144">
-            <a:spAutoFit/>
-          </a:bodyPr>
-          <a:lstStyle/>
-          <a:p>
-            <a:pPr>
-              <a:spcAft>
-                <a:spcPts val="800"/>
-              </a:spcAft>
-            </a:pPr>
-            <a:r>
-              <a:rPr sz="1800" b="0">
-                <a:solidFill>
-                  <a:srgbClr val="F4F8FF"/>
-                </a:solidFill>
-                <a:latin typeface="Microsoft JhengHei"/>
-                <a:ea typeface="Microsoft JhengHei"/>
-              </a:rPr>
-              <a:t>營運、資料保護與法務</a:t>
-            </a:r>
-          </a:p>
-        </p:txBody>
-      </p:sp>
-      <p:sp>
-        <p:nvSpPr>
-          <p:cNvPr id="15" name="Rounded Rectangle 14"/>
+              <a:t>發放有上限</a:t>
+            </a:r>
+          </a:p>
+        </p:txBody>
+      </p:sp>
+      <p:sp>
+        <p:nvSpPr>
+          <p:cNvPr id="15" name="TextBox 14"/>
+          <p:cNvSpPr txBox="1"/>
+          <p:nvPr/>
+        </p:nvSpPr>
+        <p:spPr>
+          <a:xfrm>
+            <a:off x="4565904" y="3931920"/>
+            <a:ext cx="3057144" cy="1508760"/>
+          </a:xfrm>
+          <a:prstGeom prst="rect">
+            <a:avLst/>
+          </a:prstGeom>
+          <a:noFill/>
+        </p:spPr>
+        <p:txBody>
+          <a:bodyPr wrap="square" lIns="9144" rIns="9144" tIns="9144" bIns="9144">
+            <a:spAutoFit/>
+          </a:bodyPr>
+          <a:lstStyle/>
+          <a:p>
+            <a:pPr>
+              <a:spcAft>
+                <a:spcPts val="800"/>
+              </a:spcAft>
+            </a:pPr>
+            <a:r>
+              <a:rPr sz="1700" b="0">
+                <a:solidFill>
+                  <a:srgbClr val="AAB7CC"/>
+                </a:solidFill>
+                <a:latin typeface="Microsoft JhengHei"/>
+                <a:ea typeface="Microsoft JhengHei"/>
+              </a:rPr>
+              <a:t>全站期間預算先撥款</a:t>
+            </a:r>
+          </a:p>
+          <a:p>
+            <a:pPr>
+              <a:spcAft>
+                <a:spcPts val="800"/>
+              </a:spcAft>
+            </a:pPr>
+            <a:r>
+              <a:rPr sz="1700" b="0">
+                <a:solidFill>
+                  <a:srgbClr val="AAB7CC"/>
+                </a:solidFill>
+                <a:latin typeface="Microsoft JhengHei"/>
+                <a:ea typeface="Microsoft JhengHei"/>
+              </a:rPr>
+              <a:t>版本、個人封頂與對帳</a:t>
+            </a:r>
+          </a:p>
+          <a:p>
+            <a:pPr>
+              <a:spcAft>
+                <a:spcPts val="800"/>
+              </a:spcAft>
+            </a:pPr>
+            <a:r>
+              <a:rPr sz="1700" b="0">
+                <a:solidFill>
+                  <a:srgbClr val="AAB7CC"/>
+                </a:solidFill>
+                <a:latin typeface="Microsoft JhengHei"/>
+                <a:ea typeface="Microsoft JhengHei"/>
+              </a:rPr>
+              <a:t>反作弊及撤銷窗口</a:t>
+            </a:r>
+          </a:p>
+        </p:txBody>
+      </p:sp>
+      <p:sp>
+        <p:nvSpPr>
+          <p:cNvPr id="16" name="Rounded Rectangle 15"/>
           <p:cNvSpPr/>
           <p:nvPr/>
         </p:nvSpPr>
         <p:spPr>
           <a:xfrm>
-            <a:off x="4389120" y="4005072"/>
-            <a:ext cx="1371600" cy="173736"/>
+            <a:off x="8034528" y="2514600"/>
+            <a:ext cx="3477768" cy="3063240"/>
           </a:xfrm>
           <a:prstGeom prst="roundRect">
             <a:avLst/>
           </a:prstGeom>
           <a:solidFill>
-            <a:srgbClr val="9B6CFF"/>
+            <a:srgbClr val="0B1020"/>
           </a:solidFill>
           <a:ln>
             <a:noFill/>
@@ -10172,124 +10355,81 @@
       </p:sp>
       <p:sp>
         <p:nvSpPr>
-          <p:cNvPr id="16" name="TextBox 15"/>
-          <p:cNvSpPr txBox="1"/>
-          <p:nvPr/>
-        </p:nvSpPr>
-        <p:spPr>
-          <a:xfrm>
-            <a:off x="9144000" y="3931920"/>
-            <a:ext cx="2286000" cy="365760"/>
-          </a:xfrm>
-          <a:prstGeom prst="rect">
-            <a:avLst/>
-          </a:prstGeom>
-          <a:noFill/>
-        </p:spPr>
-        <p:txBody>
-          <a:bodyPr wrap="square" lIns="9144" rIns="9144" tIns="9144" bIns="9144">
-            <a:spAutoFit/>
-          </a:bodyPr>
-          <a:lstStyle/>
-          <a:p>
-            <a:pPr>
-              <a:spcAft>
-                <a:spcPts val="800"/>
-              </a:spcAft>
-            </a:pPr>
-            <a:r>
-              <a:rPr sz="1800" b="0">
+          <p:cNvPr id="17" name="TextBox 16"/>
+          <p:cNvSpPr txBox="1"/>
+          <p:nvPr/>
+        </p:nvSpPr>
+        <p:spPr>
+          <a:xfrm>
+            <a:off x="8244840" y="2715768"/>
+            <a:ext cx="3057144" cy="320040"/>
+          </a:xfrm>
+          <a:prstGeom prst="rect">
+            <a:avLst/>
+          </a:prstGeom>
+          <a:noFill/>
+        </p:spPr>
+        <p:txBody>
+          <a:bodyPr wrap="square" lIns="9144" rIns="9144" tIns="9144" bIns="9144">
+            <a:spAutoFit/>
+          </a:bodyPr>
+          <a:lstStyle/>
+          <a:p>
+            <a:pPr>
+              <a:spcAft>
+                <a:spcPts val="800"/>
+              </a:spcAft>
+            </a:pPr>
+            <a:r>
+              <a:rPr sz="1300" b="0">
+                <a:solidFill>
+                  <a:srgbClr val="30EBC8"/>
+                </a:solidFill>
+                <a:latin typeface="Microsoft JhengHei"/>
+                <a:ea typeface="Microsoft JhengHei"/>
+              </a:rPr>
+              <a:t>03</a:t>
+            </a:r>
+          </a:p>
+        </p:txBody>
+      </p:sp>
+      <p:sp>
+        <p:nvSpPr>
+          <p:cNvPr id="18" name="TextBox 17"/>
+          <p:cNvSpPr txBox="1"/>
+          <p:nvPr/>
+        </p:nvSpPr>
+        <p:spPr>
+          <a:xfrm>
+            <a:off x="8244840" y="3236976"/>
+            <a:ext cx="3057144" cy="530352"/>
+          </a:xfrm>
+          <a:prstGeom prst="rect">
+            <a:avLst/>
+          </a:prstGeom>
+          <a:noFill/>
+        </p:spPr>
+        <p:txBody>
+          <a:bodyPr wrap="square" lIns="9144" rIns="9144" tIns="9144" bIns="9144">
+            <a:spAutoFit/>
+          </a:bodyPr>
+          <a:lstStyle/>
+          <a:p>
+            <a:pPr>
+              <a:spcAft>
+                <a:spcPts val="800"/>
+              </a:spcAft>
+            </a:pPr>
+            <a:r>
+              <a:rPr sz="2200" b="1">
                 <a:solidFill>
                   <a:srgbClr val="F4F8FF"/>
                 </a:solidFill>
                 <a:latin typeface="Microsoft JhengHei"/>
                 <a:ea typeface="Microsoft JhengHei"/>
               </a:rPr>
-              <a:t>15%  /  180 萬</a:t>
-            </a:r>
-          </a:p>
-        </p:txBody>
-      </p:sp>
-      <p:sp>
-        <p:nvSpPr>
-          <p:cNvPr id="17" name="TextBox 16"/>
-          <p:cNvSpPr txBox="1"/>
-          <p:nvPr/>
-        </p:nvSpPr>
-        <p:spPr>
-          <a:xfrm>
-            <a:off x="731520" y="4617720"/>
-            <a:ext cx="3657600" cy="365760"/>
-          </a:xfrm>
-          <a:prstGeom prst="rect">
-            <a:avLst/>
-          </a:prstGeom>
-          <a:noFill/>
-        </p:spPr>
-        <p:txBody>
-          <a:bodyPr wrap="square" lIns="9144" rIns="9144" tIns="9144" bIns="9144">
-            <a:spAutoFit/>
-          </a:bodyPr>
-          <a:lstStyle/>
-          <a:p>
-            <a:pPr>
-              <a:spcAft>
-                <a:spcPts val="800"/>
-              </a:spcAft>
-            </a:pPr>
-            <a:r>
-              <a:rPr sz="1800" b="0">
-                <a:solidFill>
-                  <a:srgbClr val="F4F8FF"/>
-                </a:solidFill>
-                <a:latin typeface="Microsoft JhengHei"/>
-                <a:ea typeface="Microsoft JhengHei"/>
-              </a:rPr>
-              <a:t>現金緩衝</a:t>
-            </a:r>
-          </a:p>
-        </p:txBody>
-      </p:sp>
-      <p:sp>
-        <p:nvSpPr>
-          <p:cNvPr id="18" name="Rounded Rectangle 17"/>
-          <p:cNvSpPr/>
-          <p:nvPr/>
-        </p:nvSpPr>
-        <p:spPr>
-          <a:xfrm>
-            <a:off x="4389120" y="4690872"/>
-            <a:ext cx="1371600" cy="173736"/>
-          </a:xfrm>
-          <a:prstGeom prst="roundRect">
-            <a:avLst/>
-          </a:prstGeom>
-          <a:solidFill>
-            <a:srgbClr val="FFCB66"/>
-          </a:solidFill>
-          <a:ln>
-            <a:noFill/>
-          </a:ln>
-        </p:spPr>
-        <p:style>
-          <a:lnRef idx="1">
-            <a:schemeClr val="accent1"/>
-          </a:lnRef>
-          <a:fillRef idx="3">
-            <a:schemeClr val="accent1"/>
-          </a:fillRef>
-          <a:effectRef idx="2">
-            <a:schemeClr val="accent1"/>
-          </a:effectRef>
-          <a:fontRef idx="minor">
-            <a:schemeClr val="lt1"/>
-          </a:fontRef>
-        </p:style>
-        <p:txBody>
-          <a:bodyPr rtlCol="0" anchor="ctr"/>
-          <a:lstStyle/>
-          <a:p>
-            <a:pPr algn="ctr"/>
+              <a:t>獎品有來源</a:t>
+            </a:r>
           </a:p>
         </p:txBody>
       </p:sp>
@@ -10301,34 +10441,68 @@
         </p:nvSpPr>
         <p:spPr>
           <a:xfrm>
-            <a:off x="9144000" y="4617720"/>
-            <a:ext cx="2286000" cy="365760"/>
-          </a:xfrm>
-          <a:prstGeom prst="rect">
-            <a:avLst/>
-          </a:prstGeom>
-          <a:noFill/>
-        </p:spPr>
-        <p:txBody>
-          <a:bodyPr wrap="square" lIns="9144" rIns="9144" tIns="9144" bIns="9144">
-            <a:spAutoFit/>
-          </a:bodyPr>
-          <a:lstStyle/>
-          <a:p>
-            <a:pPr>
-              <a:spcAft>
-                <a:spcPts val="800"/>
-              </a:spcAft>
-            </a:pPr>
-            <a:r>
-              <a:rPr sz="1800" b="0">
-                <a:solidFill>
-                  <a:srgbClr val="F4F8FF"/>
-                </a:solidFill>
-                <a:latin typeface="Microsoft JhengHei"/>
-                <a:ea typeface="Microsoft JhengHei"/>
-              </a:rPr>
-              <a:t>15%  /  180 萬</a:t>
+            <a:off x="8244840" y="3931920"/>
+            <a:ext cx="3057144" cy="1508760"/>
+          </a:xfrm>
+          <a:prstGeom prst="rect">
+            <a:avLst/>
+          </a:prstGeom>
+          <a:noFill/>
+        </p:spPr>
+        <p:txBody>
+          <a:bodyPr wrap="square" lIns="9144" rIns="9144" tIns="9144" bIns="9144">
+            <a:spAutoFit/>
+          </a:bodyPr>
+          <a:lstStyle/>
+          <a:p>
+            <a:pPr>
+              <a:spcAft>
+                <a:spcPts val="800"/>
+              </a:spcAft>
+            </a:pPr>
+            <a:r>
+              <a:rPr sz="1700" b="0">
+                <a:solidFill>
+                  <a:srgbClr val="AAB7CC"/>
+                </a:solidFill>
+                <a:latin typeface="Microsoft JhengHei"/>
+                <a:ea typeface="Microsoft JhengHei"/>
+              </a:rPr>
+              <a:t>依實收服務／贊助收入</a:t>
+            </a:r>
+          </a:p>
+          <a:p>
+            <a:pPr>
+              <a:spcAft>
+                <a:spcPts val="800"/>
+              </a:spcAft>
+            </a:pPr>
+            <a:r>
+              <a:rPr sz="1700" b="0">
+                <a:solidFill>
+                  <a:srgbClr val="AAB7CC"/>
+                </a:solidFill>
+                <a:latin typeface="Microsoft JhengHei"/>
+                <a:ea typeface="Microsoft JhengHei"/>
+              </a:rPr>
+              <a:t>或明列的有限補貼</a:t>
+            </a:r>
+          </a:p>
+          <a:p>
+            <a:pPr>
+              <a:spcAft>
+                <a:spcPts val="800"/>
+              </a:spcAft>
+            </a:pPr>
+            <a:r>
+              <a:rPr sz="1700" b="0">
+                <a:solidFill>
+                  <a:srgbClr val="AAB7CC"/>
+                </a:solidFill>
+                <a:latin typeface="Microsoft JhengHei"/>
+                <a:ea typeface="Microsoft JhengHei"/>
+              </a:rPr>
+              <a:t>先保留已承諾履約成本</a:t>
             </a:r>
           </a:p>
         </p:txBody>
@@ -10341,34 +10515,34 @@
         </p:nvSpPr>
         <p:spPr>
           <a:xfrm>
-            <a:off x="731520" y="5669280"/>
-            <a:ext cx="10698480" cy="411480"/>
-          </a:xfrm>
-          <a:prstGeom prst="rect">
-            <a:avLst/>
-          </a:prstGeom>
-          <a:noFill/>
-        </p:spPr>
-        <p:txBody>
-          <a:bodyPr wrap="square" lIns="9144" rIns="9144" tIns="9144" bIns="9144">
-            <a:spAutoFit/>
-          </a:bodyPr>
-          <a:lstStyle/>
-          <a:p>
-            <a:pPr>
-              <a:spcAft>
-                <a:spcPts val="800"/>
-              </a:spcAft>
-            </a:pPr>
-            <a:r>
-              <a:rPr sz="2000" b="1">
-                <a:solidFill>
-                  <a:srgbClr val="30EBC8"/>
-                </a:solidFill>
-                <a:latin typeface="Microsoft JhengHei"/>
-                <a:ea typeface="Microsoft JhengHei"/>
-              </a:rPr>
-              <a:t>投入門檻：付費試辦 → 再採購 → 正向單場貢獻 → 擴大銷售</a:t>
+            <a:off x="694944" y="6062472"/>
+            <a:ext cx="10698480" cy="274320"/>
+          </a:xfrm>
+          <a:prstGeom prst="rect">
+            <a:avLst/>
+          </a:prstGeom>
+          <a:noFill/>
+        </p:spPr>
+        <p:txBody>
+          <a:bodyPr wrap="square" lIns="9144" rIns="9144" tIns="9144" bIns="9144">
+            <a:spAutoFit/>
+          </a:bodyPr>
+          <a:lstStyle/>
+          <a:p>
+            <a:pPr>
+              <a:spcAft>
+                <a:spcPts val="800"/>
+              </a:spcAft>
+            </a:pPr>
+            <a:r>
+              <a:rPr sz="1200" b="0">
+                <a:solidFill>
+                  <a:srgbClr val="FFCB66"/>
+                </a:solidFill>
+                <a:latin typeface="Microsoft JhengHei"/>
+                <a:ea typeface="Microsoft JhengHei"/>
+              </a:rPr>
+              <a:t>驗證：無獎金留存、10 倍申領、收入歸零。不能承諾幣價不跌。</a:t>
             </a:r>
           </a:p>
         </p:txBody>
@@ -10477,7 +10651,7 @@
                 <a:latin typeface="Microsoft JhengHei"/>
                 <a:ea typeface="Microsoft JhengHei"/>
               </a:rPr>
-              <a:t>NEONSHIFT  /  團隊與投資人合作｜待補具名資料</a:t>
+              <a:t>NEONSHIFT  /  現況與驗證計畫</a:t>
             </a:r>
           </a:p>
         </p:txBody>
@@ -10517,7 +10691,7 @@
                 <a:latin typeface="Microsoft JhengHei"/>
                 <a:ea typeface="Microsoft JhengHei"/>
               </a:rPr>
-              <a:t>需要能同時理解運動現場與數位產品的團隊</a:t>
+              <a:t>目前是原型階段，募資用來取得市場證據</a:t>
             </a:r>
           </a:p>
         </p:txBody>
@@ -10525,6 +10699,46 @@
       <p:sp>
         <p:nvSpPr>
           <p:cNvPr id="5" name="TextBox 4"/>
+          <p:cNvSpPr txBox="1"/>
+          <p:nvPr/>
+        </p:nvSpPr>
+        <p:spPr>
+          <a:xfrm>
+            <a:off x="676656" y="1673352"/>
+            <a:ext cx="10698480" cy="640080"/>
+          </a:xfrm>
+          <a:prstGeom prst="rect">
+            <a:avLst/>
+          </a:prstGeom>
+          <a:noFill/>
+        </p:spPr>
+        <p:txBody>
+          <a:bodyPr wrap="square" lIns="9144" rIns="9144" tIns="9144" bIns="9144">
+            <a:spAutoFit/>
+          </a:bodyPr>
+          <a:lstStyle/>
+          <a:p>
+            <a:pPr>
+              <a:spcAft>
+                <a:spcPts val="800"/>
+              </a:spcAft>
+            </a:pPr>
+            <a:r>
+              <a:rPr sz="1600" b="0">
+                <a:solidFill>
+                  <a:srgbClr val="AAB7CC"/>
+                </a:solidFill>
+                <a:latin typeface="Microsoft JhengHei"/>
+                <a:ea typeface="Microsoft JhengHei"/>
+              </a:rPr>
+              <a:t>依現有專案文件與資產整理；尚未提供可核驗的用戶、營收或合作實績。</a:t>
+            </a:r>
+          </a:p>
+        </p:txBody>
+      </p:sp>
+      <p:sp>
+        <p:nvSpPr>
+          <p:cNvPr id="6" name="TextBox 5"/>
           <p:cNvSpPr txBox="1"/>
           <p:nvPr/>
         </p:nvSpPr>
@@ -10557,14 +10771,14 @@
                 <a:latin typeface="Microsoft JhengHei"/>
                 <a:ea typeface="Microsoft JhengHei"/>
               </a:rPr>
-              <a:t>募資討論稿・2026.09.14｜商業方案／數值假設待確認</a:t>
-            </a:r>
-          </a:p>
-        </p:txBody>
-      </p:sp>
-      <p:sp>
-        <p:nvSpPr>
-          <p:cNvPr id="6" name="TextBox 5"/>
+              <a:t>募資討論稿・2026.09.16｜商業方案／數值假設待確認</a:t>
+            </a:r>
+          </a:p>
+        </p:txBody>
+      </p:sp>
+      <p:sp>
+        <p:nvSpPr>
+          <p:cNvPr id="7" name="TextBox 6"/>
           <p:cNvSpPr txBox="1"/>
           <p:nvPr/>
         </p:nvSpPr>
@@ -10604,7 +10818,7 @@
       </p:sp>
       <p:sp>
         <p:nvSpPr>
-          <p:cNvPr id="7" name="Rounded Rectangle 6"/>
+          <p:cNvPr id="8" name="Rounded Rectangle 7"/>
           <p:cNvSpPr/>
           <p:nvPr/>
         </p:nvSpPr>
@@ -10647,7 +10861,7 @@
       </p:sp>
       <p:sp>
         <p:nvSpPr>
-          <p:cNvPr id="8" name="TextBox 7"/>
+          <p:cNvPr id="9" name="TextBox 8"/>
           <p:cNvSpPr txBox="1"/>
           <p:nvPr/>
         </p:nvSpPr>
@@ -10687,7 +10901,7 @@
       </p:sp>
       <p:sp>
         <p:nvSpPr>
-          <p:cNvPr id="9" name="TextBox 8"/>
+          <p:cNvPr id="10" name="TextBox 9"/>
           <p:cNvSpPr txBox="1"/>
           <p:nvPr/>
         </p:nvSpPr>
@@ -10720,14 +10934,14 @@
                 <a:latin typeface="Microsoft JhengHei"/>
                 <a:ea typeface="Microsoft JhengHei"/>
               </a:rPr>
-              <a:t>產品與技術</a:t>
-            </a:r>
-          </a:p>
-        </p:txBody>
-      </p:sp>
-      <p:sp>
-        <p:nvSpPr>
-          <p:cNvPr id="10" name="TextBox 9"/>
+              <a:t>已具備</a:t>
+            </a:r>
+          </a:p>
+        </p:txBody>
+      </p:sp>
+      <p:sp>
+        <p:nvSpPr>
+          <p:cNvPr id="11" name="TextBox 10"/>
           <p:cNvSpPr txBox="1"/>
           <p:nvPr/>
         </p:nvSpPr>
@@ -10760,7 +10974,7 @@
                 <a:latin typeface="Microsoft JhengHei"/>
                 <a:ea typeface="Microsoft JhengHei"/>
               </a:rPr>
-              <a:t>創辦人姓名／經歷：待補</a:t>
+              <a:t>需求與產品設計文件</a:t>
             </a:r>
           </a:p>
           <a:p>
@@ -10777,7 +10991,7 @@
                 <a:latin typeface="Microsoft JhengHei"/>
                 <a:ea typeface="Microsoft JhengHei"/>
               </a:rPr>
-              <a:t>產品與工程負責人：待補</a:t>
+              <a:t>專屬 Logo／啟動畫面視覺</a:t>
             </a:r>
           </a:p>
           <a:p>
@@ -10794,14 +11008,14 @@
                 <a:latin typeface="Microsoft JhengHei"/>
                 <a:ea typeface="Microsoft JhengHei"/>
               </a:rPr>
-              <a:t>可展示成果與投入比例：待補</a:t>
-            </a:r>
-          </a:p>
-        </p:txBody>
-      </p:sp>
-      <p:sp>
-        <p:nvSpPr>
-          <p:cNvPr id="11" name="Rounded Rectangle 10"/>
+              <a:t>新手指南與三種揭曉動畫</a:t>
+            </a:r>
+          </a:p>
+        </p:txBody>
+      </p:sp>
+      <p:sp>
+        <p:nvSpPr>
+          <p:cNvPr id="12" name="Rounded Rectangle 11"/>
           <p:cNvSpPr/>
           <p:nvPr/>
         </p:nvSpPr>
@@ -10844,7 +11058,7 @@
       </p:sp>
       <p:sp>
         <p:nvSpPr>
-          <p:cNvPr id="12" name="TextBox 11"/>
+          <p:cNvPr id="13" name="TextBox 12"/>
           <p:cNvSpPr txBox="1"/>
           <p:nvPr/>
         </p:nvSpPr>
@@ -10884,7 +11098,7 @@
       </p:sp>
       <p:sp>
         <p:nvSpPr>
-          <p:cNvPr id="13" name="TextBox 12"/>
+          <p:cNvPr id="14" name="TextBox 13"/>
           <p:cNvSpPr txBox="1"/>
           <p:nvPr/>
         </p:nvSpPr>
@@ -10917,14 +11131,14 @@
                 <a:latin typeface="Microsoft JhengHei"/>
                 <a:ea typeface="Microsoft JhengHei"/>
               </a:rPr>
-              <a:t>活動與商務</a:t>
-            </a:r>
-          </a:p>
-        </p:txBody>
-      </p:sp>
-      <p:sp>
-        <p:nvSpPr>
-          <p:cNvPr id="14" name="TextBox 13"/>
+              <a:t>下一步驗證</a:t>
+            </a:r>
+          </a:p>
+        </p:txBody>
+      </p:sp>
+      <p:sp>
+        <p:nvSpPr>
+          <p:cNvPr id="15" name="TextBox 14"/>
           <p:cNvSpPr txBox="1"/>
           <p:nvPr/>
         </p:nvSpPr>
@@ -10957,7 +11171,7 @@
                 <a:latin typeface="Microsoft JhengHei"/>
                 <a:ea typeface="Microsoft JhengHei"/>
               </a:rPr>
-              <a:t>運動活動／品牌經歷：待補</a:t>
+              <a:t>真實任務與活動端到端流程</a:t>
             </a:r>
           </a:p>
           <a:p>
@@ -10974,7 +11188,7 @@
                 <a:latin typeface="Microsoft JhengHei"/>
                 <a:ea typeface="Microsoft JhengHei"/>
               </a:rPr>
-              <a:t>已確認合作與推薦人：待補</a:t>
+              <a:t>主辦方願付價格</a:t>
             </a:r>
           </a:p>
           <a:p>
@@ -10991,14 +11205,14 @@
                 <a:latin typeface="Microsoft JhengHei"/>
                 <a:ea typeface="Microsoft JhengHei"/>
               </a:rPr>
-              <a:t>客戶開發及現場交付負責人</a:t>
-            </a:r>
-          </a:p>
-        </p:txBody>
-      </p:sp>
-      <p:sp>
-        <p:nvSpPr>
-          <p:cNvPr id="15" name="Rounded Rectangle 14"/>
+              <a:t>現場交付成本與錯誤率</a:t>
+            </a:r>
+          </a:p>
+        </p:txBody>
+      </p:sp>
+      <p:sp>
+        <p:nvSpPr>
+          <p:cNvPr id="16" name="Rounded Rectangle 15"/>
           <p:cNvSpPr/>
           <p:nvPr/>
         </p:nvSpPr>
@@ -11041,7 +11255,7 @@
       </p:sp>
       <p:sp>
         <p:nvSpPr>
-          <p:cNvPr id="16" name="TextBox 15"/>
+          <p:cNvPr id="17" name="TextBox 16"/>
           <p:cNvSpPr txBox="1"/>
           <p:nvPr/>
         </p:nvSpPr>
@@ -11081,7 +11295,7 @@
       </p:sp>
       <p:sp>
         <p:nvSpPr>
-          <p:cNvPr id="17" name="TextBox 16"/>
+          <p:cNvPr id="18" name="TextBox 17"/>
           <p:cNvSpPr txBox="1"/>
           <p:nvPr/>
         </p:nvSpPr>
@@ -11114,14 +11328,14 @@
                 <a:latin typeface="Microsoft JhengHei"/>
                 <a:ea typeface="Microsoft JhengHei"/>
               </a:rPr>
-              <a:t>期待投資人協助</a:t>
-            </a:r>
-          </a:p>
-        </p:txBody>
-      </p:sp>
-      <p:sp>
-        <p:nvSpPr>
-          <p:cNvPr id="18" name="TextBox 17"/>
+              <a:t>尚待補齊</a:t>
+            </a:r>
+          </a:p>
+        </p:txBody>
+      </p:sp>
+      <p:sp>
+        <p:nvSpPr>
+          <p:cNvPr id="19" name="TextBox 18"/>
           <p:cNvSpPr txBox="1"/>
           <p:nvPr/>
         </p:nvSpPr>
@@ -11154,7 +11368,7 @@
                 <a:latin typeface="Microsoft JhengHei"/>
                 <a:ea typeface="Microsoft JhengHei"/>
               </a:rPr>
-              <a:t>跑團、賽事與品牌引介</a:t>
+              <a:t>正式團隊履歷與分工</a:t>
             </a:r>
           </a:p>
           <a:p>
@@ -11171,7 +11385,7 @@
                 <a:latin typeface="Microsoft JhengHei"/>
                 <a:ea typeface="Microsoft JhengHei"/>
               </a:rPr>
-              <a:t>商業定價與通路驗證</a:t>
+              <a:t>已簽合作／意向書</a:t>
             </a:r>
           </a:p>
           <a:p>
@@ -11188,7 +11402,7 @@
                 <a:latin typeface="Microsoft JhengHei"/>
                 <a:ea typeface="Microsoft JhengHei"/>
               </a:rPr>
-              <a:t>早期組織與募資治理</a:t>
+              <a:t>用戶留存與實收營收</a:t>
             </a:r>
           </a:p>
         </p:txBody>
@@ -11297,7 +11511,7 @@
                 <a:latin typeface="Microsoft JhengHei"/>
                 <a:ea typeface="Microsoft JhengHei"/>
               </a:rPr>
-              <a:t>NEONSHIFT  /  可點擊來源｜查核日 2026.09.14</a:t>
+              <a:t>NEONSHIFT  /  募資後里程碑提案</a:t>
             </a:r>
           </a:p>
         </p:txBody>
@@ -11337,7 +11551,7 @@
                 <a:latin typeface="Microsoft JhengHei"/>
                 <a:ea typeface="Microsoft JhengHei"/>
               </a:rPr>
-              <a:t>附錄｜市場資料與口徑</a:t>
+              <a:t>12 個月，依驗證結果逐階段投入</a:t>
             </a:r>
           </a:p>
         </p:txBody>
@@ -11345,6 +11559,46 @@
       <p:sp>
         <p:nvSpPr>
           <p:cNvPr id="5" name="TextBox 4"/>
+          <p:cNvSpPr txBox="1"/>
+          <p:nvPr/>
+        </p:nvSpPr>
+        <p:spPr>
+          <a:xfrm>
+            <a:off x="676656" y="1673352"/>
+            <a:ext cx="10698480" cy="640080"/>
+          </a:xfrm>
+          <a:prstGeom prst="rect">
+            <a:avLst/>
+          </a:prstGeom>
+          <a:noFill/>
+        </p:spPr>
+        <p:txBody>
+          <a:bodyPr wrap="square" lIns="9144" rIns="9144" tIns="9144" bIns="9144">
+            <a:spAutoFit/>
+          </a:bodyPr>
+          <a:lstStyle/>
+          <a:p>
+            <a:pPr>
+              <a:spcAft>
+                <a:spcPts val="800"/>
+              </a:spcAft>
+            </a:pPr>
+            <a:r>
+              <a:rPr sz="1600" b="0">
+                <a:solidFill>
+                  <a:srgbClr val="AAB7CC"/>
+                </a:solidFill>
+                <a:latin typeface="Microsoft JhengHei"/>
+                <a:ea typeface="Microsoft JhengHei"/>
+              </a:rPr>
+              <a:t>這是商業驗證排程，不取代原黑客松開發時程；各階段目標均未達成。</a:t>
+            </a:r>
+          </a:p>
+        </p:txBody>
+      </p:sp>
+      <p:sp>
+        <p:nvSpPr>
+          <p:cNvPr id="6" name="TextBox 5"/>
           <p:cNvSpPr txBox="1"/>
           <p:nvPr/>
         </p:nvSpPr>
@@ -11377,14 +11631,14 @@
                 <a:latin typeface="Microsoft JhengHei"/>
                 <a:ea typeface="Microsoft JhengHei"/>
               </a:rPr>
-              <a:t>募資討論稿・2026.09.14｜商業方案／數值假設待確認</a:t>
-            </a:r>
-          </a:p>
-        </p:txBody>
-      </p:sp>
-      <p:sp>
-        <p:nvSpPr>
-          <p:cNvPr id="6" name="TextBox 5"/>
+              <a:t>募資討論稿・2026.09.16｜商業方案／數值假設待確認</a:t>
+            </a:r>
+          </a:p>
+        </p:txBody>
+      </p:sp>
+      <p:sp>
+        <p:nvSpPr>
+          <p:cNvPr id="7" name="TextBox 6"/>
           <p:cNvSpPr txBox="1"/>
           <p:nvPr/>
         </p:nvSpPr>
@@ -11424,243 +11678,591 @@
       </p:sp>
       <p:sp>
         <p:nvSpPr>
-          <p:cNvPr id="7" name="TextBox 6"/>
-          <p:cNvSpPr txBox="1"/>
-          <p:nvPr/>
-        </p:nvSpPr>
-        <p:spPr>
-          <a:xfrm>
-            <a:off x="713232" y="1920240"/>
-            <a:ext cx="10698480" cy="457200"/>
-          </a:xfrm>
-          <a:prstGeom prst="rect">
-            <a:avLst/>
-          </a:prstGeom>
-          <a:noFill/>
-        </p:spPr>
-        <p:txBody>
-          <a:bodyPr wrap="square" lIns="9144" rIns="9144" tIns="9144" bIns="9144">
-            <a:spAutoFit/>
-          </a:bodyPr>
-          <a:lstStyle/>
-          <a:p>
-            <a:pPr>
-              <a:spcAft>
-                <a:spcPts val="800"/>
-              </a:spcAft>
-            </a:pPr>
-            <a:r>
-              <a:rPr sz="1800" b="1">
+          <p:cNvPr id="8" name="Rounded Rectangle 7"/>
+          <p:cNvSpPr/>
+          <p:nvPr/>
+        </p:nvSpPr>
+        <p:spPr>
+          <a:xfrm>
+            <a:off x="676656" y="2514600"/>
+            <a:ext cx="3477768" cy="3063240"/>
+          </a:xfrm>
+          <a:prstGeom prst="roundRect">
+            <a:avLst/>
+          </a:prstGeom>
+          <a:solidFill>
+            <a:srgbClr val="0B1020"/>
+          </a:solidFill>
+          <a:ln>
+            <a:noFill/>
+          </a:ln>
+        </p:spPr>
+        <p:style>
+          <a:lnRef idx="1">
+            <a:schemeClr val="accent1"/>
+          </a:lnRef>
+          <a:fillRef idx="3">
+            <a:schemeClr val="accent1"/>
+          </a:fillRef>
+          <a:effectRef idx="2">
+            <a:schemeClr val="accent1"/>
+          </a:effectRef>
+          <a:fontRef idx="minor">
+            <a:schemeClr val="lt1"/>
+          </a:fontRef>
+        </p:style>
+        <p:txBody>
+          <a:bodyPr rtlCol="0" anchor="ctr"/>
+          <a:lstStyle/>
+          <a:p>
+            <a:pPr algn="ctr"/>
+          </a:p>
+        </p:txBody>
+      </p:sp>
+      <p:sp>
+        <p:nvSpPr>
+          <p:cNvPr id="9" name="TextBox 8"/>
+          <p:cNvSpPr txBox="1"/>
+          <p:nvPr/>
+        </p:nvSpPr>
+        <p:spPr>
+          <a:xfrm>
+            <a:off x="886968" y="2715768"/>
+            <a:ext cx="3057144" cy="320040"/>
+          </a:xfrm>
+          <a:prstGeom prst="rect">
+            <a:avLst/>
+          </a:prstGeom>
+          <a:noFill/>
+        </p:spPr>
+        <p:txBody>
+          <a:bodyPr wrap="square" lIns="9144" rIns="9144" tIns="9144" bIns="9144">
+            <a:spAutoFit/>
+          </a:bodyPr>
+          <a:lstStyle/>
+          <a:p>
+            <a:pPr>
+              <a:spcAft>
+                <a:spcPts val="800"/>
+              </a:spcAft>
+            </a:pPr>
+            <a:r>
+              <a:rPr sz="1300" b="0">
                 <a:solidFill>
                   <a:srgbClr val="30EBC8"/>
                 </a:solidFill>
                 <a:latin typeface="Microsoft JhengHei"/>
                 <a:ea typeface="Microsoft JhengHei"/>
-                <a:hlinkClick r:id="rId2"/>
-              </a:rPr>
-              <a:t>S1  Global Wellness Institute｜2025 Global Wellness Economy Monitor</a:t>
-            </a:r>
-          </a:p>
-        </p:txBody>
-      </p:sp>
-      <p:sp>
-        <p:nvSpPr>
-          <p:cNvPr id="8" name="TextBox 7"/>
-          <p:cNvSpPr txBox="1"/>
-          <p:nvPr/>
-        </p:nvSpPr>
-        <p:spPr>
-          <a:xfrm>
-            <a:off x="731520" y="2487168"/>
-            <a:ext cx="10515600" cy="502920"/>
-          </a:xfrm>
-          <a:prstGeom prst="rect">
-            <a:avLst/>
-          </a:prstGeom>
-          <a:noFill/>
-        </p:spPr>
-        <p:txBody>
-          <a:bodyPr wrap="square" lIns="9144" rIns="9144" tIns="9144" bIns="9144">
-            <a:spAutoFit/>
-          </a:bodyPr>
-          <a:lstStyle/>
-          <a:p>
-            <a:pPr>
-              <a:spcAft>
-                <a:spcPts val="800"/>
-              </a:spcAft>
-            </a:pPr>
-            <a:r>
-              <a:rPr sz="1500" b="0">
+              </a:rPr>
+              <a:t>01</a:t>
+            </a:r>
+          </a:p>
+        </p:txBody>
+      </p:sp>
+      <p:sp>
+        <p:nvSpPr>
+          <p:cNvPr id="10" name="TextBox 9"/>
+          <p:cNvSpPr txBox="1"/>
+          <p:nvPr/>
+        </p:nvSpPr>
+        <p:spPr>
+          <a:xfrm>
+            <a:off x="886968" y="3236976"/>
+            <a:ext cx="3057144" cy="530352"/>
+          </a:xfrm>
+          <a:prstGeom prst="rect">
+            <a:avLst/>
+          </a:prstGeom>
+          <a:noFill/>
+        </p:spPr>
+        <p:txBody>
+          <a:bodyPr wrap="square" lIns="9144" rIns="9144" tIns="9144" bIns="9144">
+            <a:spAutoFit/>
+          </a:bodyPr>
+          <a:lstStyle/>
+          <a:p>
+            <a:pPr>
+              <a:spcAft>
+                <a:spcPts val="800"/>
+              </a:spcAft>
+            </a:pPr>
+            <a:r>
+              <a:rPr sz="2200" b="1">
+                <a:solidFill>
+                  <a:srgbClr val="F4F8FF"/>
+                </a:solidFill>
+                <a:latin typeface="Microsoft JhengHei"/>
+                <a:ea typeface="Microsoft JhengHei"/>
+              </a:rPr>
+              <a:t>0–3 個月</a:t>
+            </a:r>
+          </a:p>
+        </p:txBody>
+      </p:sp>
+      <p:sp>
+        <p:nvSpPr>
+          <p:cNvPr id="11" name="TextBox 10"/>
+          <p:cNvSpPr txBox="1"/>
+          <p:nvPr/>
+        </p:nvSpPr>
+        <p:spPr>
+          <a:xfrm>
+            <a:off x="886968" y="3931920"/>
+            <a:ext cx="3057144" cy="1508760"/>
+          </a:xfrm>
+          <a:prstGeom prst="rect">
+            <a:avLst/>
+          </a:prstGeom>
+          <a:noFill/>
+        </p:spPr>
+        <p:txBody>
+          <a:bodyPr wrap="square" lIns="9144" rIns="9144" tIns="9144" bIns="9144">
+            <a:spAutoFit/>
+          </a:bodyPr>
+          <a:lstStyle/>
+          <a:p>
+            <a:pPr>
+              <a:spcAft>
+                <a:spcPts val="800"/>
+              </a:spcAft>
+            </a:pPr>
+            <a:r>
+              <a:rPr sz="1700" b="0">
                 <a:solidFill>
                   <a:srgbClr val="AAB7CC"/>
                 </a:solidFill>
                 <a:latin typeface="Microsoft JhengHei"/>
                 <a:ea typeface="Microsoft JhengHei"/>
               </a:rPr>
-              <a:t>2025 年發布，2024 年實績；PDF 身體活動章節 p.61–65。市場及成長數據。</a:t>
-            </a:r>
-          </a:p>
-        </p:txBody>
-      </p:sp>
-      <p:sp>
-        <p:nvSpPr>
-          <p:cNvPr id="9" name="TextBox 8"/>
-          <p:cNvSpPr txBox="1"/>
-          <p:nvPr/>
-        </p:nvSpPr>
-        <p:spPr>
-          <a:xfrm>
-            <a:off x="713232" y="3182112"/>
-            <a:ext cx="10698480" cy="457200"/>
-          </a:xfrm>
-          <a:prstGeom prst="rect">
-            <a:avLst/>
-          </a:prstGeom>
-          <a:noFill/>
-        </p:spPr>
-        <p:txBody>
-          <a:bodyPr wrap="square" lIns="9144" rIns="9144" tIns="9144" bIns="9144">
-            <a:spAutoFit/>
-          </a:bodyPr>
-          <a:lstStyle/>
-          <a:p>
-            <a:pPr>
-              <a:spcAft>
-                <a:spcPts val="800"/>
-              </a:spcAft>
-            </a:pPr>
-            <a:r>
-              <a:rPr sz="1800" b="1">
+              <a:t>招募 3 家設計合作夥伴</a:t>
+            </a:r>
+          </a:p>
+          <a:p>
+            <a:pPr>
+              <a:spcAft>
+                <a:spcPts val="800"/>
+              </a:spcAft>
+            </a:pPr>
+            <a:r>
+              <a:rPr sz="1700" b="0">
+                <a:solidFill>
+                  <a:srgbClr val="AAB7CC"/>
+                </a:solidFill>
+                <a:latin typeface="Microsoft JhengHei"/>
+                <a:ea typeface="Microsoft JhengHei"/>
+              </a:rPr>
+              <a:t>至少完成 1 場試辦</a:t>
+            </a:r>
+          </a:p>
+          <a:p>
+            <a:pPr>
+              <a:spcAft>
+                <a:spcPts val="800"/>
+              </a:spcAft>
+            </a:pPr>
+            <a:r>
+              <a:rPr sz="1700" b="0">
+                <a:solidFill>
+                  <a:srgbClr val="AAB7CC"/>
+                </a:solidFill>
+                <a:latin typeface="Microsoft JhengHei"/>
+                <a:ea typeface="Microsoft JhengHei"/>
+              </a:rPr>
+              <a:t>核驗報到、領取與成績對帳</a:t>
+            </a:r>
+          </a:p>
+        </p:txBody>
+      </p:sp>
+      <p:sp>
+        <p:nvSpPr>
+          <p:cNvPr id="12" name="Rounded Rectangle 11"/>
+          <p:cNvSpPr/>
+          <p:nvPr/>
+        </p:nvSpPr>
+        <p:spPr>
+          <a:xfrm>
+            <a:off x="4355592" y="2514600"/>
+            <a:ext cx="3477768" cy="3063240"/>
+          </a:xfrm>
+          <a:prstGeom prst="roundRect">
+            <a:avLst/>
+          </a:prstGeom>
+          <a:solidFill>
+            <a:srgbClr val="0B1020"/>
+          </a:solidFill>
+          <a:ln>
+            <a:noFill/>
+          </a:ln>
+        </p:spPr>
+        <p:style>
+          <a:lnRef idx="1">
+            <a:schemeClr val="accent1"/>
+          </a:lnRef>
+          <a:fillRef idx="3">
+            <a:schemeClr val="accent1"/>
+          </a:fillRef>
+          <a:effectRef idx="2">
+            <a:schemeClr val="accent1"/>
+          </a:effectRef>
+          <a:fontRef idx="minor">
+            <a:schemeClr val="lt1"/>
+          </a:fontRef>
+        </p:style>
+        <p:txBody>
+          <a:bodyPr rtlCol="0" anchor="ctr"/>
+          <a:lstStyle/>
+          <a:p>
+            <a:pPr algn="ctr"/>
+          </a:p>
+        </p:txBody>
+      </p:sp>
+      <p:sp>
+        <p:nvSpPr>
+          <p:cNvPr id="13" name="TextBox 12"/>
+          <p:cNvSpPr txBox="1"/>
+          <p:nvPr/>
+        </p:nvSpPr>
+        <p:spPr>
+          <a:xfrm>
+            <a:off x="4565904" y="2715768"/>
+            <a:ext cx="3057144" cy="320040"/>
+          </a:xfrm>
+          <a:prstGeom prst="rect">
+            <a:avLst/>
+          </a:prstGeom>
+          <a:noFill/>
+        </p:spPr>
+        <p:txBody>
+          <a:bodyPr wrap="square" lIns="9144" rIns="9144" tIns="9144" bIns="9144">
+            <a:spAutoFit/>
+          </a:bodyPr>
+          <a:lstStyle/>
+          <a:p>
+            <a:pPr>
+              <a:spcAft>
+                <a:spcPts val="800"/>
+              </a:spcAft>
+            </a:pPr>
+            <a:r>
+              <a:rPr sz="1300" b="0">
                 <a:solidFill>
                   <a:srgbClr val="30EBC8"/>
                 </a:solidFill>
                 <a:latin typeface="Microsoft JhengHei"/>
                 <a:ea typeface="Microsoft JhengHei"/>
-                <a:hlinkClick r:id="rId3"/>
-              </a:rPr>
-              <a:t>S2  HFA｜Fitness Industry’s Global Momentum Continued in 2024</a:t>
-            </a:r>
-          </a:p>
-        </p:txBody>
-      </p:sp>
-      <p:sp>
-        <p:nvSpPr>
-          <p:cNvPr id="10" name="TextBox 9"/>
-          <p:cNvSpPr txBox="1"/>
-          <p:nvPr/>
-        </p:nvSpPr>
-        <p:spPr>
-          <a:xfrm>
-            <a:off x="731520" y="3749039"/>
-            <a:ext cx="10515600" cy="502920"/>
-          </a:xfrm>
-          <a:prstGeom prst="rect">
-            <a:avLst/>
-          </a:prstGeom>
-          <a:noFill/>
-        </p:spPr>
-        <p:txBody>
-          <a:bodyPr wrap="square" lIns="9144" rIns="9144" tIns="9144" bIns="9144">
-            <a:spAutoFit/>
-          </a:bodyPr>
-          <a:lstStyle/>
-          <a:p>
-            <a:pPr>
-              <a:spcAft>
-                <a:spcPts val="800"/>
-              </a:spcAft>
-            </a:pPr>
-            <a:r>
-              <a:rPr sz="1500" b="0">
+              </a:rPr>
+              <a:t>02</a:t>
+            </a:r>
+          </a:p>
+        </p:txBody>
+      </p:sp>
+      <p:sp>
+        <p:nvSpPr>
+          <p:cNvPr id="14" name="TextBox 13"/>
+          <p:cNvSpPr txBox="1"/>
+          <p:nvPr/>
+        </p:nvSpPr>
+        <p:spPr>
+          <a:xfrm>
+            <a:off x="4565904" y="3236976"/>
+            <a:ext cx="3057144" cy="530352"/>
+          </a:xfrm>
+          <a:prstGeom prst="rect">
+            <a:avLst/>
+          </a:prstGeom>
+          <a:noFill/>
+        </p:spPr>
+        <p:txBody>
+          <a:bodyPr wrap="square" lIns="9144" rIns="9144" tIns="9144" bIns="9144">
+            <a:spAutoFit/>
+          </a:bodyPr>
+          <a:lstStyle/>
+          <a:p>
+            <a:pPr>
+              <a:spcAft>
+                <a:spcPts val="800"/>
+              </a:spcAft>
+            </a:pPr>
+            <a:r>
+              <a:rPr sz="2200" b="1">
+                <a:solidFill>
+                  <a:srgbClr val="F4F8FF"/>
+                </a:solidFill>
+                <a:latin typeface="Microsoft JhengHei"/>
+                <a:ea typeface="Microsoft JhengHei"/>
+              </a:rPr>
+              <a:t>4–6 個月</a:t>
+            </a:r>
+          </a:p>
+        </p:txBody>
+      </p:sp>
+      <p:sp>
+        <p:nvSpPr>
+          <p:cNvPr id="15" name="TextBox 14"/>
+          <p:cNvSpPr txBox="1"/>
+          <p:nvPr/>
+        </p:nvSpPr>
+        <p:spPr>
+          <a:xfrm>
+            <a:off x="4565904" y="3931920"/>
+            <a:ext cx="3057144" cy="1508760"/>
+          </a:xfrm>
+          <a:prstGeom prst="rect">
+            <a:avLst/>
+          </a:prstGeom>
+          <a:noFill/>
+        </p:spPr>
+        <p:txBody>
+          <a:bodyPr wrap="square" lIns="9144" rIns="9144" tIns="9144" bIns="9144">
+            <a:spAutoFit/>
+          </a:bodyPr>
+          <a:lstStyle/>
+          <a:p>
+            <a:pPr>
+              <a:spcAft>
+                <a:spcPts val="800"/>
+              </a:spcAft>
+            </a:pPr>
+            <a:r>
+              <a:rPr sz="1700" b="0">
                 <a:solidFill>
                   <a:srgbClr val="AAB7CC"/>
                 </a:solidFill>
                 <a:latin typeface="Microsoft JhengHei"/>
                 <a:ea typeface="Microsoft JhengHei"/>
               </a:rPr>
-              <a:t>2025-08-11；可比國家的平均營收成長 8%，非全球加權市場成長。</a:t>
-            </a:r>
-          </a:p>
-        </p:txBody>
-      </p:sp>
-      <p:sp>
-        <p:nvSpPr>
-          <p:cNvPr id="11" name="TextBox 10"/>
-          <p:cNvSpPr txBox="1"/>
-          <p:nvPr/>
-        </p:nvSpPr>
-        <p:spPr>
-          <a:xfrm>
-            <a:off x="713232" y="4443983"/>
-            <a:ext cx="10698480" cy="457200"/>
-          </a:xfrm>
-          <a:prstGeom prst="rect">
-            <a:avLst/>
-          </a:prstGeom>
-          <a:noFill/>
-        </p:spPr>
-        <p:txBody>
-          <a:bodyPr wrap="square" lIns="9144" rIns="9144" tIns="9144" bIns="9144">
-            <a:spAutoFit/>
-          </a:bodyPr>
-          <a:lstStyle/>
-          <a:p>
-            <a:pPr>
-              <a:spcAft>
-                <a:spcPts val="800"/>
-              </a:spcAft>
-            </a:pPr>
-            <a:r>
-              <a:rPr sz="1800" b="1">
+              <a:t>累計 5 場付費活動</a:t>
+            </a:r>
+          </a:p>
+          <a:p>
+            <a:pPr>
+              <a:spcAft>
+                <a:spcPts val="800"/>
+              </a:spcAft>
+            </a:pPr>
+            <a:r>
+              <a:rPr sz="1700" b="0">
+                <a:solidFill>
+                  <a:srgbClr val="AAB7CC"/>
+                </a:solidFill>
+                <a:latin typeface="Microsoft JhengHei"/>
+                <a:ea typeface="Microsoft JhengHei"/>
+              </a:rPr>
+              <a:t>至少 2 家主辦方再採購</a:t>
+            </a:r>
+          </a:p>
+          <a:p>
+            <a:pPr>
+              <a:spcAft>
+                <a:spcPts val="800"/>
+              </a:spcAft>
+            </a:pPr>
+            <a:r>
+              <a:rPr sz="1700" b="0">
+                <a:solidFill>
+                  <a:srgbClr val="AAB7CC"/>
+                </a:solidFill>
+                <a:latin typeface="Microsoft JhengHei"/>
+                <a:ea typeface="Microsoft JhengHei"/>
+              </a:rPr>
+              <a:t>分開追蹤軟體與現場成本</a:t>
+            </a:r>
+          </a:p>
+        </p:txBody>
+      </p:sp>
+      <p:sp>
+        <p:nvSpPr>
+          <p:cNvPr id="16" name="Rounded Rectangle 15"/>
+          <p:cNvSpPr/>
+          <p:nvPr/>
+        </p:nvSpPr>
+        <p:spPr>
+          <a:xfrm>
+            <a:off x="8034528" y="2514600"/>
+            <a:ext cx="3477768" cy="3063240"/>
+          </a:xfrm>
+          <a:prstGeom prst="roundRect">
+            <a:avLst/>
+          </a:prstGeom>
+          <a:solidFill>
+            <a:srgbClr val="0B1020"/>
+          </a:solidFill>
+          <a:ln>
+            <a:noFill/>
+          </a:ln>
+        </p:spPr>
+        <p:style>
+          <a:lnRef idx="1">
+            <a:schemeClr val="accent1"/>
+          </a:lnRef>
+          <a:fillRef idx="3">
+            <a:schemeClr val="accent1"/>
+          </a:fillRef>
+          <a:effectRef idx="2">
+            <a:schemeClr val="accent1"/>
+          </a:effectRef>
+          <a:fontRef idx="minor">
+            <a:schemeClr val="lt1"/>
+          </a:fontRef>
+        </p:style>
+        <p:txBody>
+          <a:bodyPr rtlCol="0" anchor="ctr"/>
+          <a:lstStyle/>
+          <a:p>
+            <a:pPr algn="ctr"/>
+          </a:p>
+        </p:txBody>
+      </p:sp>
+      <p:sp>
+        <p:nvSpPr>
+          <p:cNvPr id="17" name="TextBox 16"/>
+          <p:cNvSpPr txBox="1"/>
+          <p:nvPr/>
+        </p:nvSpPr>
+        <p:spPr>
+          <a:xfrm>
+            <a:off x="8244840" y="2715768"/>
+            <a:ext cx="3057144" cy="320040"/>
+          </a:xfrm>
+          <a:prstGeom prst="rect">
+            <a:avLst/>
+          </a:prstGeom>
+          <a:noFill/>
+        </p:spPr>
+        <p:txBody>
+          <a:bodyPr wrap="square" lIns="9144" rIns="9144" tIns="9144" bIns="9144">
+            <a:spAutoFit/>
+          </a:bodyPr>
+          <a:lstStyle/>
+          <a:p>
+            <a:pPr>
+              <a:spcAft>
+                <a:spcPts val="800"/>
+              </a:spcAft>
+            </a:pPr>
+            <a:r>
+              <a:rPr sz="1300" b="0">
                 <a:solidFill>
                   <a:srgbClr val="30EBC8"/>
                 </a:solidFill>
                 <a:latin typeface="Microsoft JhengHei"/>
                 <a:ea typeface="Microsoft JhengHei"/>
-                <a:hlinkClick r:id="rId4"/>
-              </a:rPr>
-              <a:t>S3  Solana Mobile｜SKR is Live，2026-07-14</a:t>
-            </a:r>
-          </a:p>
-        </p:txBody>
-      </p:sp>
-      <p:sp>
-        <p:nvSpPr>
-          <p:cNvPr id="12" name="TextBox 11"/>
-          <p:cNvSpPr txBox="1"/>
-          <p:nvPr/>
-        </p:nvSpPr>
-        <p:spPr>
-          <a:xfrm>
-            <a:off x="731520" y="5010912"/>
-            <a:ext cx="10515600" cy="502920"/>
-          </a:xfrm>
-          <a:prstGeom prst="rect">
-            <a:avLst/>
-          </a:prstGeom>
-          <a:noFill/>
-        </p:spPr>
-        <p:txBody>
-          <a:bodyPr wrap="square" lIns="9144" rIns="9144" tIns="9144" bIns="9144">
-            <a:spAutoFit/>
-          </a:bodyPr>
-          <a:lstStyle/>
-          <a:p>
-            <a:pPr>
-              <a:spcAft>
-                <a:spcPts val="800"/>
-              </a:spcAft>
-            </a:pPr>
-            <a:r>
-              <a:rPr sz="1500" b="0">
+              </a:rPr>
+              <a:t>03</a:t>
+            </a:r>
+          </a:p>
+        </p:txBody>
+      </p:sp>
+      <p:sp>
+        <p:nvSpPr>
+          <p:cNvPr id="18" name="TextBox 17"/>
+          <p:cNvSpPr txBox="1"/>
+          <p:nvPr/>
+        </p:nvSpPr>
+        <p:spPr>
+          <a:xfrm>
+            <a:off x="8244840" y="3236976"/>
+            <a:ext cx="3057144" cy="530352"/>
+          </a:xfrm>
+          <a:prstGeom prst="rect">
+            <a:avLst/>
+          </a:prstGeom>
+          <a:noFill/>
+        </p:spPr>
+        <p:txBody>
+          <a:bodyPr wrap="square" lIns="9144" rIns="9144" tIns="9144" bIns="9144">
+            <a:spAutoFit/>
+          </a:bodyPr>
+          <a:lstStyle/>
+          <a:p>
+            <a:pPr>
+              <a:spcAft>
+                <a:spcPts val="800"/>
+              </a:spcAft>
+            </a:pPr>
+            <a:r>
+              <a:rPr sz="2200" b="1">
+                <a:solidFill>
+                  <a:srgbClr val="F4F8FF"/>
+                </a:solidFill>
+                <a:latin typeface="Microsoft JhengHei"/>
+                <a:ea typeface="Microsoft JhengHei"/>
+              </a:rPr>
+              <a:t>7–12 個月</a:t>
+            </a:r>
+          </a:p>
+        </p:txBody>
+      </p:sp>
+      <p:sp>
+        <p:nvSpPr>
+          <p:cNvPr id="19" name="TextBox 18"/>
+          <p:cNvSpPr txBox="1"/>
+          <p:nvPr/>
+        </p:nvSpPr>
+        <p:spPr>
+          <a:xfrm>
+            <a:off x="8244840" y="3931920"/>
+            <a:ext cx="3057144" cy="1508760"/>
+          </a:xfrm>
+          <a:prstGeom prst="rect">
+            <a:avLst/>
+          </a:prstGeom>
+          <a:noFill/>
+        </p:spPr>
+        <p:txBody>
+          <a:bodyPr wrap="square" lIns="9144" rIns="9144" tIns="9144" bIns="9144">
+            <a:spAutoFit/>
+          </a:bodyPr>
+          <a:lstStyle/>
+          <a:p>
+            <a:pPr>
+              <a:spcAft>
+                <a:spcPts val="800"/>
+              </a:spcAft>
+            </a:pPr>
+            <a:r>
+              <a:rPr sz="1700" b="0">
                 <a:solidFill>
                   <a:srgbClr val="AAB7CC"/>
                 </a:solidFill>
                 <a:latin typeface="Microsoft JhengHei"/>
                 <a:ea typeface="Microsoft JhengHei"/>
               </a:rPr>
-              <a:t>2026-07-14；逾 10 萬名用戶具 SKR 領取資格，不等於 DAU 或健身市場。</a:t>
+              <a:t>累計 10 家付費主辦方</a:t>
+            </a:r>
+          </a:p>
+          <a:p>
+            <a:pPr>
+              <a:spcAft>
+                <a:spcPts val="800"/>
+              </a:spcAft>
+            </a:pPr>
+            <a:r>
+              <a:rPr sz="1700" b="0">
+                <a:solidFill>
+                  <a:srgbClr val="AAB7CC"/>
+                </a:solidFill>
+                <a:latin typeface="Microsoft JhengHei"/>
+                <a:ea typeface="Microsoft JhengHei"/>
+              </a:rPr>
+              <a:t>建立下一期續約管線</a:t>
+            </a:r>
+          </a:p>
+          <a:p>
+            <a:pPr>
+              <a:spcAft>
+                <a:spcPts val="800"/>
+              </a:spcAft>
+            </a:pPr>
+            <a:r>
+              <a:rPr sz="1700" b="0">
+                <a:solidFill>
+                  <a:srgbClr val="AAB7CC"/>
+                </a:solidFill>
+                <a:latin typeface="Microsoft JhengHei"/>
+                <a:ea typeface="Microsoft JhengHei"/>
+              </a:rPr>
+              <a:t>單場貢獻毛利轉正</a:t>
             </a:r>
           </a:p>
         </p:txBody>
@@ -11769,7 +12371,7 @@
                 <a:latin typeface="Microsoft JhengHei"/>
                 <a:ea typeface="Microsoft JhengHei"/>
               </a:rPr>
-              <a:t>NEONSHIFT  /  募資準備清單</a:t>
+              <a:t>NEONSHIFT  /  第 3 年年度營收情境｜非 ARR、非財測承諾</a:t>
             </a:r>
           </a:p>
         </p:txBody>
@@ -11809,7 +12411,7 @@
                 <a:latin typeface="Microsoft JhengHei"/>
                 <a:ea typeface="Microsoft JhengHei"/>
               </a:rPr>
-              <a:t>附錄｜正式對外前，補齊五項證據</a:t>
+              <a:t>以可追溯假設，建立收入情境</a:t>
             </a:r>
           </a:p>
         </p:txBody>
@@ -11817,6 +12419,46 @@
       <p:sp>
         <p:nvSpPr>
           <p:cNvPr id="5" name="TextBox 4"/>
+          <p:cNvSpPr txBox="1"/>
+          <p:nvPr/>
+        </p:nvSpPr>
+        <p:spPr>
+          <a:xfrm>
+            <a:off x="676656" y="1673352"/>
+            <a:ext cx="10698480" cy="640080"/>
+          </a:xfrm>
+          <a:prstGeom prst="rect">
+            <a:avLst/>
+          </a:prstGeom>
+          <a:noFill/>
+        </p:spPr>
+        <p:txBody>
+          <a:bodyPr wrap="square" lIns="9144" rIns="9144" tIns="9144" bIns="9144">
+            <a:spAutoFit/>
+          </a:bodyPr>
+          <a:lstStyle/>
+          <a:p>
+            <a:pPr>
+              <a:spcAft>
+                <a:spcPts val="800"/>
+              </a:spcAft>
+            </a:pPr>
+            <a:r>
+              <a:rPr sz="1600" b="0">
+                <a:solidFill>
+                  <a:srgbClr val="AAB7CC"/>
+                </a:solidFill>
+                <a:latin typeface="Microsoft JhengHei"/>
+                <a:ea typeface="Microsoft JhengHei"/>
+              </a:rPr>
+              <a:t>台幣萬元；服務收入不包含獎品、代收款與代幣。</a:t>
+            </a:r>
+          </a:p>
+        </p:txBody>
+      </p:sp>
+      <p:sp>
+        <p:nvSpPr>
+          <p:cNvPr id="6" name="TextBox 5"/>
           <p:cNvSpPr txBox="1"/>
           <p:nvPr/>
         </p:nvSpPr>
@@ -11849,14 +12491,14 @@
                 <a:latin typeface="Microsoft JhengHei"/>
                 <a:ea typeface="Microsoft JhengHei"/>
               </a:rPr>
-              <a:t>募資討論稿・2026.09.14｜商業方案／數值假設待確認</a:t>
-            </a:r>
-          </a:p>
-        </p:txBody>
-      </p:sp>
-      <p:sp>
-        <p:nvSpPr>
-          <p:cNvPr id="6" name="TextBox 5"/>
+              <a:t>募資討論稿・2026.09.16｜商業方案／數值假設待確認</a:t>
+            </a:r>
+          </a:p>
+        </p:txBody>
+      </p:sp>
+      <p:sp>
+        <p:nvSpPr>
+          <p:cNvPr id="7" name="TextBox 6"/>
           <p:cNvSpPr txBox="1"/>
           <p:nvPr/>
         </p:nvSpPr>
@@ -11896,40 +12538,1038 @@
       </p:sp>
       <p:sp>
         <p:nvSpPr>
+          <p:cNvPr id="8" name="Rounded Rectangle 7"/>
+          <p:cNvSpPr/>
+          <p:nvPr/>
+        </p:nvSpPr>
+        <p:spPr>
+          <a:xfrm>
+            <a:off x="685800" y="2560320"/>
+            <a:ext cx="10789920" cy="822960"/>
+          </a:xfrm>
+          <a:prstGeom prst="roundRect">
+            <a:avLst/>
+          </a:prstGeom>
+          <a:solidFill>
+            <a:srgbClr val="0B1020"/>
+          </a:solidFill>
+          <a:ln>
+            <a:noFill/>
+          </a:ln>
+        </p:spPr>
+        <p:style>
+          <a:lnRef idx="1">
+            <a:schemeClr val="accent1"/>
+          </a:lnRef>
+          <a:fillRef idx="3">
+            <a:schemeClr val="accent1"/>
+          </a:fillRef>
+          <a:effectRef idx="2">
+            <a:schemeClr val="accent1"/>
+          </a:effectRef>
+          <a:fontRef idx="minor">
+            <a:schemeClr val="lt1"/>
+          </a:fontRef>
+        </p:style>
+        <p:txBody>
+          <a:bodyPr rtlCol="0" anchor="ctr"/>
+          <a:lstStyle/>
+          <a:p>
+            <a:pPr algn="ctr"/>
+          </a:p>
+        </p:txBody>
+      </p:sp>
+      <p:sp>
+        <p:nvSpPr>
+          <p:cNvPr id="9" name="TextBox 8"/>
+          <p:cNvSpPr txBox="1"/>
+          <p:nvPr/>
+        </p:nvSpPr>
+        <p:spPr>
+          <a:xfrm>
+            <a:off x="886968" y="2724912"/>
+            <a:ext cx="1097280" cy="365760"/>
+          </a:xfrm>
+          <a:prstGeom prst="rect">
+            <a:avLst/>
+          </a:prstGeom>
+          <a:noFill/>
+        </p:spPr>
+        <p:txBody>
+          <a:bodyPr wrap="square" lIns="9144" rIns="9144" tIns="9144" bIns="9144">
+            <a:spAutoFit/>
+          </a:bodyPr>
+          <a:lstStyle/>
+          <a:p>
+            <a:pPr>
+              <a:spcAft>
+                <a:spcPts val="800"/>
+              </a:spcAft>
+            </a:pPr>
+            <a:r>
+              <a:rPr sz="2000" b="1">
+                <a:solidFill>
+                  <a:srgbClr val="30EBC8"/>
+                </a:solidFill>
+                <a:latin typeface="Microsoft JhengHei"/>
+                <a:ea typeface="Microsoft JhengHei"/>
+              </a:rPr>
+              <a:t>保守</a:t>
+            </a:r>
+          </a:p>
+        </p:txBody>
+      </p:sp>
+      <p:sp>
+        <p:nvSpPr>
+          <p:cNvPr id="10" name="TextBox 9"/>
+          <p:cNvSpPr txBox="1"/>
+          <p:nvPr/>
+        </p:nvSpPr>
+        <p:spPr>
+          <a:xfrm>
+            <a:off x="2084831" y="2724912"/>
+            <a:ext cx="3657600" cy="365760"/>
+          </a:xfrm>
+          <a:prstGeom prst="rect">
+            <a:avLst/>
+          </a:prstGeom>
+          <a:noFill/>
+        </p:spPr>
+        <p:txBody>
+          <a:bodyPr wrap="square" lIns="9144" rIns="9144" tIns="9144" bIns="9144">
+            <a:spAutoFit/>
+          </a:bodyPr>
+          <a:lstStyle/>
+          <a:p>
+            <a:pPr>
+              <a:spcAft>
+                <a:spcPts val="800"/>
+              </a:spcAft>
+            </a:pPr>
+            <a:r>
+              <a:rPr sz="1700" b="0">
+                <a:solidFill>
+                  <a:srgbClr val="F4F8FF"/>
+                </a:solidFill>
+                <a:latin typeface="Microsoft JhengHei"/>
+                <a:ea typeface="Microsoft JhengHei"/>
+              </a:rPr>
+              <a:t>10 × 3 × 3 萬 = 90 萬</a:t>
+            </a:r>
+          </a:p>
+        </p:txBody>
+      </p:sp>
+      <p:sp>
+        <p:nvSpPr>
+          <p:cNvPr id="11" name="TextBox 10"/>
+          <p:cNvSpPr txBox="1"/>
+          <p:nvPr/>
+        </p:nvSpPr>
+        <p:spPr>
+          <a:xfrm>
+            <a:off x="5897880" y="2724912"/>
+            <a:ext cx="3017520" cy="365760"/>
+          </a:xfrm>
+          <a:prstGeom prst="rect">
+            <a:avLst/>
+          </a:prstGeom>
+          <a:noFill/>
+        </p:spPr>
+        <p:txBody>
+          <a:bodyPr wrap="square" lIns="9144" rIns="9144" tIns="9144" bIns="9144">
+            <a:spAutoFit/>
+          </a:bodyPr>
+          <a:lstStyle/>
+          <a:p>
+            <a:pPr>
+              <a:spcAft>
+                <a:spcPts val="800"/>
+              </a:spcAft>
+            </a:pPr>
+            <a:r>
+              <a:rPr sz="1700" b="0">
+                <a:solidFill>
+                  <a:srgbClr val="AAB7CC"/>
+                </a:solidFill>
+                <a:latin typeface="Microsoft JhengHei"/>
+                <a:ea typeface="Microsoft JhengHei"/>
+              </a:rPr>
+              <a:t>5 × 10 萬 = 50 萬</a:t>
+            </a:r>
+          </a:p>
+        </p:txBody>
+      </p:sp>
+      <p:sp>
+        <p:nvSpPr>
+          <p:cNvPr id="12" name="TextBox 11"/>
+          <p:cNvSpPr txBox="1"/>
+          <p:nvPr/>
+        </p:nvSpPr>
+        <p:spPr>
+          <a:xfrm>
+            <a:off x="9509760" y="2688336"/>
+            <a:ext cx="1737360" cy="457200"/>
+          </a:xfrm>
+          <a:prstGeom prst="rect">
+            <a:avLst/>
+          </a:prstGeom>
+          <a:noFill/>
+        </p:spPr>
+        <p:txBody>
+          <a:bodyPr wrap="square" lIns="9144" rIns="9144" tIns="9144" bIns="9144">
+            <a:spAutoFit/>
+          </a:bodyPr>
+          <a:lstStyle/>
+          <a:p>
+            <a:pPr>
+              <a:spcAft>
+                <a:spcPts val="800"/>
+              </a:spcAft>
+            </a:pPr>
+            <a:r>
+              <a:rPr sz="2300" b="1">
+                <a:solidFill>
+                  <a:srgbClr val="F4F8FF"/>
+                </a:solidFill>
+                <a:latin typeface="Microsoft JhengHei"/>
+                <a:ea typeface="Microsoft JhengHei"/>
+              </a:rPr>
+              <a:t>140 萬</a:t>
+            </a:r>
+          </a:p>
+        </p:txBody>
+      </p:sp>
+      <p:sp>
+        <p:nvSpPr>
+          <p:cNvPr id="13" name="Rounded Rectangle 12"/>
+          <p:cNvSpPr/>
+          <p:nvPr/>
+        </p:nvSpPr>
+        <p:spPr>
+          <a:xfrm>
+            <a:off x="685800" y="3529584"/>
+            <a:ext cx="10789920" cy="822960"/>
+          </a:xfrm>
+          <a:prstGeom prst="roundRect">
+            <a:avLst/>
+          </a:prstGeom>
+          <a:solidFill>
+            <a:srgbClr val="0B1020"/>
+          </a:solidFill>
+          <a:ln>
+            <a:noFill/>
+          </a:ln>
+        </p:spPr>
+        <p:style>
+          <a:lnRef idx="1">
+            <a:schemeClr val="accent1"/>
+          </a:lnRef>
+          <a:fillRef idx="3">
+            <a:schemeClr val="accent1"/>
+          </a:fillRef>
+          <a:effectRef idx="2">
+            <a:schemeClr val="accent1"/>
+          </a:effectRef>
+          <a:fontRef idx="minor">
+            <a:schemeClr val="lt1"/>
+          </a:fontRef>
+        </p:style>
+        <p:txBody>
+          <a:bodyPr rtlCol="0" anchor="ctr"/>
+          <a:lstStyle/>
+          <a:p>
+            <a:pPr algn="ctr"/>
+          </a:p>
+        </p:txBody>
+      </p:sp>
+      <p:sp>
+        <p:nvSpPr>
+          <p:cNvPr id="14" name="TextBox 13"/>
+          <p:cNvSpPr txBox="1"/>
+          <p:nvPr/>
+        </p:nvSpPr>
+        <p:spPr>
+          <a:xfrm>
+            <a:off x="886968" y="3694176"/>
+            <a:ext cx="1097280" cy="365760"/>
+          </a:xfrm>
+          <a:prstGeom prst="rect">
+            <a:avLst/>
+          </a:prstGeom>
+          <a:noFill/>
+        </p:spPr>
+        <p:txBody>
+          <a:bodyPr wrap="square" lIns="9144" rIns="9144" tIns="9144" bIns="9144">
+            <a:spAutoFit/>
+          </a:bodyPr>
+          <a:lstStyle/>
+          <a:p>
+            <a:pPr>
+              <a:spcAft>
+                <a:spcPts val="800"/>
+              </a:spcAft>
+            </a:pPr>
+            <a:r>
+              <a:rPr sz="2000" b="1">
+                <a:solidFill>
+                  <a:srgbClr val="30EBC8"/>
+                </a:solidFill>
+                <a:latin typeface="Microsoft JhengHei"/>
+                <a:ea typeface="Microsoft JhengHei"/>
+              </a:rPr>
+              <a:t>基準</a:t>
+            </a:r>
+          </a:p>
+        </p:txBody>
+      </p:sp>
+      <p:sp>
+        <p:nvSpPr>
+          <p:cNvPr id="15" name="TextBox 14"/>
+          <p:cNvSpPr txBox="1"/>
+          <p:nvPr/>
+        </p:nvSpPr>
+        <p:spPr>
+          <a:xfrm>
+            <a:off x="2084831" y="3694176"/>
+            <a:ext cx="3657600" cy="365760"/>
+          </a:xfrm>
+          <a:prstGeom prst="rect">
+            <a:avLst/>
+          </a:prstGeom>
+          <a:noFill/>
+        </p:spPr>
+        <p:txBody>
+          <a:bodyPr wrap="square" lIns="9144" rIns="9144" tIns="9144" bIns="9144">
+            <a:spAutoFit/>
+          </a:bodyPr>
+          <a:lstStyle/>
+          <a:p>
+            <a:pPr>
+              <a:spcAft>
+                <a:spcPts val="800"/>
+              </a:spcAft>
+            </a:pPr>
+            <a:r>
+              <a:rPr sz="1700" b="0">
+                <a:solidFill>
+                  <a:srgbClr val="F4F8FF"/>
+                </a:solidFill>
+                <a:latin typeface="Microsoft JhengHei"/>
+                <a:ea typeface="Microsoft JhengHei"/>
+              </a:rPr>
+              <a:t>20 × 4 × 3 萬 = 240 萬</a:t>
+            </a:r>
+          </a:p>
+        </p:txBody>
+      </p:sp>
+      <p:sp>
+        <p:nvSpPr>
+          <p:cNvPr id="16" name="TextBox 15"/>
+          <p:cNvSpPr txBox="1"/>
+          <p:nvPr/>
+        </p:nvSpPr>
+        <p:spPr>
+          <a:xfrm>
+            <a:off x="5897880" y="3694176"/>
+            <a:ext cx="3017520" cy="365760"/>
+          </a:xfrm>
+          <a:prstGeom prst="rect">
+            <a:avLst/>
+          </a:prstGeom>
+          <a:noFill/>
+        </p:spPr>
+        <p:txBody>
+          <a:bodyPr wrap="square" lIns="9144" rIns="9144" tIns="9144" bIns="9144">
+            <a:spAutoFit/>
+          </a:bodyPr>
+          <a:lstStyle/>
+          <a:p>
+            <a:pPr>
+              <a:spcAft>
+                <a:spcPts val="800"/>
+              </a:spcAft>
+            </a:pPr>
+            <a:r>
+              <a:rPr sz="1700" b="0">
+                <a:solidFill>
+                  <a:srgbClr val="AAB7CC"/>
+                </a:solidFill>
+                <a:latin typeface="Microsoft JhengHei"/>
+                <a:ea typeface="Microsoft JhengHei"/>
+              </a:rPr>
+              <a:t>15 × 10 萬 = 150 萬</a:t>
+            </a:r>
+          </a:p>
+        </p:txBody>
+      </p:sp>
+      <p:sp>
+        <p:nvSpPr>
+          <p:cNvPr id="17" name="TextBox 16"/>
+          <p:cNvSpPr txBox="1"/>
+          <p:nvPr/>
+        </p:nvSpPr>
+        <p:spPr>
+          <a:xfrm>
+            <a:off x="9509760" y="3657600"/>
+            <a:ext cx="1737360" cy="457200"/>
+          </a:xfrm>
+          <a:prstGeom prst="rect">
+            <a:avLst/>
+          </a:prstGeom>
+          <a:noFill/>
+        </p:spPr>
+        <p:txBody>
+          <a:bodyPr wrap="square" lIns="9144" rIns="9144" tIns="9144" bIns="9144">
+            <a:spAutoFit/>
+          </a:bodyPr>
+          <a:lstStyle/>
+          <a:p>
+            <a:pPr>
+              <a:spcAft>
+                <a:spcPts val="800"/>
+              </a:spcAft>
+            </a:pPr>
+            <a:r>
+              <a:rPr sz="2300" b="1">
+                <a:solidFill>
+                  <a:srgbClr val="F4F8FF"/>
+                </a:solidFill>
+                <a:latin typeface="Microsoft JhengHei"/>
+                <a:ea typeface="Microsoft JhengHei"/>
+              </a:rPr>
+              <a:t>390 萬</a:t>
+            </a:r>
+          </a:p>
+        </p:txBody>
+      </p:sp>
+      <p:sp>
+        <p:nvSpPr>
+          <p:cNvPr id="18" name="Rounded Rectangle 17"/>
+          <p:cNvSpPr/>
+          <p:nvPr/>
+        </p:nvSpPr>
+        <p:spPr>
+          <a:xfrm>
+            <a:off x="685800" y="4498848"/>
+            <a:ext cx="10789920" cy="822960"/>
+          </a:xfrm>
+          <a:prstGeom prst="roundRect">
+            <a:avLst/>
+          </a:prstGeom>
+          <a:solidFill>
+            <a:srgbClr val="0B1020"/>
+          </a:solidFill>
+          <a:ln>
+            <a:noFill/>
+          </a:ln>
+        </p:spPr>
+        <p:style>
+          <a:lnRef idx="1">
+            <a:schemeClr val="accent1"/>
+          </a:lnRef>
+          <a:fillRef idx="3">
+            <a:schemeClr val="accent1"/>
+          </a:fillRef>
+          <a:effectRef idx="2">
+            <a:schemeClr val="accent1"/>
+          </a:effectRef>
+          <a:fontRef idx="minor">
+            <a:schemeClr val="lt1"/>
+          </a:fontRef>
+        </p:style>
+        <p:txBody>
+          <a:bodyPr rtlCol="0" anchor="ctr"/>
+          <a:lstStyle/>
+          <a:p>
+            <a:pPr algn="ctr"/>
+          </a:p>
+        </p:txBody>
+      </p:sp>
+      <p:sp>
+        <p:nvSpPr>
+          <p:cNvPr id="19" name="TextBox 18"/>
+          <p:cNvSpPr txBox="1"/>
+          <p:nvPr/>
+        </p:nvSpPr>
+        <p:spPr>
+          <a:xfrm>
+            <a:off x="886968" y="4663440"/>
+            <a:ext cx="1097280" cy="365760"/>
+          </a:xfrm>
+          <a:prstGeom prst="rect">
+            <a:avLst/>
+          </a:prstGeom>
+          <a:noFill/>
+        </p:spPr>
+        <p:txBody>
+          <a:bodyPr wrap="square" lIns="9144" rIns="9144" tIns="9144" bIns="9144">
+            <a:spAutoFit/>
+          </a:bodyPr>
+          <a:lstStyle/>
+          <a:p>
+            <a:pPr>
+              <a:spcAft>
+                <a:spcPts val="800"/>
+              </a:spcAft>
+            </a:pPr>
+            <a:r>
+              <a:rPr sz="2000" b="1">
+                <a:solidFill>
+                  <a:srgbClr val="30EBC8"/>
+                </a:solidFill>
+                <a:latin typeface="Microsoft JhengHei"/>
+                <a:ea typeface="Microsoft JhengHei"/>
+              </a:rPr>
+              <a:t>擴張</a:t>
+            </a:r>
+          </a:p>
+        </p:txBody>
+      </p:sp>
+      <p:sp>
+        <p:nvSpPr>
+          <p:cNvPr id="20" name="TextBox 19"/>
+          <p:cNvSpPr txBox="1"/>
+          <p:nvPr/>
+        </p:nvSpPr>
+        <p:spPr>
+          <a:xfrm>
+            <a:off x="2084831" y="4663440"/>
+            <a:ext cx="3657600" cy="365760"/>
+          </a:xfrm>
+          <a:prstGeom prst="rect">
+            <a:avLst/>
+          </a:prstGeom>
+          <a:noFill/>
+        </p:spPr>
+        <p:txBody>
+          <a:bodyPr wrap="square" lIns="9144" rIns="9144" tIns="9144" bIns="9144">
+            <a:spAutoFit/>
+          </a:bodyPr>
+          <a:lstStyle/>
+          <a:p>
+            <a:pPr>
+              <a:spcAft>
+                <a:spcPts val="800"/>
+              </a:spcAft>
+            </a:pPr>
+            <a:r>
+              <a:rPr sz="1700" b="0">
+                <a:solidFill>
+                  <a:srgbClr val="F4F8FF"/>
+                </a:solidFill>
+                <a:latin typeface="Microsoft JhengHei"/>
+                <a:ea typeface="Microsoft JhengHei"/>
+              </a:rPr>
+              <a:t>50 × 6 × 3 萬 = 900 萬</a:t>
+            </a:r>
+          </a:p>
+        </p:txBody>
+      </p:sp>
+      <p:sp>
+        <p:nvSpPr>
+          <p:cNvPr id="21" name="TextBox 20"/>
+          <p:cNvSpPr txBox="1"/>
+          <p:nvPr/>
+        </p:nvSpPr>
+        <p:spPr>
+          <a:xfrm>
+            <a:off x="5897880" y="4663440"/>
+            <a:ext cx="3017520" cy="365760"/>
+          </a:xfrm>
+          <a:prstGeom prst="rect">
+            <a:avLst/>
+          </a:prstGeom>
+          <a:noFill/>
+        </p:spPr>
+        <p:txBody>
+          <a:bodyPr wrap="square" lIns="9144" rIns="9144" tIns="9144" bIns="9144">
+            <a:spAutoFit/>
+          </a:bodyPr>
+          <a:lstStyle/>
+          <a:p>
+            <a:pPr>
+              <a:spcAft>
+                <a:spcPts val="800"/>
+              </a:spcAft>
+            </a:pPr>
+            <a:r>
+              <a:rPr sz="1700" b="0">
+                <a:solidFill>
+                  <a:srgbClr val="AAB7CC"/>
+                </a:solidFill>
+                <a:latin typeface="Microsoft JhengHei"/>
+                <a:ea typeface="Microsoft JhengHei"/>
+              </a:rPr>
+              <a:t>30 × 10 萬 = 300 萬</a:t>
+            </a:r>
+          </a:p>
+        </p:txBody>
+      </p:sp>
+      <p:sp>
+        <p:nvSpPr>
+          <p:cNvPr id="22" name="TextBox 21"/>
+          <p:cNvSpPr txBox="1"/>
+          <p:nvPr/>
+        </p:nvSpPr>
+        <p:spPr>
+          <a:xfrm>
+            <a:off x="9509760" y="4626864"/>
+            <a:ext cx="1737360" cy="457200"/>
+          </a:xfrm>
+          <a:prstGeom prst="rect">
+            <a:avLst/>
+          </a:prstGeom>
+          <a:noFill/>
+        </p:spPr>
+        <p:txBody>
+          <a:bodyPr wrap="square" lIns="9144" rIns="9144" tIns="9144" bIns="9144">
+            <a:spAutoFit/>
+          </a:bodyPr>
+          <a:lstStyle/>
+          <a:p>
+            <a:pPr>
+              <a:spcAft>
+                <a:spcPts val="800"/>
+              </a:spcAft>
+            </a:pPr>
+            <a:r>
+              <a:rPr sz="2300" b="1">
+                <a:solidFill>
+                  <a:srgbClr val="F4F8FF"/>
+                </a:solidFill>
+                <a:latin typeface="Microsoft JhengHei"/>
+                <a:ea typeface="Microsoft JhengHei"/>
+              </a:rPr>
+              <a:t>1,200 萬</a:t>
+            </a:r>
+          </a:p>
+        </p:txBody>
+      </p:sp>
+      <p:sp>
+        <p:nvSpPr>
+          <p:cNvPr id="23" name="TextBox 22"/>
+          <p:cNvSpPr txBox="1"/>
+          <p:nvPr/>
+        </p:nvSpPr>
+        <p:spPr>
+          <a:xfrm>
+            <a:off x="2084831" y="2148840"/>
+            <a:ext cx="3657600" cy="274320"/>
+          </a:xfrm>
+          <a:prstGeom prst="rect">
+            <a:avLst/>
+          </a:prstGeom>
+          <a:noFill/>
+        </p:spPr>
+        <p:txBody>
+          <a:bodyPr wrap="square" lIns="9144" rIns="9144" tIns="9144" bIns="9144">
+            <a:spAutoFit/>
+          </a:bodyPr>
+          <a:lstStyle/>
+          <a:p>
+            <a:pPr>
+              <a:spcAft>
+                <a:spcPts val="800"/>
+              </a:spcAft>
+            </a:pPr>
+            <a:r>
+              <a:rPr sz="1200" b="0">
+                <a:solidFill>
+                  <a:srgbClr val="AAB7CC"/>
+                </a:solidFill>
+                <a:latin typeface="Microsoft JhengHei"/>
+                <a:ea typeface="Microsoft JhengHei"/>
+              </a:rPr>
+              <a:t>主辦方 × 年場次 × 單價</a:t>
+            </a:r>
+          </a:p>
+        </p:txBody>
+      </p:sp>
+      <p:sp>
+        <p:nvSpPr>
+          <p:cNvPr id="24" name="TextBox 23"/>
+          <p:cNvSpPr txBox="1"/>
+          <p:nvPr/>
+        </p:nvSpPr>
+        <p:spPr>
+          <a:xfrm>
+            <a:off x="5897880" y="2148840"/>
+            <a:ext cx="3017520" cy="274320"/>
+          </a:xfrm>
+          <a:prstGeom prst="rect">
+            <a:avLst/>
+          </a:prstGeom>
+          <a:noFill/>
+        </p:spPr>
+        <p:txBody>
+          <a:bodyPr wrap="square" lIns="9144" rIns="9144" tIns="9144" bIns="9144">
+            <a:spAutoFit/>
+          </a:bodyPr>
+          <a:lstStyle/>
+          <a:p>
+            <a:pPr>
+              <a:spcAft>
+                <a:spcPts val="800"/>
+              </a:spcAft>
+            </a:pPr>
+            <a:r>
+              <a:rPr sz="1200" b="0">
+                <a:solidFill>
+                  <a:srgbClr val="AAB7CC"/>
+                </a:solidFill>
+                <a:latin typeface="Microsoft JhengHei"/>
+                <a:ea typeface="Microsoft JhengHei"/>
+              </a:rPr>
+              <a:t>獨立品牌專案 × 單價</a:t>
+            </a:r>
+          </a:p>
+        </p:txBody>
+      </p:sp>
+      <p:sp>
+        <p:nvSpPr>
+          <p:cNvPr id="25" name="TextBox 24"/>
+          <p:cNvSpPr txBox="1"/>
+          <p:nvPr/>
+        </p:nvSpPr>
+        <p:spPr>
+          <a:xfrm>
+            <a:off x="9509760" y="2148840"/>
+            <a:ext cx="1371600" cy="274320"/>
+          </a:xfrm>
+          <a:prstGeom prst="rect">
+            <a:avLst/>
+          </a:prstGeom>
+          <a:noFill/>
+        </p:spPr>
+        <p:txBody>
+          <a:bodyPr wrap="square" lIns="9144" rIns="9144" tIns="9144" bIns="9144">
+            <a:spAutoFit/>
+          </a:bodyPr>
+          <a:lstStyle/>
+          <a:p>
+            <a:pPr>
+              <a:spcAft>
+                <a:spcPts val="800"/>
+              </a:spcAft>
+            </a:pPr>
+            <a:r>
+              <a:rPr sz="1200" b="0">
+                <a:solidFill>
+                  <a:srgbClr val="AAB7CC"/>
+                </a:solidFill>
+                <a:latin typeface="Microsoft JhengHei"/>
+                <a:ea typeface="Microsoft JhengHei"/>
+              </a:rPr>
+              <a:t>合計</a:t>
+            </a:r>
+          </a:p>
+        </p:txBody>
+      </p:sp>
+      <p:sp>
+        <p:nvSpPr>
+          <p:cNvPr id="26" name="TextBox 25"/>
+          <p:cNvSpPr txBox="1"/>
+          <p:nvPr/>
+        </p:nvSpPr>
+        <p:spPr>
+          <a:xfrm>
+            <a:off x="713232" y="5696712"/>
+            <a:ext cx="10789920" cy="365760"/>
+          </a:xfrm>
+          <a:prstGeom prst="rect">
+            <a:avLst/>
+          </a:prstGeom>
+          <a:noFill/>
+        </p:spPr>
+        <p:txBody>
+          <a:bodyPr wrap="square" lIns="9144" rIns="9144" tIns="9144" bIns="9144">
+            <a:spAutoFit/>
+          </a:bodyPr>
+          <a:lstStyle/>
+          <a:p>
+            <a:pPr>
+              <a:spcAft>
+                <a:spcPts val="800"/>
+              </a:spcAft>
+            </a:pPr>
+            <a:r>
+              <a:rPr sz="1500" b="0">
+                <a:solidFill>
+                  <a:srgbClr val="FFCB66"/>
+                </a:solidFill>
+                <a:latin typeface="Microsoft JhengHei"/>
+                <a:ea typeface="Microsoft JhengHei"/>
+              </a:rPr>
+              <a:t>單場假設：收入 3 萬 − 直接成本 1.2 萬 = 貢獻 1.8 萬（60%）；成本待試辦驗證。</a:t>
+            </a:r>
+          </a:p>
+        </p:txBody>
+      </p:sp>
+    </p:spTree>
+  </p:cSld>
+  <p:clrMapOvr>
+    <a:masterClrMapping/>
+  </p:clrMapOvr>
+</p:sld>
+</file>
+
+<file path=ppt/slides/slide19.xml><?xml version="1.0" encoding="utf-8"?>
+<p:sld xmlns:a="http://schemas.openxmlformats.org/drawingml/2006/main" xmlns:p="http://schemas.openxmlformats.org/presentationml/2006/main" xmlns:r="http://schemas.openxmlformats.org/officeDocument/2006/relationships">
+  <p:cSld>
+    <p:bg>
+      <p:bgPr>
+        <a:solidFill>
+          <a:srgbClr val="050711"/>
+        </a:solidFill>
+        <a:effectLst/>
+      </p:bgPr>
+    </p:bg>
+    <p:spTree>
+      <p:nvGrpSpPr>
+        <p:cNvPr id="1" name=""/>
+        <p:cNvGrpSpPr/>
+        <p:nvPr/>
+      </p:nvGrpSpPr>
+      <p:grpSpPr/>
+      <p:sp>
+        <p:nvSpPr>
+          <p:cNvPr id="2" name="Rounded Rectangle 1"/>
+          <p:cNvSpPr/>
+          <p:nvPr/>
+        </p:nvSpPr>
+        <p:spPr>
+          <a:xfrm>
+            <a:off x="438912" y="356616"/>
+            <a:ext cx="73152" cy="210312"/>
+          </a:xfrm>
+          <a:prstGeom prst="roundRect">
+            <a:avLst/>
+          </a:prstGeom>
+          <a:solidFill>
+            <a:srgbClr val="30EBC8"/>
+          </a:solidFill>
+          <a:ln>
+            <a:noFill/>
+          </a:ln>
+        </p:spPr>
+        <p:style>
+          <a:lnRef idx="1">
+            <a:schemeClr val="accent1"/>
+          </a:lnRef>
+          <a:fillRef idx="3">
+            <a:schemeClr val="accent1"/>
+          </a:fillRef>
+          <a:effectRef idx="2">
+            <a:schemeClr val="accent1"/>
+          </a:effectRef>
+          <a:fontRef idx="minor">
+            <a:schemeClr val="lt1"/>
+          </a:fontRef>
+        </p:style>
+        <p:txBody>
+          <a:bodyPr rtlCol="0" anchor="ctr"/>
+          <a:lstStyle/>
+          <a:p>
+            <a:pPr algn="ctr"/>
+          </a:p>
+        </p:txBody>
+      </p:sp>
+      <p:sp>
+        <p:nvSpPr>
+          <p:cNvPr id="3" name="TextBox 2"/>
+          <p:cNvSpPr txBox="1"/>
+          <p:nvPr/>
+        </p:nvSpPr>
+        <p:spPr>
+          <a:xfrm>
+            <a:off x="658368" y="292608"/>
+            <a:ext cx="10058400" cy="320040"/>
+          </a:xfrm>
+          <a:prstGeom prst="rect">
+            <a:avLst/>
+          </a:prstGeom>
+          <a:noFill/>
+        </p:spPr>
+        <p:txBody>
+          <a:bodyPr wrap="square" lIns="9144" rIns="9144" tIns="9144" bIns="9144">
+            <a:spAutoFit/>
+          </a:bodyPr>
+          <a:lstStyle/>
+          <a:p>
+            <a:pPr>
+              <a:spcAft>
+                <a:spcPts val="800"/>
+              </a:spcAft>
+            </a:pPr>
+            <a:r>
+              <a:rPr sz="1100" b="1">
+                <a:solidFill>
+                  <a:srgbClr val="30EBC8"/>
+                </a:solidFill>
+                <a:latin typeface="Microsoft JhengHei"/>
+                <a:ea typeface="Microsoft JhengHei"/>
+              </a:rPr>
+              <a:t>NEONSHIFT  /  募資方案｜可調整假設，尚未定案</a:t>
+            </a:r>
+          </a:p>
+        </p:txBody>
+      </p:sp>
+      <p:sp>
+        <p:nvSpPr>
+          <p:cNvPr id="4" name="TextBox 3"/>
+          <p:cNvSpPr txBox="1"/>
+          <p:nvPr/>
+        </p:nvSpPr>
+        <p:spPr>
+          <a:xfrm>
+            <a:off x="658368" y="850392"/>
+            <a:ext cx="10881360" cy="713232"/>
+          </a:xfrm>
+          <a:prstGeom prst="rect">
+            <a:avLst/>
+          </a:prstGeom>
+          <a:noFill/>
+        </p:spPr>
+        <p:txBody>
+          <a:bodyPr wrap="square" lIns="9144" rIns="9144" tIns="9144" bIns="9144">
+            <a:spAutoFit/>
+          </a:bodyPr>
+          <a:lstStyle/>
+          <a:p>
+            <a:pPr>
+              <a:spcAft>
+                <a:spcPts val="800"/>
+              </a:spcAft>
+            </a:pPr>
+            <a:r>
+              <a:rPr sz="3000" b="1">
+                <a:solidFill>
+                  <a:srgbClr val="F4F8FF"/>
+                </a:solidFill>
+                <a:latin typeface="Microsoft JhengHei"/>
+                <a:ea typeface="Microsoft JhengHei"/>
+              </a:rPr>
+              <a:t>建議募資 NT$1,200 萬，取得 12 個月驗證窗口</a:t>
+            </a:r>
+          </a:p>
+        </p:txBody>
+      </p:sp>
+      <p:sp>
+        <p:nvSpPr>
+          <p:cNvPr id="5" name="TextBox 4"/>
+          <p:cNvSpPr txBox="1"/>
+          <p:nvPr/>
+        </p:nvSpPr>
+        <p:spPr>
+          <a:xfrm>
+            <a:off x="676656" y="1673352"/>
+            <a:ext cx="10698480" cy="640080"/>
+          </a:xfrm>
+          <a:prstGeom prst="rect">
+            <a:avLst/>
+          </a:prstGeom>
+          <a:noFill/>
+        </p:spPr>
+        <p:txBody>
+          <a:bodyPr wrap="square" lIns="9144" rIns="9144" tIns="9144" bIns="9144">
+            <a:spAutoFit/>
+          </a:bodyPr>
+          <a:lstStyle/>
+          <a:p>
+            <a:pPr>
+              <a:spcAft>
+                <a:spcPts val="800"/>
+              </a:spcAft>
+            </a:pPr>
+            <a:r>
+              <a:rPr sz="1600" b="0">
+                <a:solidFill>
+                  <a:srgbClr val="AAB7CC"/>
+                </a:solidFill>
+                <a:latin typeface="Microsoft JhengHei"/>
+                <a:ea typeface="Microsoft JhengHei"/>
+              </a:rPr>
+              <a:t>以約 NT$100 萬／月的含緩衝現金配置示意；估值、股權比例與工具待議。</a:t>
+            </a:r>
+          </a:p>
+        </p:txBody>
+      </p:sp>
+      <p:sp>
+        <p:nvSpPr>
+          <p:cNvPr id="6" name="TextBox 5"/>
+          <p:cNvSpPr txBox="1"/>
+          <p:nvPr/>
+        </p:nvSpPr>
+        <p:spPr>
+          <a:xfrm>
+            <a:off x="676656" y="6464808"/>
+            <a:ext cx="9144000" cy="201168"/>
+          </a:xfrm>
+          <a:prstGeom prst="rect">
+            <a:avLst/>
+          </a:prstGeom>
+          <a:noFill/>
+        </p:spPr>
+        <p:txBody>
+          <a:bodyPr wrap="square" lIns="9144" rIns="9144" tIns="9144" bIns="9144">
+            <a:spAutoFit/>
+          </a:bodyPr>
+          <a:lstStyle/>
+          <a:p>
+            <a:pPr>
+              <a:spcAft>
+                <a:spcPts val="800"/>
+              </a:spcAft>
+            </a:pPr>
+            <a:r>
+              <a:rPr sz="900" b="0">
+                <a:solidFill>
+                  <a:srgbClr val="AAB7CC"/>
+                </a:solidFill>
+                <a:latin typeface="Microsoft JhengHei"/>
+                <a:ea typeface="Microsoft JhengHei"/>
+              </a:rPr>
+              <a:t>募資討論稿・2026.09.16｜商業方案／數值假設待確認</a:t>
+            </a:r>
+          </a:p>
+        </p:txBody>
+      </p:sp>
+      <p:sp>
+        <p:nvSpPr>
           <p:cNvPr id="7" name="TextBox 6"/>
           <p:cNvSpPr txBox="1"/>
           <p:nvPr/>
         </p:nvSpPr>
         <p:spPr>
           <a:xfrm>
-            <a:off x="777240" y="2240280"/>
-            <a:ext cx="10607040" cy="457200"/>
-          </a:xfrm>
-          <a:prstGeom prst="rect">
-            <a:avLst/>
-          </a:prstGeom>
-          <a:noFill/>
-        </p:spPr>
-        <p:txBody>
-          <a:bodyPr wrap="square" lIns="9144" rIns="9144" tIns="9144" bIns="9144">
-            <a:spAutoFit/>
-          </a:bodyPr>
-          <a:lstStyle/>
-          <a:p>
-            <a:pPr>
-              <a:spcAft>
-                <a:spcPts val="800"/>
-              </a:spcAft>
-            </a:pPr>
-            <a:r>
-              <a:rPr sz="2100" b="0">
+            <a:off x="10991088" y="6428232"/>
+            <a:ext cx="457200" cy="274320"/>
+          </a:xfrm>
+          <a:prstGeom prst="rect">
+            <a:avLst/>
+          </a:prstGeom>
+          <a:noFill/>
+        </p:spPr>
+        <p:txBody>
+          <a:bodyPr wrap="square" lIns="9144" rIns="9144" tIns="9144" bIns="9144">
+            <a:spAutoFit/>
+          </a:bodyPr>
+          <a:lstStyle/>
+          <a:p>
+            <a:pPr>
+              <a:spcAft>
+                <a:spcPts val="800"/>
+              </a:spcAft>
+            </a:pPr>
+            <a:r>
+              <a:rPr sz="1200" b="0">
                 <a:solidFill>
                   <a:srgbClr val="30EBC8"/>
                 </a:solidFill>
                 <a:latin typeface="Microsoft JhengHei"/>
                 <a:ea typeface="Microsoft JhengHei"/>
               </a:rPr>
-              <a:t>01  團隊姓名、專長、全職投入與股權結構</a:t>
+              <a:t>19</a:t>
             </a:r>
           </a:p>
         </p:txBody>
@@ -11942,154 +13582,526 @@
         </p:nvSpPr>
         <p:spPr>
           <a:xfrm>
-            <a:off x="777240" y="2871216"/>
-            <a:ext cx="10607040" cy="457200"/>
-          </a:xfrm>
-          <a:prstGeom prst="rect">
-            <a:avLst/>
-          </a:prstGeom>
-          <a:noFill/>
-        </p:spPr>
-        <p:txBody>
-          <a:bodyPr wrap="square" lIns="9144" rIns="9144" tIns="9144" bIns="9144">
-            <a:spAutoFit/>
-          </a:bodyPr>
-          <a:lstStyle/>
-          <a:p>
-            <a:pPr>
-              <a:spcAft>
-                <a:spcPts val="800"/>
-              </a:spcAft>
-            </a:pPr>
-            <a:r>
-              <a:rPr sz="2100" b="0">
+            <a:off x="731520" y="2560320"/>
+            <a:ext cx="3657600" cy="365760"/>
+          </a:xfrm>
+          <a:prstGeom prst="rect">
+            <a:avLst/>
+          </a:prstGeom>
+          <a:noFill/>
+        </p:spPr>
+        <p:txBody>
+          <a:bodyPr wrap="square" lIns="9144" rIns="9144" tIns="9144" bIns="9144">
+            <a:spAutoFit/>
+          </a:bodyPr>
+          <a:lstStyle/>
+          <a:p>
+            <a:pPr>
+              <a:spcAft>
+                <a:spcPts val="800"/>
+              </a:spcAft>
+            </a:pPr>
+            <a:r>
+              <a:rPr sz="1800" b="0">
                 <a:solidFill>
                   <a:srgbClr val="F4F8FF"/>
                 </a:solidFill>
                 <a:latin typeface="Microsoft JhengHei"/>
                 <a:ea typeface="Microsoft JhengHei"/>
               </a:rPr>
-              <a:t>02  主辦方访談、試辦意向與可聯絡推薦人</a:t>
-            </a:r>
-          </a:p>
-        </p:txBody>
-      </p:sp>
-      <p:sp>
-        <p:nvSpPr>
-          <p:cNvPr id="9" name="TextBox 8"/>
-          <p:cNvSpPr txBox="1"/>
-          <p:nvPr/>
-        </p:nvSpPr>
-        <p:spPr>
-          <a:xfrm>
-            <a:off x="777240" y="3502152"/>
-            <a:ext cx="10607040" cy="457200"/>
-          </a:xfrm>
-          <a:prstGeom prst="rect">
-            <a:avLst/>
-          </a:prstGeom>
-          <a:noFill/>
-        </p:spPr>
-        <p:txBody>
-          <a:bodyPr wrap="square" lIns="9144" rIns="9144" tIns="9144" bIns="9144">
-            <a:spAutoFit/>
-          </a:bodyPr>
-          <a:lstStyle/>
-          <a:p>
-            <a:pPr>
-              <a:spcAft>
-                <a:spcPts val="800"/>
-              </a:spcAft>
-            </a:pPr>
-            <a:r>
-              <a:rPr sz="2100" b="0">
+              <a:t>产品與體驗</a:t>
+            </a:r>
+          </a:p>
+        </p:txBody>
+      </p:sp>
+      <p:sp>
+        <p:nvSpPr>
+          <p:cNvPr id="9" name="Rounded Rectangle 8"/>
+          <p:cNvSpPr/>
+          <p:nvPr/>
+        </p:nvSpPr>
+        <p:spPr>
+          <a:xfrm>
+            <a:off x="4389120" y="2633472"/>
+            <a:ext cx="4114800" cy="173736"/>
+          </a:xfrm>
+          <a:prstGeom prst="roundRect">
+            <a:avLst/>
+          </a:prstGeom>
+          <a:solidFill>
+            <a:srgbClr val="30EBC8"/>
+          </a:solidFill>
+          <a:ln>
+            <a:noFill/>
+          </a:ln>
+        </p:spPr>
+        <p:style>
+          <a:lnRef idx="1">
+            <a:schemeClr val="accent1"/>
+          </a:lnRef>
+          <a:fillRef idx="3">
+            <a:schemeClr val="accent1"/>
+          </a:fillRef>
+          <a:effectRef idx="2">
+            <a:schemeClr val="accent1"/>
+          </a:effectRef>
+          <a:fontRef idx="minor">
+            <a:schemeClr val="lt1"/>
+          </a:fontRef>
+        </p:style>
+        <p:txBody>
+          <a:bodyPr rtlCol="0" anchor="ctr"/>
+          <a:lstStyle/>
+          <a:p>
+            <a:pPr algn="ctr"/>
+          </a:p>
+        </p:txBody>
+      </p:sp>
+      <p:sp>
+        <p:nvSpPr>
+          <p:cNvPr id="10" name="TextBox 9"/>
+          <p:cNvSpPr txBox="1"/>
+          <p:nvPr/>
+        </p:nvSpPr>
+        <p:spPr>
+          <a:xfrm>
+            <a:off x="9144000" y="2560320"/>
+            <a:ext cx="2286000" cy="365760"/>
+          </a:xfrm>
+          <a:prstGeom prst="rect">
+            <a:avLst/>
+          </a:prstGeom>
+          <a:noFill/>
+        </p:spPr>
+        <p:txBody>
+          <a:bodyPr wrap="square" lIns="9144" rIns="9144" tIns="9144" bIns="9144">
+            <a:spAutoFit/>
+          </a:bodyPr>
+          <a:lstStyle/>
+          <a:p>
+            <a:pPr>
+              <a:spcAft>
+                <a:spcPts val="800"/>
+              </a:spcAft>
+            </a:pPr>
+            <a:r>
+              <a:rPr sz="1800" b="0">
                 <a:solidFill>
                   <a:srgbClr val="F4F8FF"/>
                 </a:solidFill>
                 <a:latin typeface="Microsoft JhengHei"/>
                 <a:ea typeface="Microsoft JhengHei"/>
               </a:rPr>
-              <a:t>03  示範流程、實機驗收與使用者留存資料</a:t>
-            </a:r>
-          </a:p>
-        </p:txBody>
-      </p:sp>
-      <p:sp>
-        <p:nvSpPr>
-          <p:cNvPr id="10" name="TextBox 9"/>
-          <p:cNvSpPr txBox="1"/>
-          <p:nvPr/>
-        </p:nvSpPr>
-        <p:spPr>
-          <a:xfrm>
-            <a:off x="777240" y="4133087"/>
-            <a:ext cx="10607040" cy="457200"/>
-          </a:xfrm>
-          <a:prstGeom prst="rect">
-            <a:avLst/>
-          </a:prstGeom>
-          <a:noFill/>
-        </p:spPr>
-        <p:txBody>
-          <a:bodyPr wrap="square" lIns="9144" rIns="9144" tIns="9144" bIns="9144">
-            <a:spAutoFit/>
-          </a:bodyPr>
-          <a:lstStyle/>
-          <a:p>
-            <a:pPr>
-              <a:spcAft>
-                <a:spcPts val="800"/>
-              </a:spcAft>
-            </a:pPr>
-            <a:r>
-              <a:rPr sz="2100" b="0">
+              <a:t>45%  /  540 萬</a:t>
+            </a:r>
+          </a:p>
+        </p:txBody>
+      </p:sp>
+      <p:sp>
+        <p:nvSpPr>
+          <p:cNvPr id="11" name="TextBox 10"/>
+          <p:cNvSpPr txBox="1"/>
+          <p:nvPr/>
+        </p:nvSpPr>
+        <p:spPr>
+          <a:xfrm>
+            <a:off x="731520" y="3246120"/>
+            <a:ext cx="3657600" cy="365760"/>
+          </a:xfrm>
+          <a:prstGeom prst="rect">
+            <a:avLst/>
+          </a:prstGeom>
+          <a:noFill/>
+        </p:spPr>
+        <p:txBody>
+          <a:bodyPr wrap="square" lIns="9144" rIns="9144" tIns="9144" bIns="9144">
+            <a:spAutoFit/>
+          </a:bodyPr>
+          <a:lstStyle/>
+          <a:p>
+            <a:pPr>
+              <a:spcAft>
+                <a:spcPts val="800"/>
+              </a:spcAft>
+            </a:pPr>
+            <a:r>
+              <a:rPr sz="1800" b="0">
                 <a:solidFill>
                   <a:srgbClr val="F4F8FF"/>
                 </a:solidFill>
                 <a:latin typeface="Microsoft JhengHei"/>
                 <a:ea typeface="Microsoft JhengHei"/>
               </a:rPr>
-              <a:t>04  定價測試、單場成本與獲客成本</a:t>
-            </a:r>
-          </a:p>
-        </p:txBody>
-      </p:sp>
-      <p:sp>
-        <p:nvSpPr>
-          <p:cNvPr id="11" name="TextBox 10"/>
-          <p:cNvSpPr txBox="1"/>
-          <p:nvPr/>
-        </p:nvSpPr>
-        <p:spPr>
-          <a:xfrm>
-            <a:off x="777240" y="4764024"/>
-            <a:ext cx="10607040" cy="457200"/>
-          </a:xfrm>
-          <a:prstGeom prst="rect">
-            <a:avLst/>
-          </a:prstGeom>
-          <a:noFill/>
-        </p:spPr>
-        <p:txBody>
-          <a:bodyPr wrap="square" lIns="9144" rIns="9144" tIns="9144" bIns="9144">
-            <a:spAutoFit/>
-          </a:bodyPr>
-          <a:lstStyle/>
-          <a:p>
-            <a:pPr>
-              <a:spcAft>
-                <a:spcPts val="800"/>
-              </a:spcAft>
-            </a:pPr>
-            <a:r>
-              <a:rPr sz="2100" b="0">
+              <a:t>合作試辦與客戶開發</a:t>
+            </a:r>
+          </a:p>
+        </p:txBody>
+      </p:sp>
+      <p:sp>
+        <p:nvSpPr>
+          <p:cNvPr id="12" name="Rounded Rectangle 11"/>
+          <p:cNvSpPr/>
+          <p:nvPr/>
+        </p:nvSpPr>
+        <p:spPr>
+          <a:xfrm>
+            <a:off x="4389120" y="3319272"/>
+            <a:ext cx="2286000" cy="173736"/>
+          </a:xfrm>
+          <a:prstGeom prst="roundRect">
+            <a:avLst/>
+          </a:prstGeom>
+          <a:solidFill>
+            <a:srgbClr val="24C8FF"/>
+          </a:solidFill>
+          <a:ln>
+            <a:noFill/>
+          </a:ln>
+        </p:spPr>
+        <p:style>
+          <a:lnRef idx="1">
+            <a:schemeClr val="accent1"/>
+          </a:lnRef>
+          <a:fillRef idx="3">
+            <a:schemeClr val="accent1"/>
+          </a:fillRef>
+          <a:effectRef idx="2">
+            <a:schemeClr val="accent1"/>
+          </a:effectRef>
+          <a:fontRef idx="minor">
+            <a:schemeClr val="lt1"/>
+          </a:fontRef>
+        </p:style>
+        <p:txBody>
+          <a:bodyPr rtlCol="0" anchor="ctr"/>
+          <a:lstStyle/>
+          <a:p>
+            <a:pPr algn="ctr"/>
+          </a:p>
+        </p:txBody>
+      </p:sp>
+      <p:sp>
+        <p:nvSpPr>
+          <p:cNvPr id="13" name="TextBox 12"/>
+          <p:cNvSpPr txBox="1"/>
+          <p:nvPr/>
+        </p:nvSpPr>
+        <p:spPr>
+          <a:xfrm>
+            <a:off x="9144000" y="3246120"/>
+            <a:ext cx="2286000" cy="365760"/>
+          </a:xfrm>
+          <a:prstGeom prst="rect">
+            <a:avLst/>
+          </a:prstGeom>
+          <a:noFill/>
+        </p:spPr>
+        <p:txBody>
+          <a:bodyPr wrap="square" lIns="9144" rIns="9144" tIns="9144" bIns="9144">
+            <a:spAutoFit/>
+          </a:bodyPr>
+          <a:lstStyle/>
+          <a:p>
+            <a:pPr>
+              <a:spcAft>
+                <a:spcPts val="800"/>
+              </a:spcAft>
+            </a:pPr>
+            <a:r>
+              <a:rPr sz="1800" b="0">
                 <a:solidFill>
                   <a:srgbClr val="F4F8FF"/>
                 </a:solidFill>
                 <a:latin typeface="Microsoft JhengHei"/>
                 <a:ea typeface="Microsoft JhengHei"/>
               </a:rPr>
-              <a:t>05  募資金額、現金預算、估值及使用條件</a:t>
+              <a:t>25%  /  300 萬</a:t>
+            </a:r>
+          </a:p>
+        </p:txBody>
+      </p:sp>
+      <p:sp>
+        <p:nvSpPr>
+          <p:cNvPr id="14" name="TextBox 13"/>
+          <p:cNvSpPr txBox="1"/>
+          <p:nvPr/>
+        </p:nvSpPr>
+        <p:spPr>
+          <a:xfrm>
+            <a:off x="731520" y="3931920"/>
+            <a:ext cx="3657600" cy="365760"/>
+          </a:xfrm>
+          <a:prstGeom prst="rect">
+            <a:avLst/>
+          </a:prstGeom>
+          <a:noFill/>
+        </p:spPr>
+        <p:txBody>
+          <a:bodyPr wrap="square" lIns="9144" rIns="9144" tIns="9144" bIns="9144">
+            <a:spAutoFit/>
+          </a:bodyPr>
+          <a:lstStyle/>
+          <a:p>
+            <a:pPr>
+              <a:spcAft>
+                <a:spcPts val="800"/>
+              </a:spcAft>
+            </a:pPr>
+            <a:r>
+              <a:rPr sz="1800" b="0">
+                <a:solidFill>
+                  <a:srgbClr val="F4F8FF"/>
+                </a:solidFill>
+                <a:latin typeface="Microsoft JhengHei"/>
+                <a:ea typeface="Microsoft JhengHei"/>
+              </a:rPr>
+              <a:t>營運、資料保護與法務</a:t>
+            </a:r>
+          </a:p>
+        </p:txBody>
+      </p:sp>
+      <p:sp>
+        <p:nvSpPr>
+          <p:cNvPr id="15" name="Rounded Rectangle 14"/>
+          <p:cNvSpPr/>
+          <p:nvPr/>
+        </p:nvSpPr>
+        <p:spPr>
+          <a:xfrm>
+            <a:off x="4389120" y="4005072"/>
+            <a:ext cx="1371600" cy="173736"/>
+          </a:xfrm>
+          <a:prstGeom prst="roundRect">
+            <a:avLst/>
+          </a:prstGeom>
+          <a:solidFill>
+            <a:srgbClr val="9B6CFF"/>
+          </a:solidFill>
+          <a:ln>
+            <a:noFill/>
+          </a:ln>
+        </p:spPr>
+        <p:style>
+          <a:lnRef idx="1">
+            <a:schemeClr val="accent1"/>
+          </a:lnRef>
+          <a:fillRef idx="3">
+            <a:schemeClr val="accent1"/>
+          </a:fillRef>
+          <a:effectRef idx="2">
+            <a:schemeClr val="accent1"/>
+          </a:effectRef>
+          <a:fontRef idx="minor">
+            <a:schemeClr val="lt1"/>
+          </a:fontRef>
+        </p:style>
+        <p:txBody>
+          <a:bodyPr rtlCol="0" anchor="ctr"/>
+          <a:lstStyle/>
+          <a:p>
+            <a:pPr algn="ctr"/>
+          </a:p>
+        </p:txBody>
+      </p:sp>
+      <p:sp>
+        <p:nvSpPr>
+          <p:cNvPr id="16" name="TextBox 15"/>
+          <p:cNvSpPr txBox="1"/>
+          <p:nvPr/>
+        </p:nvSpPr>
+        <p:spPr>
+          <a:xfrm>
+            <a:off x="9144000" y="3931920"/>
+            <a:ext cx="2286000" cy="365760"/>
+          </a:xfrm>
+          <a:prstGeom prst="rect">
+            <a:avLst/>
+          </a:prstGeom>
+          <a:noFill/>
+        </p:spPr>
+        <p:txBody>
+          <a:bodyPr wrap="square" lIns="9144" rIns="9144" tIns="9144" bIns="9144">
+            <a:spAutoFit/>
+          </a:bodyPr>
+          <a:lstStyle/>
+          <a:p>
+            <a:pPr>
+              <a:spcAft>
+                <a:spcPts val="800"/>
+              </a:spcAft>
+            </a:pPr>
+            <a:r>
+              <a:rPr sz="1800" b="0">
+                <a:solidFill>
+                  <a:srgbClr val="F4F8FF"/>
+                </a:solidFill>
+                <a:latin typeface="Microsoft JhengHei"/>
+                <a:ea typeface="Microsoft JhengHei"/>
+              </a:rPr>
+              <a:t>15%  /  180 萬</a:t>
+            </a:r>
+          </a:p>
+        </p:txBody>
+      </p:sp>
+      <p:sp>
+        <p:nvSpPr>
+          <p:cNvPr id="17" name="TextBox 16"/>
+          <p:cNvSpPr txBox="1"/>
+          <p:nvPr/>
+        </p:nvSpPr>
+        <p:spPr>
+          <a:xfrm>
+            <a:off x="731520" y="4617720"/>
+            <a:ext cx="3657600" cy="365760"/>
+          </a:xfrm>
+          <a:prstGeom prst="rect">
+            <a:avLst/>
+          </a:prstGeom>
+          <a:noFill/>
+        </p:spPr>
+        <p:txBody>
+          <a:bodyPr wrap="square" lIns="9144" rIns="9144" tIns="9144" bIns="9144">
+            <a:spAutoFit/>
+          </a:bodyPr>
+          <a:lstStyle/>
+          <a:p>
+            <a:pPr>
+              <a:spcAft>
+                <a:spcPts val="800"/>
+              </a:spcAft>
+            </a:pPr>
+            <a:r>
+              <a:rPr sz="1800" b="0">
+                <a:solidFill>
+                  <a:srgbClr val="F4F8FF"/>
+                </a:solidFill>
+                <a:latin typeface="Microsoft JhengHei"/>
+                <a:ea typeface="Microsoft JhengHei"/>
+              </a:rPr>
+              <a:t>現金緩衝</a:t>
+            </a:r>
+          </a:p>
+        </p:txBody>
+      </p:sp>
+      <p:sp>
+        <p:nvSpPr>
+          <p:cNvPr id="18" name="Rounded Rectangle 17"/>
+          <p:cNvSpPr/>
+          <p:nvPr/>
+        </p:nvSpPr>
+        <p:spPr>
+          <a:xfrm>
+            <a:off x="4389120" y="4690872"/>
+            <a:ext cx="1371600" cy="173736"/>
+          </a:xfrm>
+          <a:prstGeom prst="roundRect">
+            <a:avLst/>
+          </a:prstGeom>
+          <a:solidFill>
+            <a:srgbClr val="FFCB66"/>
+          </a:solidFill>
+          <a:ln>
+            <a:noFill/>
+          </a:ln>
+        </p:spPr>
+        <p:style>
+          <a:lnRef idx="1">
+            <a:schemeClr val="accent1"/>
+          </a:lnRef>
+          <a:fillRef idx="3">
+            <a:schemeClr val="accent1"/>
+          </a:fillRef>
+          <a:effectRef idx="2">
+            <a:schemeClr val="accent1"/>
+          </a:effectRef>
+          <a:fontRef idx="minor">
+            <a:schemeClr val="lt1"/>
+          </a:fontRef>
+        </p:style>
+        <p:txBody>
+          <a:bodyPr rtlCol="0" anchor="ctr"/>
+          <a:lstStyle/>
+          <a:p>
+            <a:pPr algn="ctr"/>
+          </a:p>
+        </p:txBody>
+      </p:sp>
+      <p:sp>
+        <p:nvSpPr>
+          <p:cNvPr id="19" name="TextBox 18"/>
+          <p:cNvSpPr txBox="1"/>
+          <p:nvPr/>
+        </p:nvSpPr>
+        <p:spPr>
+          <a:xfrm>
+            <a:off x="9144000" y="4617720"/>
+            <a:ext cx="2286000" cy="365760"/>
+          </a:xfrm>
+          <a:prstGeom prst="rect">
+            <a:avLst/>
+          </a:prstGeom>
+          <a:noFill/>
+        </p:spPr>
+        <p:txBody>
+          <a:bodyPr wrap="square" lIns="9144" rIns="9144" tIns="9144" bIns="9144">
+            <a:spAutoFit/>
+          </a:bodyPr>
+          <a:lstStyle/>
+          <a:p>
+            <a:pPr>
+              <a:spcAft>
+                <a:spcPts val="800"/>
+              </a:spcAft>
+            </a:pPr>
+            <a:r>
+              <a:rPr sz="1800" b="0">
+                <a:solidFill>
+                  <a:srgbClr val="F4F8FF"/>
+                </a:solidFill>
+                <a:latin typeface="Microsoft JhengHei"/>
+                <a:ea typeface="Microsoft JhengHei"/>
+              </a:rPr>
+              <a:t>15%  /  180 萬</a:t>
+            </a:r>
+          </a:p>
+        </p:txBody>
+      </p:sp>
+      <p:sp>
+        <p:nvSpPr>
+          <p:cNvPr id="20" name="TextBox 19"/>
+          <p:cNvSpPr txBox="1"/>
+          <p:nvPr/>
+        </p:nvSpPr>
+        <p:spPr>
+          <a:xfrm>
+            <a:off x="731520" y="5669280"/>
+            <a:ext cx="10698480" cy="411480"/>
+          </a:xfrm>
+          <a:prstGeom prst="rect">
+            <a:avLst/>
+          </a:prstGeom>
+          <a:noFill/>
+        </p:spPr>
+        <p:txBody>
+          <a:bodyPr wrap="square" lIns="9144" rIns="9144" tIns="9144" bIns="9144">
+            <a:spAutoFit/>
+          </a:bodyPr>
+          <a:lstStyle/>
+          <a:p>
+            <a:pPr>
+              <a:spcAft>
+                <a:spcPts val="800"/>
+              </a:spcAft>
+            </a:pPr>
+            <a:r>
+              <a:rPr sz="2000" b="1">
+                <a:solidFill>
+                  <a:srgbClr val="30EBC8"/>
+                </a:solidFill>
+                <a:latin typeface="Microsoft JhengHei"/>
+                <a:ea typeface="Microsoft JhengHei"/>
+              </a:rPr>
+              <a:t>投入門檻：付費試辦 → 再採購 → 正向單場貢獻 → 擴大銷售</a:t>
             </a:r>
           </a:p>
         </p:txBody>
@@ -12318,7 +14330,7 @@
                 <a:latin typeface="Microsoft JhengHei"/>
                 <a:ea typeface="Microsoft JhengHei"/>
               </a:rPr>
-              <a:t>募資討論稿・2026.09.14｜商業方案／數值假設待確認</a:t>
+              <a:t>募資討論稿・2026.09.16｜商業方案／數值假設待確認</a:t>
             </a:r>
           </a:p>
         </p:txBody>
@@ -12899,6 +14911,2198 @@
                 <a:ea typeface="Microsoft JhengHei"/>
               </a:rPr>
               <a:t>需要看見到場與實際領取</a:t>
+            </a:r>
+          </a:p>
+        </p:txBody>
+      </p:sp>
+    </p:spTree>
+  </p:cSld>
+  <p:clrMapOvr>
+    <a:masterClrMapping/>
+  </p:clrMapOvr>
+</p:sld>
+</file>
+
+<file path=ppt/slides/slide20.xml><?xml version="1.0" encoding="utf-8"?>
+<p:sld xmlns:a="http://schemas.openxmlformats.org/drawingml/2006/main" xmlns:p="http://schemas.openxmlformats.org/presentationml/2006/main" xmlns:r="http://schemas.openxmlformats.org/officeDocument/2006/relationships">
+  <p:cSld>
+    <p:bg>
+      <p:bgPr>
+        <a:solidFill>
+          <a:srgbClr val="050711"/>
+        </a:solidFill>
+        <a:effectLst/>
+      </p:bgPr>
+    </p:bg>
+    <p:spTree>
+      <p:nvGrpSpPr>
+        <p:cNvPr id="1" name=""/>
+        <p:cNvGrpSpPr/>
+        <p:nvPr/>
+      </p:nvGrpSpPr>
+      <p:grpSpPr/>
+      <p:sp>
+        <p:nvSpPr>
+          <p:cNvPr id="2" name="Rounded Rectangle 1"/>
+          <p:cNvSpPr/>
+          <p:nvPr/>
+        </p:nvSpPr>
+        <p:spPr>
+          <a:xfrm>
+            <a:off x="438912" y="356616"/>
+            <a:ext cx="73152" cy="210312"/>
+          </a:xfrm>
+          <a:prstGeom prst="roundRect">
+            <a:avLst/>
+          </a:prstGeom>
+          <a:solidFill>
+            <a:srgbClr val="30EBC8"/>
+          </a:solidFill>
+          <a:ln>
+            <a:noFill/>
+          </a:ln>
+        </p:spPr>
+        <p:style>
+          <a:lnRef idx="1">
+            <a:schemeClr val="accent1"/>
+          </a:lnRef>
+          <a:fillRef idx="3">
+            <a:schemeClr val="accent1"/>
+          </a:fillRef>
+          <a:effectRef idx="2">
+            <a:schemeClr val="accent1"/>
+          </a:effectRef>
+          <a:fontRef idx="minor">
+            <a:schemeClr val="lt1"/>
+          </a:fontRef>
+        </p:style>
+        <p:txBody>
+          <a:bodyPr rtlCol="0" anchor="ctr"/>
+          <a:lstStyle/>
+          <a:p>
+            <a:pPr algn="ctr"/>
+          </a:p>
+        </p:txBody>
+      </p:sp>
+      <p:sp>
+        <p:nvSpPr>
+          <p:cNvPr id="3" name="TextBox 2"/>
+          <p:cNvSpPr txBox="1"/>
+          <p:nvPr/>
+        </p:nvSpPr>
+        <p:spPr>
+          <a:xfrm>
+            <a:off x="658368" y="292608"/>
+            <a:ext cx="10058400" cy="320040"/>
+          </a:xfrm>
+          <a:prstGeom prst="rect">
+            <a:avLst/>
+          </a:prstGeom>
+          <a:noFill/>
+        </p:spPr>
+        <p:txBody>
+          <a:bodyPr wrap="square" lIns="9144" rIns="9144" tIns="9144" bIns="9144">
+            <a:spAutoFit/>
+          </a:bodyPr>
+          <a:lstStyle/>
+          <a:p>
+            <a:pPr>
+              <a:spcAft>
+                <a:spcPts val="800"/>
+              </a:spcAft>
+            </a:pPr>
+            <a:r>
+              <a:rPr sz="1100" b="1">
+                <a:solidFill>
+                  <a:srgbClr val="30EBC8"/>
+                </a:solidFill>
+                <a:latin typeface="Microsoft JhengHei"/>
+                <a:ea typeface="Microsoft JhengHei"/>
+              </a:rPr>
+              <a:t>NEONSHIFT  /  團隊與投資人合作｜待補具名資料</a:t>
+            </a:r>
+          </a:p>
+        </p:txBody>
+      </p:sp>
+      <p:sp>
+        <p:nvSpPr>
+          <p:cNvPr id="4" name="TextBox 3"/>
+          <p:cNvSpPr txBox="1"/>
+          <p:nvPr/>
+        </p:nvSpPr>
+        <p:spPr>
+          <a:xfrm>
+            <a:off x="658368" y="850392"/>
+            <a:ext cx="10881360" cy="713232"/>
+          </a:xfrm>
+          <a:prstGeom prst="rect">
+            <a:avLst/>
+          </a:prstGeom>
+          <a:noFill/>
+        </p:spPr>
+        <p:txBody>
+          <a:bodyPr wrap="square" lIns="9144" rIns="9144" tIns="9144" bIns="9144">
+            <a:spAutoFit/>
+          </a:bodyPr>
+          <a:lstStyle/>
+          <a:p>
+            <a:pPr>
+              <a:spcAft>
+                <a:spcPts val="800"/>
+              </a:spcAft>
+            </a:pPr>
+            <a:r>
+              <a:rPr sz="3000" b="1">
+                <a:solidFill>
+                  <a:srgbClr val="F4F8FF"/>
+                </a:solidFill>
+                <a:latin typeface="Microsoft JhengHei"/>
+                <a:ea typeface="Microsoft JhengHei"/>
+              </a:rPr>
+              <a:t>需要能同時理解運動現場與數位產品的團隊</a:t>
+            </a:r>
+          </a:p>
+        </p:txBody>
+      </p:sp>
+      <p:sp>
+        <p:nvSpPr>
+          <p:cNvPr id="5" name="TextBox 4"/>
+          <p:cNvSpPr txBox="1"/>
+          <p:nvPr/>
+        </p:nvSpPr>
+        <p:spPr>
+          <a:xfrm>
+            <a:off x="676656" y="6464808"/>
+            <a:ext cx="9144000" cy="201168"/>
+          </a:xfrm>
+          <a:prstGeom prst="rect">
+            <a:avLst/>
+          </a:prstGeom>
+          <a:noFill/>
+        </p:spPr>
+        <p:txBody>
+          <a:bodyPr wrap="square" lIns="9144" rIns="9144" tIns="9144" bIns="9144">
+            <a:spAutoFit/>
+          </a:bodyPr>
+          <a:lstStyle/>
+          <a:p>
+            <a:pPr>
+              <a:spcAft>
+                <a:spcPts val="800"/>
+              </a:spcAft>
+            </a:pPr>
+            <a:r>
+              <a:rPr sz="900" b="0">
+                <a:solidFill>
+                  <a:srgbClr val="AAB7CC"/>
+                </a:solidFill>
+                <a:latin typeface="Microsoft JhengHei"/>
+                <a:ea typeface="Microsoft JhengHei"/>
+              </a:rPr>
+              <a:t>募資討論稿・2026.09.16｜商業方案／數值假設待確認</a:t>
+            </a:r>
+          </a:p>
+        </p:txBody>
+      </p:sp>
+      <p:sp>
+        <p:nvSpPr>
+          <p:cNvPr id="6" name="TextBox 5"/>
+          <p:cNvSpPr txBox="1"/>
+          <p:nvPr/>
+        </p:nvSpPr>
+        <p:spPr>
+          <a:xfrm>
+            <a:off x="10991088" y="6428232"/>
+            <a:ext cx="457200" cy="274320"/>
+          </a:xfrm>
+          <a:prstGeom prst="rect">
+            <a:avLst/>
+          </a:prstGeom>
+          <a:noFill/>
+        </p:spPr>
+        <p:txBody>
+          <a:bodyPr wrap="square" lIns="9144" rIns="9144" tIns="9144" bIns="9144">
+            <a:spAutoFit/>
+          </a:bodyPr>
+          <a:lstStyle/>
+          <a:p>
+            <a:pPr>
+              <a:spcAft>
+                <a:spcPts val="800"/>
+              </a:spcAft>
+            </a:pPr>
+            <a:r>
+              <a:rPr sz="1200" b="0">
+                <a:solidFill>
+                  <a:srgbClr val="30EBC8"/>
+                </a:solidFill>
+                <a:latin typeface="Microsoft JhengHei"/>
+                <a:ea typeface="Microsoft JhengHei"/>
+              </a:rPr>
+              <a:t>20</a:t>
+            </a:r>
+          </a:p>
+        </p:txBody>
+      </p:sp>
+      <p:sp>
+        <p:nvSpPr>
+          <p:cNvPr id="7" name="Rounded Rectangle 6"/>
+          <p:cNvSpPr/>
+          <p:nvPr/>
+        </p:nvSpPr>
+        <p:spPr>
+          <a:xfrm>
+            <a:off x="676656" y="2514600"/>
+            <a:ext cx="3477768" cy="3063240"/>
+          </a:xfrm>
+          <a:prstGeom prst="roundRect">
+            <a:avLst/>
+          </a:prstGeom>
+          <a:solidFill>
+            <a:srgbClr val="0B1020"/>
+          </a:solidFill>
+          <a:ln>
+            <a:noFill/>
+          </a:ln>
+        </p:spPr>
+        <p:style>
+          <a:lnRef idx="1">
+            <a:schemeClr val="accent1"/>
+          </a:lnRef>
+          <a:fillRef idx="3">
+            <a:schemeClr val="accent1"/>
+          </a:fillRef>
+          <a:effectRef idx="2">
+            <a:schemeClr val="accent1"/>
+          </a:effectRef>
+          <a:fontRef idx="minor">
+            <a:schemeClr val="lt1"/>
+          </a:fontRef>
+        </p:style>
+        <p:txBody>
+          <a:bodyPr rtlCol="0" anchor="ctr"/>
+          <a:lstStyle/>
+          <a:p>
+            <a:pPr algn="ctr"/>
+          </a:p>
+        </p:txBody>
+      </p:sp>
+      <p:sp>
+        <p:nvSpPr>
+          <p:cNvPr id="8" name="TextBox 7"/>
+          <p:cNvSpPr txBox="1"/>
+          <p:nvPr/>
+        </p:nvSpPr>
+        <p:spPr>
+          <a:xfrm>
+            <a:off x="886968" y="2715768"/>
+            <a:ext cx="3057144" cy="320040"/>
+          </a:xfrm>
+          <a:prstGeom prst="rect">
+            <a:avLst/>
+          </a:prstGeom>
+          <a:noFill/>
+        </p:spPr>
+        <p:txBody>
+          <a:bodyPr wrap="square" lIns="9144" rIns="9144" tIns="9144" bIns="9144">
+            <a:spAutoFit/>
+          </a:bodyPr>
+          <a:lstStyle/>
+          <a:p>
+            <a:pPr>
+              <a:spcAft>
+                <a:spcPts val="800"/>
+              </a:spcAft>
+            </a:pPr>
+            <a:r>
+              <a:rPr sz="1300" b="0">
+                <a:solidFill>
+                  <a:srgbClr val="30EBC8"/>
+                </a:solidFill>
+                <a:latin typeface="Microsoft JhengHei"/>
+                <a:ea typeface="Microsoft JhengHei"/>
+              </a:rPr>
+              <a:t>01</a:t>
+            </a:r>
+          </a:p>
+        </p:txBody>
+      </p:sp>
+      <p:sp>
+        <p:nvSpPr>
+          <p:cNvPr id="9" name="TextBox 8"/>
+          <p:cNvSpPr txBox="1"/>
+          <p:nvPr/>
+        </p:nvSpPr>
+        <p:spPr>
+          <a:xfrm>
+            <a:off x="886968" y="3236976"/>
+            <a:ext cx="3057144" cy="530352"/>
+          </a:xfrm>
+          <a:prstGeom prst="rect">
+            <a:avLst/>
+          </a:prstGeom>
+          <a:noFill/>
+        </p:spPr>
+        <p:txBody>
+          <a:bodyPr wrap="square" lIns="9144" rIns="9144" tIns="9144" bIns="9144">
+            <a:spAutoFit/>
+          </a:bodyPr>
+          <a:lstStyle/>
+          <a:p>
+            <a:pPr>
+              <a:spcAft>
+                <a:spcPts val="800"/>
+              </a:spcAft>
+            </a:pPr>
+            <a:r>
+              <a:rPr sz="2200" b="1">
+                <a:solidFill>
+                  <a:srgbClr val="F4F8FF"/>
+                </a:solidFill>
+                <a:latin typeface="Microsoft JhengHei"/>
+                <a:ea typeface="Microsoft JhengHei"/>
+              </a:rPr>
+              <a:t>產品與技術</a:t>
+            </a:r>
+          </a:p>
+        </p:txBody>
+      </p:sp>
+      <p:sp>
+        <p:nvSpPr>
+          <p:cNvPr id="10" name="TextBox 9"/>
+          <p:cNvSpPr txBox="1"/>
+          <p:nvPr/>
+        </p:nvSpPr>
+        <p:spPr>
+          <a:xfrm>
+            <a:off x="886968" y="3931920"/>
+            <a:ext cx="3057144" cy="1508760"/>
+          </a:xfrm>
+          <a:prstGeom prst="rect">
+            <a:avLst/>
+          </a:prstGeom>
+          <a:noFill/>
+        </p:spPr>
+        <p:txBody>
+          <a:bodyPr wrap="square" lIns="9144" rIns="9144" tIns="9144" bIns="9144">
+            <a:spAutoFit/>
+          </a:bodyPr>
+          <a:lstStyle/>
+          <a:p>
+            <a:pPr>
+              <a:spcAft>
+                <a:spcPts val="800"/>
+              </a:spcAft>
+            </a:pPr>
+            <a:r>
+              <a:rPr sz="1700" b="0">
+                <a:solidFill>
+                  <a:srgbClr val="AAB7CC"/>
+                </a:solidFill>
+                <a:latin typeface="Microsoft JhengHei"/>
+                <a:ea typeface="Microsoft JhengHei"/>
+              </a:rPr>
+              <a:t>創辦人姓名／經歷：待補</a:t>
+            </a:r>
+          </a:p>
+          <a:p>
+            <a:pPr>
+              <a:spcAft>
+                <a:spcPts val="800"/>
+              </a:spcAft>
+            </a:pPr>
+            <a:r>
+              <a:rPr sz="1700" b="0">
+                <a:solidFill>
+                  <a:srgbClr val="AAB7CC"/>
+                </a:solidFill>
+                <a:latin typeface="Microsoft JhengHei"/>
+                <a:ea typeface="Microsoft JhengHei"/>
+              </a:rPr>
+              <a:t>產品與工程負責人：待補</a:t>
+            </a:r>
+          </a:p>
+          <a:p>
+            <a:pPr>
+              <a:spcAft>
+                <a:spcPts val="800"/>
+              </a:spcAft>
+            </a:pPr>
+            <a:r>
+              <a:rPr sz="1700" b="0">
+                <a:solidFill>
+                  <a:srgbClr val="AAB7CC"/>
+                </a:solidFill>
+                <a:latin typeface="Microsoft JhengHei"/>
+                <a:ea typeface="Microsoft JhengHei"/>
+              </a:rPr>
+              <a:t>可展示成果與投入比例：待補</a:t>
+            </a:r>
+          </a:p>
+        </p:txBody>
+      </p:sp>
+      <p:sp>
+        <p:nvSpPr>
+          <p:cNvPr id="11" name="Rounded Rectangle 10"/>
+          <p:cNvSpPr/>
+          <p:nvPr/>
+        </p:nvSpPr>
+        <p:spPr>
+          <a:xfrm>
+            <a:off x="4355592" y="2514600"/>
+            <a:ext cx="3477768" cy="3063240"/>
+          </a:xfrm>
+          <a:prstGeom prst="roundRect">
+            <a:avLst/>
+          </a:prstGeom>
+          <a:solidFill>
+            <a:srgbClr val="0B1020"/>
+          </a:solidFill>
+          <a:ln>
+            <a:noFill/>
+          </a:ln>
+        </p:spPr>
+        <p:style>
+          <a:lnRef idx="1">
+            <a:schemeClr val="accent1"/>
+          </a:lnRef>
+          <a:fillRef idx="3">
+            <a:schemeClr val="accent1"/>
+          </a:fillRef>
+          <a:effectRef idx="2">
+            <a:schemeClr val="accent1"/>
+          </a:effectRef>
+          <a:fontRef idx="minor">
+            <a:schemeClr val="lt1"/>
+          </a:fontRef>
+        </p:style>
+        <p:txBody>
+          <a:bodyPr rtlCol="0" anchor="ctr"/>
+          <a:lstStyle/>
+          <a:p>
+            <a:pPr algn="ctr"/>
+          </a:p>
+        </p:txBody>
+      </p:sp>
+      <p:sp>
+        <p:nvSpPr>
+          <p:cNvPr id="12" name="TextBox 11"/>
+          <p:cNvSpPr txBox="1"/>
+          <p:nvPr/>
+        </p:nvSpPr>
+        <p:spPr>
+          <a:xfrm>
+            <a:off x="4565904" y="2715768"/>
+            <a:ext cx="3057144" cy="320040"/>
+          </a:xfrm>
+          <a:prstGeom prst="rect">
+            <a:avLst/>
+          </a:prstGeom>
+          <a:noFill/>
+        </p:spPr>
+        <p:txBody>
+          <a:bodyPr wrap="square" lIns="9144" rIns="9144" tIns="9144" bIns="9144">
+            <a:spAutoFit/>
+          </a:bodyPr>
+          <a:lstStyle/>
+          <a:p>
+            <a:pPr>
+              <a:spcAft>
+                <a:spcPts val="800"/>
+              </a:spcAft>
+            </a:pPr>
+            <a:r>
+              <a:rPr sz="1300" b="0">
+                <a:solidFill>
+                  <a:srgbClr val="30EBC8"/>
+                </a:solidFill>
+                <a:latin typeface="Microsoft JhengHei"/>
+                <a:ea typeface="Microsoft JhengHei"/>
+              </a:rPr>
+              <a:t>02</a:t>
+            </a:r>
+          </a:p>
+        </p:txBody>
+      </p:sp>
+      <p:sp>
+        <p:nvSpPr>
+          <p:cNvPr id="13" name="TextBox 12"/>
+          <p:cNvSpPr txBox="1"/>
+          <p:nvPr/>
+        </p:nvSpPr>
+        <p:spPr>
+          <a:xfrm>
+            <a:off x="4565904" y="3236976"/>
+            <a:ext cx="3057144" cy="530352"/>
+          </a:xfrm>
+          <a:prstGeom prst="rect">
+            <a:avLst/>
+          </a:prstGeom>
+          <a:noFill/>
+        </p:spPr>
+        <p:txBody>
+          <a:bodyPr wrap="square" lIns="9144" rIns="9144" tIns="9144" bIns="9144">
+            <a:spAutoFit/>
+          </a:bodyPr>
+          <a:lstStyle/>
+          <a:p>
+            <a:pPr>
+              <a:spcAft>
+                <a:spcPts val="800"/>
+              </a:spcAft>
+            </a:pPr>
+            <a:r>
+              <a:rPr sz="2200" b="1">
+                <a:solidFill>
+                  <a:srgbClr val="F4F8FF"/>
+                </a:solidFill>
+                <a:latin typeface="Microsoft JhengHei"/>
+                <a:ea typeface="Microsoft JhengHei"/>
+              </a:rPr>
+              <a:t>活動與商務</a:t>
+            </a:r>
+          </a:p>
+        </p:txBody>
+      </p:sp>
+      <p:sp>
+        <p:nvSpPr>
+          <p:cNvPr id="14" name="TextBox 13"/>
+          <p:cNvSpPr txBox="1"/>
+          <p:nvPr/>
+        </p:nvSpPr>
+        <p:spPr>
+          <a:xfrm>
+            <a:off x="4565904" y="3931920"/>
+            <a:ext cx="3057144" cy="1508760"/>
+          </a:xfrm>
+          <a:prstGeom prst="rect">
+            <a:avLst/>
+          </a:prstGeom>
+          <a:noFill/>
+        </p:spPr>
+        <p:txBody>
+          <a:bodyPr wrap="square" lIns="9144" rIns="9144" tIns="9144" bIns="9144">
+            <a:spAutoFit/>
+          </a:bodyPr>
+          <a:lstStyle/>
+          <a:p>
+            <a:pPr>
+              <a:spcAft>
+                <a:spcPts val="800"/>
+              </a:spcAft>
+            </a:pPr>
+            <a:r>
+              <a:rPr sz="1700" b="0">
+                <a:solidFill>
+                  <a:srgbClr val="AAB7CC"/>
+                </a:solidFill>
+                <a:latin typeface="Microsoft JhengHei"/>
+                <a:ea typeface="Microsoft JhengHei"/>
+              </a:rPr>
+              <a:t>運動活動／品牌經歷：待補</a:t>
+            </a:r>
+          </a:p>
+          <a:p>
+            <a:pPr>
+              <a:spcAft>
+                <a:spcPts val="800"/>
+              </a:spcAft>
+            </a:pPr>
+            <a:r>
+              <a:rPr sz="1700" b="0">
+                <a:solidFill>
+                  <a:srgbClr val="AAB7CC"/>
+                </a:solidFill>
+                <a:latin typeface="Microsoft JhengHei"/>
+                <a:ea typeface="Microsoft JhengHei"/>
+              </a:rPr>
+              <a:t>已確認合作與推薦人：待補</a:t>
+            </a:r>
+          </a:p>
+          <a:p>
+            <a:pPr>
+              <a:spcAft>
+                <a:spcPts val="800"/>
+              </a:spcAft>
+            </a:pPr>
+            <a:r>
+              <a:rPr sz="1700" b="0">
+                <a:solidFill>
+                  <a:srgbClr val="AAB7CC"/>
+                </a:solidFill>
+                <a:latin typeface="Microsoft JhengHei"/>
+                <a:ea typeface="Microsoft JhengHei"/>
+              </a:rPr>
+              <a:t>客戶開發及現場交付負責人</a:t>
+            </a:r>
+          </a:p>
+        </p:txBody>
+      </p:sp>
+      <p:sp>
+        <p:nvSpPr>
+          <p:cNvPr id="15" name="Rounded Rectangle 14"/>
+          <p:cNvSpPr/>
+          <p:nvPr/>
+        </p:nvSpPr>
+        <p:spPr>
+          <a:xfrm>
+            <a:off x="8034528" y="2514600"/>
+            <a:ext cx="3477768" cy="3063240"/>
+          </a:xfrm>
+          <a:prstGeom prst="roundRect">
+            <a:avLst/>
+          </a:prstGeom>
+          <a:solidFill>
+            <a:srgbClr val="0B1020"/>
+          </a:solidFill>
+          <a:ln>
+            <a:noFill/>
+          </a:ln>
+        </p:spPr>
+        <p:style>
+          <a:lnRef idx="1">
+            <a:schemeClr val="accent1"/>
+          </a:lnRef>
+          <a:fillRef idx="3">
+            <a:schemeClr val="accent1"/>
+          </a:fillRef>
+          <a:effectRef idx="2">
+            <a:schemeClr val="accent1"/>
+          </a:effectRef>
+          <a:fontRef idx="minor">
+            <a:schemeClr val="lt1"/>
+          </a:fontRef>
+        </p:style>
+        <p:txBody>
+          <a:bodyPr rtlCol="0" anchor="ctr"/>
+          <a:lstStyle/>
+          <a:p>
+            <a:pPr algn="ctr"/>
+          </a:p>
+        </p:txBody>
+      </p:sp>
+      <p:sp>
+        <p:nvSpPr>
+          <p:cNvPr id="16" name="TextBox 15"/>
+          <p:cNvSpPr txBox="1"/>
+          <p:nvPr/>
+        </p:nvSpPr>
+        <p:spPr>
+          <a:xfrm>
+            <a:off x="8244840" y="2715768"/>
+            <a:ext cx="3057144" cy="320040"/>
+          </a:xfrm>
+          <a:prstGeom prst="rect">
+            <a:avLst/>
+          </a:prstGeom>
+          <a:noFill/>
+        </p:spPr>
+        <p:txBody>
+          <a:bodyPr wrap="square" lIns="9144" rIns="9144" tIns="9144" bIns="9144">
+            <a:spAutoFit/>
+          </a:bodyPr>
+          <a:lstStyle/>
+          <a:p>
+            <a:pPr>
+              <a:spcAft>
+                <a:spcPts val="800"/>
+              </a:spcAft>
+            </a:pPr>
+            <a:r>
+              <a:rPr sz="1300" b="0">
+                <a:solidFill>
+                  <a:srgbClr val="30EBC8"/>
+                </a:solidFill>
+                <a:latin typeface="Microsoft JhengHei"/>
+                <a:ea typeface="Microsoft JhengHei"/>
+              </a:rPr>
+              <a:t>03</a:t>
+            </a:r>
+          </a:p>
+        </p:txBody>
+      </p:sp>
+      <p:sp>
+        <p:nvSpPr>
+          <p:cNvPr id="17" name="TextBox 16"/>
+          <p:cNvSpPr txBox="1"/>
+          <p:nvPr/>
+        </p:nvSpPr>
+        <p:spPr>
+          <a:xfrm>
+            <a:off x="8244840" y="3236976"/>
+            <a:ext cx="3057144" cy="530352"/>
+          </a:xfrm>
+          <a:prstGeom prst="rect">
+            <a:avLst/>
+          </a:prstGeom>
+          <a:noFill/>
+        </p:spPr>
+        <p:txBody>
+          <a:bodyPr wrap="square" lIns="9144" rIns="9144" tIns="9144" bIns="9144">
+            <a:spAutoFit/>
+          </a:bodyPr>
+          <a:lstStyle/>
+          <a:p>
+            <a:pPr>
+              <a:spcAft>
+                <a:spcPts val="800"/>
+              </a:spcAft>
+            </a:pPr>
+            <a:r>
+              <a:rPr sz="2200" b="1">
+                <a:solidFill>
+                  <a:srgbClr val="F4F8FF"/>
+                </a:solidFill>
+                <a:latin typeface="Microsoft JhengHei"/>
+                <a:ea typeface="Microsoft JhengHei"/>
+              </a:rPr>
+              <a:t>期待投資人協助</a:t>
+            </a:r>
+          </a:p>
+        </p:txBody>
+      </p:sp>
+      <p:sp>
+        <p:nvSpPr>
+          <p:cNvPr id="18" name="TextBox 17"/>
+          <p:cNvSpPr txBox="1"/>
+          <p:nvPr/>
+        </p:nvSpPr>
+        <p:spPr>
+          <a:xfrm>
+            <a:off x="8244840" y="3931920"/>
+            <a:ext cx="3057144" cy="1508760"/>
+          </a:xfrm>
+          <a:prstGeom prst="rect">
+            <a:avLst/>
+          </a:prstGeom>
+          <a:noFill/>
+        </p:spPr>
+        <p:txBody>
+          <a:bodyPr wrap="square" lIns="9144" rIns="9144" tIns="9144" bIns="9144">
+            <a:spAutoFit/>
+          </a:bodyPr>
+          <a:lstStyle/>
+          <a:p>
+            <a:pPr>
+              <a:spcAft>
+                <a:spcPts val="800"/>
+              </a:spcAft>
+            </a:pPr>
+            <a:r>
+              <a:rPr sz="1700" b="0">
+                <a:solidFill>
+                  <a:srgbClr val="AAB7CC"/>
+                </a:solidFill>
+                <a:latin typeface="Microsoft JhengHei"/>
+                <a:ea typeface="Microsoft JhengHei"/>
+              </a:rPr>
+              <a:t>跑團、賽事與品牌引介</a:t>
+            </a:r>
+          </a:p>
+          <a:p>
+            <a:pPr>
+              <a:spcAft>
+                <a:spcPts val="800"/>
+              </a:spcAft>
+            </a:pPr>
+            <a:r>
+              <a:rPr sz="1700" b="0">
+                <a:solidFill>
+                  <a:srgbClr val="AAB7CC"/>
+                </a:solidFill>
+                <a:latin typeface="Microsoft JhengHei"/>
+                <a:ea typeface="Microsoft JhengHei"/>
+              </a:rPr>
+              <a:t>商業定價與通路驗證</a:t>
+            </a:r>
+          </a:p>
+          <a:p>
+            <a:pPr>
+              <a:spcAft>
+                <a:spcPts val="800"/>
+              </a:spcAft>
+            </a:pPr>
+            <a:r>
+              <a:rPr sz="1700" b="0">
+                <a:solidFill>
+                  <a:srgbClr val="AAB7CC"/>
+                </a:solidFill>
+                <a:latin typeface="Microsoft JhengHei"/>
+                <a:ea typeface="Microsoft JhengHei"/>
+              </a:rPr>
+              <a:t>早期組織與募資治理</a:t>
+            </a:r>
+          </a:p>
+        </p:txBody>
+      </p:sp>
+    </p:spTree>
+  </p:cSld>
+  <p:clrMapOvr>
+    <a:masterClrMapping/>
+  </p:clrMapOvr>
+</p:sld>
+</file>
+
+<file path=ppt/slides/slide21.xml><?xml version="1.0" encoding="utf-8"?>
+<p:sld xmlns:a="http://schemas.openxmlformats.org/drawingml/2006/main" xmlns:p="http://schemas.openxmlformats.org/presentationml/2006/main" xmlns:r="http://schemas.openxmlformats.org/officeDocument/2006/relationships">
+  <p:cSld>
+    <p:bg>
+      <p:bgPr>
+        <a:solidFill>
+          <a:srgbClr val="050711"/>
+        </a:solidFill>
+        <a:effectLst/>
+      </p:bgPr>
+    </p:bg>
+    <p:spTree>
+      <p:nvGrpSpPr>
+        <p:cNvPr id="1" name=""/>
+        <p:cNvGrpSpPr/>
+        <p:nvPr/>
+      </p:nvGrpSpPr>
+      <p:grpSpPr/>
+      <p:sp>
+        <p:nvSpPr>
+          <p:cNvPr id="2" name="Rounded Rectangle 1"/>
+          <p:cNvSpPr/>
+          <p:nvPr/>
+        </p:nvSpPr>
+        <p:spPr>
+          <a:xfrm>
+            <a:off x="438912" y="356616"/>
+            <a:ext cx="73152" cy="210312"/>
+          </a:xfrm>
+          <a:prstGeom prst="roundRect">
+            <a:avLst/>
+          </a:prstGeom>
+          <a:solidFill>
+            <a:srgbClr val="30EBC8"/>
+          </a:solidFill>
+          <a:ln>
+            <a:noFill/>
+          </a:ln>
+        </p:spPr>
+        <p:style>
+          <a:lnRef idx="1">
+            <a:schemeClr val="accent1"/>
+          </a:lnRef>
+          <a:fillRef idx="3">
+            <a:schemeClr val="accent1"/>
+          </a:fillRef>
+          <a:effectRef idx="2">
+            <a:schemeClr val="accent1"/>
+          </a:effectRef>
+          <a:fontRef idx="minor">
+            <a:schemeClr val="lt1"/>
+          </a:fontRef>
+        </p:style>
+        <p:txBody>
+          <a:bodyPr rtlCol="0" anchor="ctr"/>
+          <a:lstStyle/>
+          <a:p>
+            <a:pPr algn="ctr"/>
+          </a:p>
+        </p:txBody>
+      </p:sp>
+      <p:sp>
+        <p:nvSpPr>
+          <p:cNvPr id="3" name="TextBox 2"/>
+          <p:cNvSpPr txBox="1"/>
+          <p:nvPr/>
+        </p:nvSpPr>
+        <p:spPr>
+          <a:xfrm>
+            <a:off x="658368" y="292608"/>
+            <a:ext cx="10058400" cy="320040"/>
+          </a:xfrm>
+          <a:prstGeom prst="rect">
+            <a:avLst/>
+          </a:prstGeom>
+          <a:noFill/>
+        </p:spPr>
+        <p:txBody>
+          <a:bodyPr wrap="square" lIns="9144" rIns="9144" tIns="9144" bIns="9144">
+            <a:spAutoFit/>
+          </a:bodyPr>
+          <a:lstStyle/>
+          <a:p>
+            <a:pPr>
+              <a:spcAft>
+                <a:spcPts val="800"/>
+              </a:spcAft>
+            </a:pPr>
+            <a:r>
+              <a:rPr sz="1100" b="1">
+                <a:solidFill>
+                  <a:srgbClr val="30EBC8"/>
+                </a:solidFill>
+                <a:latin typeface="Microsoft JhengHei"/>
+                <a:ea typeface="Microsoft JhengHei"/>
+              </a:rPr>
+              <a:t>NEONSHIFT  /  可點擊來源｜查核日 2026.09.14</a:t>
+            </a:r>
+          </a:p>
+        </p:txBody>
+      </p:sp>
+      <p:sp>
+        <p:nvSpPr>
+          <p:cNvPr id="4" name="TextBox 3"/>
+          <p:cNvSpPr txBox="1"/>
+          <p:nvPr/>
+        </p:nvSpPr>
+        <p:spPr>
+          <a:xfrm>
+            <a:off x="658368" y="850392"/>
+            <a:ext cx="10881360" cy="713232"/>
+          </a:xfrm>
+          <a:prstGeom prst="rect">
+            <a:avLst/>
+          </a:prstGeom>
+          <a:noFill/>
+        </p:spPr>
+        <p:txBody>
+          <a:bodyPr wrap="square" lIns="9144" rIns="9144" tIns="9144" bIns="9144">
+            <a:spAutoFit/>
+          </a:bodyPr>
+          <a:lstStyle/>
+          <a:p>
+            <a:pPr>
+              <a:spcAft>
+                <a:spcPts val="800"/>
+              </a:spcAft>
+            </a:pPr>
+            <a:r>
+              <a:rPr sz="3000" b="1">
+                <a:solidFill>
+                  <a:srgbClr val="F4F8FF"/>
+                </a:solidFill>
+                <a:latin typeface="Microsoft JhengHei"/>
+                <a:ea typeface="Microsoft JhengHei"/>
+              </a:rPr>
+              <a:t>附錄｜市場資料與口徑</a:t>
+            </a:r>
+          </a:p>
+        </p:txBody>
+      </p:sp>
+      <p:sp>
+        <p:nvSpPr>
+          <p:cNvPr id="5" name="TextBox 4"/>
+          <p:cNvSpPr txBox="1"/>
+          <p:nvPr/>
+        </p:nvSpPr>
+        <p:spPr>
+          <a:xfrm>
+            <a:off x="676656" y="6464808"/>
+            <a:ext cx="9144000" cy="201168"/>
+          </a:xfrm>
+          <a:prstGeom prst="rect">
+            <a:avLst/>
+          </a:prstGeom>
+          <a:noFill/>
+        </p:spPr>
+        <p:txBody>
+          <a:bodyPr wrap="square" lIns="9144" rIns="9144" tIns="9144" bIns="9144">
+            <a:spAutoFit/>
+          </a:bodyPr>
+          <a:lstStyle/>
+          <a:p>
+            <a:pPr>
+              <a:spcAft>
+                <a:spcPts val="800"/>
+              </a:spcAft>
+            </a:pPr>
+            <a:r>
+              <a:rPr sz="900" b="0">
+                <a:solidFill>
+                  <a:srgbClr val="AAB7CC"/>
+                </a:solidFill>
+                <a:latin typeface="Microsoft JhengHei"/>
+                <a:ea typeface="Microsoft JhengHei"/>
+              </a:rPr>
+              <a:t>募資討論稿・2026.09.16｜商業方案／數值假設待確認</a:t>
+            </a:r>
+          </a:p>
+        </p:txBody>
+      </p:sp>
+      <p:sp>
+        <p:nvSpPr>
+          <p:cNvPr id="6" name="TextBox 5"/>
+          <p:cNvSpPr txBox="1"/>
+          <p:nvPr/>
+        </p:nvSpPr>
+        <p:spPr>
+          <a:xfrm>
+            <a:off x="10991088" y="6428232"/>
+            <a:ext cx="457200" cy="274320"/>
+          </a:xfrm>
+          <a:prstGeom prst="rect">
+            <a:avLst/>
+          </a:prstGeom>
+          <a:noFill/>
+        </p:spPr>
+        <p:txBody>
+          <a:bodyPr wrap="square" lIns="9144" rIns="9144" tIns="9144" bIns="9144">
+            <a:spAutoFit/>
+          </a:bodyPr>
+          <a:lstStyle/>
+          <a:p>
+            <a:pPr>
+              <a:spcAft>
+                <a:spcPts val="800"/>
+              </a:spcAft>
+            </a:pPr>
+            <a:r>
+              <a:rPr sz="1200" b="0">
+                <a:solidFill>
+                  <a:srgbClr val="30EBC8"/>
+                </a:solidFill>
+                <a:latin typeface="Microsoft JhengHei"/>
+                <a:ea typeface="Microsoft JhengHei"/>
+              </a:rPr>
+              <a:t>21</a:t>
+            </a:r>
+          </a:p>
+        </p:txBody>
+      </p:sp>
+      <p:sp>
+        <p:nvSpPr>
+          <p:cNvPr id="7" name="TextBox 6"/>
+          <p:cNvSpPr txBox="1"/>
+          <p:nvPr/>
+        </p:nvSpPr>
+        <p:spPr>
+          <a:xfrm>
+            <a:off x="713232" y="1920240"/>
+            <a:ext cx="10698480" cy="457200"/>
+          </a:xfrm>
+          <a:prstGeom prst="rect">
+            <a:avLst/>
+          </a:prstGeom>
+          <a:noFill/>
+        </p:spPr>
+        <p:txBody>
+          <a:bodyPr wrap="square" lIns="9144" rIns="9144" tIns="9144" bIns="9144">
+            <a:spAutoFit/>
+          </a:bodyPr>
+          <a:lstStyle/>
+          <a:p>
+            <a:pPr>
+              <a:spcAft>
+                <a:spcPts val="800"/>
+              </a:spcAft>
+            </a:pPr>
+            <a:r>
+              <a:rPr sz="1800" b="1">
+                <a:solidFill>
+                  <a:srgbClr val="30EBC8"/>
+                </a:solidFill>
+                <a:latin typeface="Microsoft JhengHei"/>
+                <a:ea typeface="Microsoft JhengHei"/>
+                <a:hlinkClick r:id="rId2"/>
+              </a:rPr>
+              <a:t>S1  Global Wellness Institute｜2025 Global Wellness Economy Monitor</a:t>
+            </a:r>
+          </a:p>
+        </p:txBody>
+      </p:sp>
+      <p:sp>
+        <p:nvSpPr>
+          <p:cNvPr id="8" name="TextBox 7"/>
+          <p:cNvSpPr txBox="1"/>
+          <p:nvPr/>
+        </p:nvSpPr>
+        <p:spPr>
+          <a:xfrm>
+            <a:off x="731520" y="2487168"/>
+            <a:ext cx="10515600" cy="502920"/>
+          </a:xfrm>
+          <a:prstGeom prst="rect">
+            <a:avLst/>
+          </a:prstGeom>
+          <a:noFill/>
+        </p:spPr>
+        <p:txBody>
+          <a:bodyPr wrap="square" lIns="9144" rIns="9144" tIns="9144" bIns="9144">
+            <a:spAutoFit/>
+          </a:bodyPr>
+          <a:lstStyle/>
+          <a:p>
+            <a:pPr>
+              <a:spcAft>
+                <a:spcPts val="800"/>
+              </a:spcAft>
+            </a:pPr>
+            <a:r>
+              <a:rPr sz="1500" b="0">
+                <a:solidFill>
+                  <a:srgbClr val="AAB7CC"/>
+                </a:solidFill>
+                <a:latin typeface="Microsoft JhengHei"/>
+                <a:ea typeface="Microsoft JhengHei"/>
+              </a:rPr>
+              <a:t>2025 年發布，2024 年實績；PDF 身體活動章節 p.61–65。市場及成長數據。</a:t>
+            </a:r>
+          </a:p>
+        </p:txBody>
+      </p:sp>
+      <p:sp>
+        <p:nvSpPr>
+          <p:cNvPr id="9" name="TextBox 8"/>
+          <p:cNvSpPr txBox="1"/>
+          <p:nvPr/>
+        </p:nvSpPr>
+        <p:spPr>
+          <a:xfrm>
+            <a:off x="713232" y="3182112"/>
+            <a:ext cx="10698480" cy="457200"/>
+          </a:xfrm>
+          <a:prstGeom prst="rect">
+            <a:avLst/>
+          </a:prstGeom>
+          <a:noFill/>
+        </p:spPr>
+        <p:txBody>
+          <a:bodyPr wrap="square" lIns="9144" rIns="9144" tIns="9144" bIns="9144">
+            <a:spAutoFit/>
+          </a:bodyPr>
+          <a:lstStyle/>
+          <a:p>
+            <a:pPr>
+              <a:spcAft>
+                <a:spcPts val="800"/>
+              </a:spcAft>
+            </a:pPr>
+            <a:r>
+              <a:rPr sz="1800" b="1">
+                <a:solidFill>
+                  <a:srgbClr val="30EBC8"/>
+                </a:solidFill>
+                <a:latin typeface="Microsoft JhengHei"/>
+                <a:ea typeface="Microsoft JhengHei"/>
+                <a:hlinkClick r:id="rId3"/>
+              </a:rPr>
+              <a:t>S2  HFA｜Fitness Industry’s Global Momentum Continued in 2024</a:t>
+            </a:r>
+          </a:p>
+        </p:txBody>
+      </p:sp>
+      <p:sp>
+        <p:nvSpPr>
+          <p:cNvPr id="10" name="TextBox 9"/>
+          <p:cNvSpPr txBox="1"/>
+          <p:nvPr/>
+        </p:nvSpPr>
+        <p:spPr>
+          <a:xfrm>
+            <a:off x="731520" y="3749039"/>
+            <a:ext cx="10515600" cy="502920"/>
+          </a:xfrm>
+          <a:prstGeom prst="rect">
+            <a:avLst/>
+          </a:prstGeom>
+          <a:noFill/>
+        </p:spPr>
+        <p:txBody>
+          <a:bodyPr wrap="square" lIns="9144" rIns="9144" tIns="9144" bIns="9144">
+            <a:spAutoFit/>
+          </a:bodyPr>
+          <a:lstStyle/>
+          <a:p>
+            <a:pPr>
+              <a:spcAft>
+                <a:spcPts val="800"/>
+              </a:spcAft>
+            </a:pPr>
+            <a:r>
+              <a:rPr sz="1500" b="0">
+                <a:solidFill>
+                  <a:srgbClr val="AAB7CC"/>
+                </a:solidFill>
+                <a:latin typeface="Microsoft JhengHei"/>
+                <a:ea typeface="Microsoft JhengHei"/>
+              </a:rPr>
+              <a:t>2025-08-11；可比國家的平均營收成長 8%，非全球加權市場成長。</a:t>
+            </a:r>
+          </a:p>
+        </p:txBody>
+      </p:sp>
+      <p:sp>
+        <p:nvSpPr>
+          <p:cNvPr id="11" name="TextBox 10"/>
+          <p:cNvSpPr txBox="1"/>
+          <p:nvPr/>
+        </p:nvSpPr>
+        <p:spPr>
+          <a:xfrm>
+            <a:off x="713232" y="4443983"/>
+            <a:ext cx="10698480" cy="457200"/>
+          </a:xfrm>
+          <a:prstGeom prst="rect">
+            <a:avLst/>
+          </a:prstGeom>
+          <a:noFill/>
+        </p:spPr>
+        <p:txBody>
+          <a:bodyPr wrap="square" lIns="9144" rIns="9144" tIns="9144" bIns="9144">
+            <a:spAutoFit/>
+          </a:bodyPr>
+          <a:lstStyle/>
+          <a:p>
+            <a:pPr>
+              <a:spcAft>
+                <a:spcPts val="800"/>
+              </a:spcAft>
+            </a:pPr>
+            <a:r>
+              <a:rPr sz="1800" b="1">
+                <a:solidFill>
+                  <a:srgbClr val="30EBC8"/>
+                </a:solidFill>
+                <a:latin typeface="Microsoft JhengHei"/>
+                <a:ea typeface="Microsoft JhengHei"/>
+                <a:hlinkClick r:id="rId4"/>
+              </a:rPr>
+              <a:t>S3  Solana Mobile｜SKR is Live，2026-07-14</a:t>
+            </a:r>
+          </a:p>
+        </p:txBody>
+      </p:sp>
+      <p:sp>
+        <p:nvSpPr>
+          <p:cNvPr id="12" name="TextBox 11"/>
+          <p:cNvSpPr txBox="1"/>
+          <p:nvPr/>
+        </p:nvSpPr>
+        <p:spPr>
+          <a:xfrm>
+            <a:off x="731520" y="5010912"/>
+            <a:ext cx="10515600" cy="502920"/>
+          </a:xfrm>
+          <a:prstGeom prst="rect">
+            <a:avLst/>
+          </a:prstGeom>
+          <a:noFill/>
+        </p:spPr>
+        <p:txBody>
+          <a:bodyPr wrap="square" lIns="9144" rIns="9144" tIns="9144" bIns="9144">
+            <a:spAutoFit/>
+          </a:bodyPr>
+          <a:lstStyle/>
+          <a:p>
+            <a:pPr>
+              <a:spcAft>
+                <a:spcPts val="800"/>
+              </a:spcAft>
+            </a:pPr>
+            <a:r>
+              <a:rPr sz="1500" b="0">
+                <a:solidFill>
+                  <a:srgbClr val="AAB7CC"/>
+                </a:solidFill>
+                <a:latin typeface="Microsoft JhengHei"/>
+                <a:ea typeface="Microsoft JhengHei"/>
+              </a:rPr>
+              <a:t>2026-07-14；逾 10 萬名用戶具 SKR 領取資格，不等於 DAU 或健身市場。</a:t>
+            </a:r>
+          </a:p>
+        </p:txBody>
+      </p:sp>
+    </p:spTree>
+  </p:cSld>
+  <p:clrMapOvr>
+    <a:masterClrMapping/>
+  </p:clrMapOvr>
+</p:sld>
+</file>
+
+<file path=ppt/slides/slide22.xml><?xml version="1.0" encoding="utf-8"?>
+<p:sld xmlns:a="http://schemas.openxmlformats.org/drawingml/2006/main" xmlns:p="http://schemas.openxmlformats.org/presentationml/2006/main" xmlns:r="http://schemas.openxmlformats.org/officeDocument/2006/relationships">
+  <p:cSld>
+    <p:bg>
+      <p:bgPr>
+        <a:solidFill>
+          <a:srgbClr val="050711"/>
+        </a:solidFill>
+        <a:effectLst/>
+      </p:bgPr>
+    </p:bg>
+    <p:spTree>
+      <p:nvGrpSpPr>
+        <p:cNvPr id="1" name=""/>
+        <p:cNvGrpSpPr/>
+        <p:nvPr/>
+      </p:nvGrpSpPr>
+      <p:grpSpPr/>
+      <p:sp>
+        <p:nvSpPr>
+          <p:cNvPr id="2" name="Rounded Rectangle 1"/>
+          <p:cNvSpPr/>
+          <p:nvPr/>
+        </p:nvSpPr>
+        <p:spPr>
+          <a:xfrm>
+            <a:off x="438912" y="356616"/>
+            <a:ext cx="73152" cy="210312"/>
+          </a:xfrm>
+          <a:prstGeom prst="roundRect">
+            <a:avLst/>
+          </a:prstGeom>
+          <a:solidFill>
+            <a:srgbClr val="30EBC8"/>
+          </a:solidFill>
+          <a:ln>
+            <a:noFill/>
+          </a:ln>
+        </p:spPr>
+        <p:style>
+          <a:lnRef idx="1">
+            <a:schemeClr val="accent1"/>
+          </a:lnRef>
+          <a:fillRef idx="3">
+            <a:schemeClr val="accent1"/>
+          </a:fillRef>
+          <a:effectRef idx="2">
+            <a:schemeClr val="accent1"/>
+          </a:effectRef>
+          <a:fontRef idx="minor">
+            <a:schemeClr val="lt1"/>
+          </a:fontRef>
+        </p:style>
+        <p:txBody>
+          <a:bodyPr rtlCol="0" anchor="ctr"/>
+          <a:lstStyle/>
+          <a:p>
+            <a:pPr algn="ctr"/>
+          </a:p>
+        </p:txBody>
+      </p:sp>
+      <p:sp>
+        <p:nvSpPr>
+          <p:cNvPr id="3" name="TextBox 2"/>
+          <p:cNvSpPr txBox="1"/>
+          <p:nvPr/>
+        </p:nvSpPr>
+        <p:spPr>
+          <a:xfrm>
+            <a:off x="658368" y="292608"/>
+            <a:ext cx="10058400" cy="320040"/>
+          </a:xfrm>
+          <a:prstGeom prst="rect">
+            <a:avLst/>
+          </a:prstGeom>
+          <a:noFill/>
+        </p:spPr>
+        <p:txBody>
+          <a:bodyPr wrap="square" lIns="9144" rIns="9144" tIns="9144" bIns="9144">
+            <a:spAutoFit/>
+          </a:bodyPr>
+          <a:lstStyle/>
+          <a:p>
+            <a:pPr>
+              <a:spcAft>
+                <a:spcPts val="800"/>
+              </a:spcAft>
+            </a:pPr>
+            <a:r>
+              <a:rPr sz="1100" b="1">
+                <a:solidFill>
+                  <a:srgbClr val="30EBC8"/>
+                </a:solidFill>
+                <a:latin typeface="Microsoft JhengHei"/>
+                <a:ea typeface="Microsoft JhengHei"/>
+              </a:rPr>
+              <a:t>NEONSHIFT  /  新增來源｜分析完成 2026.09.15，文件同步 2026.09.16</a:t>
+            </a:r>
+          </a:p>
+        </p:txBody>
+      </p:sp>
+      <p:sp>
+        <p:nvSpPr>
+          <p:cNvPr id="4" name="TextBox 3"/>
+          <p:cNvSpPr txBox="1"/>
+          <p:nvPr/>
+        </p:nvSpPr>
+        <p:spPr>
+          <a:xfrm>
+            <a:off x="658368" y="850392"/>
+            <a:ext cx="10881360" cy="713232"/>
+          </a:xfrm>
+          <a:prstGeom prst="rect">
+            <a:avLst/>
+          </a:prstGeom>
+          <a:noFill/>
+        </p:spPr>
+        <p:txBody>
+          <a:bodyPr wrap="square" lIns="9144" rIns="9144" tIns="9144" bIns="9144">
+            <a:spAutoFit/>
+          </a:bodyPr>
+          <a:lstStyle/>
+          <a:p>
+            <a:pPr>
+              <a:spcAft>
+                <a:spcPts val="800"/>
+              </a:spcAft>
+            </a:pPr>
+            <a:r>
+              <a:rPr sz="3000" b="1">
+                <a:solidFill>
+                  <a:srgbClr val="F4F8FF"/>
+                </a:solidFill>
+                <a:latin typeface="Microsoft JhengHei"/>
+                <a:ea typeface="Microsoft JhengHei"/>
+              </a:rPr>
+              <a:t>附錄｜經濟評估的來源與重現方式</a:t>
+            </a:r>
+          </a:p>
+        </p:txBody>
+      </p:sp>
+      <p:sp>
+        <p:nvSpPr>
+          <p:cNvPr id="5" name="TextBox 4"/>
+          <p:cNvSpPr txBox="1"/>
+          <p:nvPr/>
+        </p:nvSpPr>
+        <p:spPr>
+          <a:xfrm>
+            <a:off x="676656" y="6464808"/>
+            <a:ext cx="9144000" cy="201168"/>
+          </a:xfrm>
+          <a:prstGeom prst="rect">
+            <a:avLst/>
+          </a:prstGeom>
+          <a:noFill/>
+        </p:spPr>
+        <p:txBody>
+          <a:bodyPr wrap="square" lIns="9144" rIns="9144" tIns="9144" bIns="9144">
+            <a:spAutoFit/>
+          </a:bodyPr>
+          <a:lstStyle/>
+          <a:p>
+            <a:pPr>
+              <a:spcAft>
+                <a:spcPts val="800"/>
+              </a:spcAft>
+            </a:pPr>
+            <a:r>
+              <a:rPr sz="900" b="0">
+                <a:solidFill>
+                  <a:srgbClr val="AAB7CC"/>
+                </a:solidFill>
+                <a:latin typeface="Microsoft JhengHei"/>
+                <a:ea typeface="Microsoft JhengHei"/>
+              </a:rPr>
+              <a:t>募資討論稿・2026.09.16｜商業方案／數值假設待確認</a:t>
+            </a:r>
+          </a:p>
+        </p:txBody>
+      </p:sp>
+      <p:sp>
+        <p:nvSpPr>
+          <p:cNvPr id="6" name="TextBox 5"/>
+          <p:cNvSpPr txBox="1"/>
+          <p:nvPr/>
+        </p:nvSpPr>
+        <p:spPr>
+          <a:xfrm>
+            <a:off x="10991088" y="6428232"/>
+            <a:ext cx="457200" cy="274320"/>
+          </a:xfrm>
+          <a:prstGeom prst="rect">
+            <a:avLst/>
+          </a:prstGeom>
+          <a:noFill/>
+        </p:spPr>
+        <p:txBody>
+          <a:bodyPr wrap="square" lIns="9144" rIns="9144" tIns="9144" bIns="9144">
+            <a:spAutoFit/>
+          </a:bodyPr>
+          <a:lstStyle/>
+          <a:p>
+            <a:pPr>
+              <a:spcAft>
+                <a:spcPts val="800"/>
+              </a:spcAft>
+            </a:pPr>
+            <a:r>
+              <a:rPr sz="1200" b="0">
+                <a:solidFill>
+                  <a:srgbClr val="30EBC8"/>
+                </a:solidFill>
+                <a:latin typeface="Microsoft JhengHei"/>
+                <a:ea typeface="Microsoft JhengHei"/>
+              </a:rPr>
+              <a:t>22</a:t>
+            </a:r>
+          </a:p>
+        </p:txBody>
+      </p:sp>
+      <p:sp>
+        <p:nvSpPr>
+          <p:cNvPr id="7" name="TextBox 6"/>
+          <p:cNvSpPr txBox="1"/>
+          <p:nvPr/>
+        </p:nvSpPr>
+        <p:spPr>
+          <a:xfrm>
+            <a:off x="731520" y="2148840"/>
+            <a:ext cx="10515600" cy="411480"/>
+          </a:xfrm>
+          <a:prstGeom prst="rect">
+            <a:avLst/>
+          </a:prstGeom>
+          <a:noFill/>
+        </p:spPr>
+        <p:txBody>
+          <a:bodyPr wrap="square" lIns="9144" rIns="9144" tIns="9144" bIns="9144">
+            <a:spAutoFit/>
+          </a:bodyPr>
+          <a:lstStyle/>
+          <a:p>
+            <a:pPr>
+              <a:spcAft>
+                <a:spcPts val="800"/>
+              </a:spcAft>
+            </a:pPr>
+            <a:r>
+              <a:rPr sz="2100" b="1">
+                <a:solidFill>
+                  <a:srgbClr val="30EBC8"/>
+                </a:solidFill>
+                <a:latin typeface="Microsoft JhengHei"/>
+                <a:ea typeface="Microsoft JhengHei"/>
+                <a:hlinkClick r:id="rId2"/>
+              </a:rPr>
+              <a:t>E1｜STEPN 官方，2022-05-10</a:t>
+            </a:r>
+          </a:p>
+        </p:txBody>
+      </p:sp>
+      <p:sp>
+        <p:nvSpPr>
+          <p:cNvPr id="8" name="TextBox 7"/>
+          <p:cNvSpPr txBox="1"/>
+          <p:nvPr/>
+        </p:nvSpPr>
+        <p:spPr>
+          <a:xfrm>
+            <a:off x="731520" y="2633472"/>
+            <a:ext cx="10515600" cy="457200"/>
+          </a:xfrm>
+          <a:prstGeom prst="rect">
+            <a:avLst/>
+          </a:prstGeom>
+          <a:noFill/>
+        </p:spPr>
+        <p:txBody>
+          <a:bodyPr wrap="square" lIns="9144" rIns="9144" tIns="9144" bIns="9144">
+            <a:spAutoFit/>
+          </a:bodyPr>
+          <a:lstStyle/>
+          <a:p>
+            <a:pPr>
+              <a:spcAft>
+                <a:spcPts val="800"/>
+              </a:spcAft>
+            </a:pPr>
+            <a:r>
+              <a:rPr sz="1700" b="0">
+                <a:solidFill>
+                  <a:srgbClr val="AAB7CC"/>
+                </a:solidFill>
+                <a:latin typeface="Microsoft JhengHei"/>
+                <a:ea typeface="Microsoft JhengHei"/>
+              </a:rPr>
+              <a:t>當時的 GST 供給、消耗與買賣動機。</a:t>
+            </a:r>
+          </a:p>
+        </p:txBody>
+      </p:sp>
+      <p:sp>
+        <p:nvSpPr>
+          <p:cNvPr id="9" name="TextBox 8"/>
+          <p:cNvSpPr txBox="1"/>
+          <p:nvPr/>
+        </p:nvSpPr>
+        <p:spPr>
+          <a:xfrm>
+            <a:off x="731520" y="3291840"/>
+            <a:ext cx="10515600" cy="411480"/>
+          </a:xfrm>
+          <a:prstGeom prst="rect">
+            <a:avLst/>
+          </a:prstGeom>
+          <a:noFill/>
+        </p:spPr>
+        <p:txBody>
+          <a:bodyPr wrap="square" lIns="9144" rIns="9144" tIns="9144" bIns="9144">
+            <a:spAutoFit/>
+          </a:bodyPr>
+          <a:lstStyle/>
+          <a:p>
+            <a:pPr>
+              <a:spcAft>
+                <a:spcPts val="800"/>
+              </a:spcAft>
+            </a:pPr>
+            <a:r>
+              <a:rPr sz="2100" b="1">
+                <a:solidFill>
+                  <a:srgbClr val="30EBC8"/>
+                </a:solidFill>
+                <a:latin typeface="Microsoft JhengHei"/>
+                <a:ea typeface="Microsoft JhengHei"/>
+                <a:hlinkClick r:id="rId3"/>
+              </a:rPr>
+              <a:t>E2｜CoinDesk，2022-05-29</a:t>
+            </a:r>
+          </a:p>
+        </p:txBody>
+      </p:sp>
+      <p:sp>
+        <p:nvSpPr>
+          <p:cNvPr id="10" name="TextBox 9"/>
+          <p:cNvSpPr txBox="1"/>
+          <p:nvPr/>
+        </p:nvSpPr>
+        <p:spPr>
+          <a:xfrm>
+            <a:off x="731520" y="3776472"/>
+            <a:ext cx="10515600" cy="457200"/>
+          </a:xfrm>
+          <a:prstGeom prst="rect">
+            <a:avLst/>
+          </a:prstGeom>
+          <a:noFill/>
+        </p:spPr>
+        <p:txBody>
+          <a:bodyPr wrap="square" lIns="9144" rIns="9144" tIns="9144" bIns="9144">
+            <a:spAutoFit/>
+          </a:bodyPr>
+          <a:lstStyle/>
+          <a:p>
+            <a:pPr>
+              <a:spcAft>
+                <a:spcPts val="800"/>
+              </a:spcAft>
+            </a:pPr>
+            <a:r>
+              <a:rPr sz="1700" b="0">
+                <a:solidFill>
+                  <a:srgbClr val="AAB7CC"/>
+                </a:solidFill>
+                <a:latin typeface="Microsoft JhengHei"/>
+                <a:ea typeface="Microsoft JhengHei"/>
+              </a:rPr>
+              <a:t>大盤與中國服務限制的背景；不作單一因果歸因。</a:t>
+            </a:r>
+          </a:p>
+        </p:txBody>
+      </p:sp>
+      <p:sp>
+        <p:nvSpPr>
+          <p:cNvPr id="11" name="TextBox 10"/>
+          <p:cNvSpPr txBox="1"/>
+          <p:nvPr/>
+        </p:nvSpPr>
+        <p:spPr>
+          <a:xfrm>
+            <a:off x="731520" y="4434840"/>
+            <a:ext cx="10515600" cy="411480"/>
+          </a:xfrm>
+          <a:prstGeom prst="rect">
+            <a:avLst/>
+          </a:prstGeom>
+          <a:noFill/>
+        </p:spPr>
+        <p:txBody>
+          <a:bodyPr wrap="square" lIns="9144" rIns="9144" tIns="9144" bIns="9144">
+            <a:spAutoFit/>
+          </a:bodyPr>
+          <a:lstStyle/>
+          <a:p>
+            <a:pPr>
+              <a:spcAft>
+                <a:spcPts val="800"/>
+              </a:spcAft>
+            </a:pPr>
+            <a:r>
+              <a:rPr sz="2100" b="1">
+                <a:solidFill>
+                  <a:srgbClr val="30EBC8"/>
+                </a:solidFill>
+                <a:latin typeface="Microsoft JhengHei"/>
+                <a:ea typeface="Microsoft JhengHei"/>
+              </a:rPr>
+              <a:t>E3｜NeonShift 專案試算</a:t>
+            </a:r>
+          </a:p>
+        </p:txBody>
+      </p:sp>
+      <p:sp>
+        <p:nvSpPr>
+          <p:cNvPr id="12" name="TextBox 11"/>
+          <p:cNvSpPr txBox="1"/>
+          <p:nvPr/>
+        </p:nvSpPr>
+        <p:spPr>
+          <a:xfrm>
+            <a:off x="731520" y="4919472"/>
+            <a:ext cx="10515600" cy="457200"/>
+          </a:xfrm>
+          <a:prstGeom prst="rect">
+            <a:avLst/>
+          </a:prstGeom>
+          <a:noFill/>
+        </p:spPr>
+        <p:txBody>
+          <a:bodyPr wrap="square" lIns="9144" rIns="9144" tIns="9144" bIns="9144">
+            <a:spAutoFit/>
+          </a:bodyPr>
+          <a:lstStyle/>
+          <a:p>
+            <a:pPr>
+              <a:spcAft>
+                <a:spcPts val="800"/>
+              </a:spcAft>
+            </a:pPr>
+            <a:r>
+              <a:rPr sz="1700" b="0">
+                <a:solidFill>
+                  <a:srgbClr val="AAB7CC"/>
+                </a:solidFill>
+                <a:latin typeface="Microsoft JhengHei"/>
+                <a:ea typeface="Microsoft JhengHei"/>
+              </a:rPr>
+              <a:t>node tools/tokenomics/stress.mjs；九組庫存情境。</a:t>
+            </a:r>
+          </a:p>
+        </p:txBody>
+      </p:sp>
+    </p:spTree>
+  </p:cSld>
+  <p:clrMapOvr>
+    <a:masterClrMapping/>
+  </p:clrMapOvr>
+</p:sld>
+</file>
+
+<file path=ppt/slides/slide23.xml><?xml version="1.0" encoding="utf-8"?>
+<p:sld xmlns:a="http://schemas.openxmlformats.org/drawingml/2006/main" xmlns:p="http://schemas.openxmlformats.org/presentationml/2006/main" xmlns:r="http://schemas.openxmlformats.org/officeDocument/2006/relationships">
+  <p:cSld>
+    <p:bg>
+      <p:bgPr>
+        <a:solidFill>
+          <a:srgbClr val="050711"/>
+        </a:solidFill>
+        <a:effectLst/>
+      </p:bgPr>
+    </p:bg>
+    <p:spTree>
+      <p:nvGrpSpPr>
+        <p:cNvPr id="1" name=""/>
+        <p:cNvGrpSpPr/>
+        <p:nvPr/>
+      </p:nvGrpSpPr>
+      <p:grpSpPr/>
+      <p:sp>
+        <p:nvSpPr>
+          <p:cNvPr id="2" name="Rounded Rectangle 1"/>
+          <p:cNvSpPr/>
+          <p:nvPr/>
+        </p:nvSpPr>
+        <p:spPr>
+          <a:xfrm>
+            <a:off x="438912" y="356616"/>
+            <a:ext cx="73152" cy="210312"/>
+          </a:xfrm>
+          <a:prstGeom prst="roundRect">
+            <a:avLst/>
+          </a:prstGeom>
+          <a:solidFill>
+            <a:srgbClr val="30EBC8"/>
+          </a:solidFill>
+          <a:ln>
+            <a:noFill/>
+          </a:ln>
+        </p:spPr>
+        <p:style>
+          <a:lnRef idx="1">
+            <a:schemeClr val="accent1"/>
+          </a:lnRef>
+          <a:fillRef idx="3">
+            <a:schemeClr val="accent1"/>
+          </a:fillRef>
+          <a:effectRef idx="2">
+            <a:schemeClr val="accent1"/>
+          </a:effectRef>
+          <a:fontRef idx="minor">
+            <a:schemeClr val="lt1"/>
+          </a:fontRef>
+        </p:style>
+        <p:txBody>
+          <a:bodyPr rtlCol="0" anchor="ctr"/>
+          <a:lstStyle/>
+          <a:p>
+            <a:pPr algn="ctr"/>
+          </a:p>
+        </p:txBody>
+      </p:sp>
+      <p:sp>
+        <p:nvSpPr>
+          <p:cNvPr id="3" name="TextBox 2"/>
+          <p:cNvSpPr txBox="1"/>
+          <p:nvPr/>
+        </p:nvSpPr>
+        <p:spPr>
+          <a:xfrm>
+            <a:off x="658368" y="292608"/>
+            <a:ext cx="10058400" cy="320040"/>
+          </a:xfrm>
+          <a:prstGeom prst="rect">
+            <a:avLst/>
+          </a:prstGeom>
+          <a:noFill/>
+        </p:spPr>
+        <p:txBody>
+          <a:bodyPr wrap="square" lIns="9144" rIns="9144" tIns="9144" bIns="9144">
+            <a:spAutoFit/>
+          </a:bodyPr>
+          <a:lstStyle/>
+          <a:p>
+            <a:pPr>
+              <a:spcAft>
+                <a:spcPts val="800"/>
+              </a:spcAft>
+            </a:pPr>
+            <a:r>
+              <a:rPr sz="1100" b="1">
+                <a:solidFill>
+                  <a:srgbClr val="30EBC8"/>
+                </a:solidFill>
+                <a:latin typeface="Microsoft JhengHei"/>
+                <a:ea typeface="Microsoft JhengHei"/>
+              </a:rPr>
+              <a:t>NEONSHIFT  /  募資準備清單</a:t>
+            </a:r>
+          </a:p>
+        </p:txBody>
+      </p:sp>
+      <p:sp>
+        <p:nvSpPr>
+          <p:cNvPr id="4" name="TextBox 3"/>
+          <p:cNvSpPr txBox="1"/>
+          <p:nvPr/>
+        </p:nvSpPr>
+        <p:spPr>
+          <a:xfrm>
+            <a:off x="658368" y="850392"/>
+            <a:ext cx="10881360" cy="713232"/>
+          </a:xfrm>
+          <a:prstGeom prst="rect">
+            <a:avLst/>
+          </a:prstGeom>
+          <a:noFill/>
+        </p:spPr>
+        <p:txBody>
+          <a:bodyPr wrap="square" lIns="9144" rIns="9144" tIns="9144" bIns="9144">
+            <a:spAutoFit/>
+          </a:bodyPr>
+          <a:lstStyle/>
+          <a:p>
+            <a:pPr>
+              <a:spcAft>
+                <a:spcPts val="800"/>
+              </a:spcAft>
+            </a:pPr>
+            <a:r>
+              <a:rPr sz="3000" b="1">
+                <a:solidFill>
+                  <a:srgbClr val="F4F8FF"/>
+                </a:solidFill>
+                <a:latin typeface="Microsoft JhengHei"/>
+                <a:ea typeface="Microsoft JhengHei"/>
+              </a:rPr>
+              <a:t>附錄｜正式對外前，補齊五項證據</a:t>
+            </a:r>
+          </a:p>
+        </p:txBody>
+      </p:sp>
+      <p:sp>
+        <p:nvSpPr>
+          <p:cNvPr id="5" name="TextBox 4"/>
+          <p:cNvSpPr txBox="1"/>
+          <p:nvPr/>
+        </p:nvSpPr>
+        <p:spPr>
+          <a:xfrm>
+            <a:off x="676656" y="6464808"/>
+            <a:ext cx="9144000" cy="201168"/>
+          </a:xfrm>
+          <a:prstGeom prst="rect">
+            <a:avLst/>
+          </a:prstGeom>
+          <a:noFill/>
+        </p:spPr>
+        <p:txBody>
+          <a:bodyPr wrap="square" lIns="9144" rIns="9144" tIns="9144" bIns="9144">
+            <a:spAutoFit/>
+          </a:bodyPr>
+          <a:lstStyle/>
+          <a:p>
+            <a:pPr>
+              <a:spcAft>
+                <a:spcPts val="800"/>
+              </a:spcAft>
+            </a:pPr>
+            <a:r>
+              <a:rPr sz="900" b="0">
+                <a:solidFill>
+                  <a:srgbClr val="AAB7CC"/>
+                </a:solidFill>
+                <a:latin typeface="Microsoft JhengHei"/>
+                <a:ea typeface="Microsoft JhengHei"/>
+              </a:rPr>
+              <a:t>募資討論稿・2026.09.16｜商業方案／數值假設待確認</a:t>
+            </a:r>
+          </a:p>
+        </p:txBody>
+      </p:sp>
+      <p:sp>
+        <p:nvSpPr>
+          <p:cNvPr id="6" name="TextBox 5"/>
+          <p:cNvSpPr txBox="1"/>
+          <p:nvPr/>
+        </p:nvSpPr>
+        <p:spPr>
+          <a:xfrm>
+            <a:off x="10991088" y="6428232"/>
+            <a:ext cx="457200" cy="274320"/>
+          </a:xfrm>
+          <a:prstGeom prst="rect">
+            <a:avLst/>
+          </a:prstGeom>
+          <a:noFill/>
+        </p:spPr>
+        <p:txBody>
+          <a:bodyPr wrap="square" lIns="9144" rIns="9144" tIns="9144" bIns="9144">
+            <a:spAutoFit/>
+          </a:bodyPr>
+          <a:lstStyle/>
+          <a:p>
+            <a:pPr>
+              <a:spcAft>
+                <a:spcPts val="800"/>
+              </a:spcAft>
+            </a:pPr>
+            <a:r>
+              <a:rPr sz="1200" b="0">
+                <a:solidFill>
+                  <a:srgbClr val="30EBC8"/>
+                </a:solidFill>
+                <a:latin typeface="Microsoft JhengHei"/>
+                <a:ea typeface="Microsoft JhengHei"/>
+              </a:rPr>
+              <a:t>23</a:t>
+            </a:r>
+          </a:p>
+        </p:txBody>
+      </p:sp>
+      <p:sp>
+        <p:nvSpPr>
+          <p:cNvPr id="7" name="TextBox 6"/>
+          <p:cNvSpPr txBox="1"/>
+          <p:nvPr/>
+        </p:nvSpPr>
+        <p:spPr>
+          <a:xfrm>
+            <a:off x="777240" y="2240280"/>
+            <a:ext cx="10607040" cy="457200"/>
+          </a:xfrm>
+          <a:prstGeom prst="rect">
+            <a:avLst/>
+          </a:prstGeom>
+          <a:noFill/>
+        </p:spPr>
+        <p:txBody>
+          <a:bodyPr wrap="square" lIns="9144" rIns="9144" tIns="9144" bIns="9144">
+            <a:spAutoFit/>
+          </a:bodyPr>
+          <a:lstStyle/>
+          <a:p>
+            <a:pPr>
+              <a:spcAft>
+                <a:spcPts val="800"/>
+              </a:spcAft>
+            </a:pPr>
+            <a:r>
+              <a:rPr sz="2100" b="0">
+                <a:solidFill>
+                  <a:srgbClr val="30EBC8"/>
+                </a:solidFill>
+                <a:latin typeface="Microsoft JhengHei"/>
+                <a:ea typeface="Microsoft JhengHei"/>
+              </a:rPr>
+              <a:t>01  團隊姓名、專長、全職投入與股權結構</a:t>
+            </a:r>
+          </a:p>
+        </p:txBody>
+      </p:sp>
+      <p:sp>
+        <p:nvSpPr>
+          <p:cNvPr id="8" name="TextBox 7"/>
+          <p:cNvSpPr txBox="1"/>
+          <p:nvPr/>
+        </p:nvSpPr>
+        <p:spPr>
+          <a:xfrm>
+            <a:off x="777240" y="2871216"/>
+            <a:ext cx="10607040" cy="457200"/>
+          </a:xfrm>
+          <a:prstGeom prst="rect">
+            <a:avLst/>
+          </a:prstGeom>
+          <a:noFill/>
+        </p:spPr>
+        <p:txBody>
+          <a:bodyPr wrap="square" lIns="9144" rIns="9144" tIns="9144" bIns="9144">
+            <a:spAutoFit/>
+          </a:bodyPr>
+          <a:lstStyle/>
+          <a:p>
+            <a:pPr>
+              <a:spcAft>
+                <a:spcPts val="800"/>
+              </a:spcAft>
+            </a:pPr>
+            <a:r>
+              <a:rPr sz="2100" b="0">
+                <a:solidFill>
+                  <a:srgbClr val="F4F8FF"/>
+                </a:solidFill>
+                <a:latin typeface="Microsoft JhengHei"/>
+                <a:ea typeface="Microsoft JhengHei"/>
+              </a:rPr>
+              <a:t>02  主辦方访談、試辦意向與可聯絡推薦人</a:t>
+            </a:r>
+          </a:p>
+        </p:txBody>
+      </p:sp>
+      <p:sp>
+        <p:nvSpPr>
+          <p:cNvPr id="9" name="TextBox 8"/>
+          <p:cNvSpPr txBox="1"/>
+          <p:nvPr/>
+        </p:nvSpPr>
+        <p:spPr>
+          <a:xfrm>
+            <a:off x="777240" y="3502152"/>
+            <a:ext cx="10607040" cy="457200"/>
+          </a:xfrm>
+          <a:prstGeom prst="rect">
+            <a:avLst/>
+          </a:prstGeom>
+          <a:noFill/>
+        </p:spPr>
+        <p:txBody>
+          <a:bodyPr wrap="square" lIns="9144" rIns="9144" tIns="9144" bIns="9144">
+            <a:spAutoFit/>
+          </a:bodyPr>
+          <a:lstStyle/>
+          <a:p>
+            <a:pPr>
+              <a:spcAft>
+                <a:spcPts val="800"/>
+              </a:spcAft>
+            </a:pPr>
+            <a:r>
+              <a:rPr sz="2100" b="0">
+                <a:solidFill>
+                  <a:srgbClr val="F4F8FF"/>
+                </a:solidFill>
+                <a:latin typeface="Microsoft JhengHei"/>
+                <a:ea typeface="Microsoft JhengHei"/>
+              </a:rPr>
+              <a:t>03  示範流程、實機驗收與使用者留存資料</a:t>
+            </a:r>
+          </a:p>
+        </p:txBody>
+      </p:sp>
+      <p:sp>
+        <p:nvSpPr>
+          <p:cNvPr id="10" name="TextBox 9"/>
+          <p:cNvSpPr txBox="1"/>
+          <p:nvPr/>
+        </p:nvSpPr>
+        <p:spPr>
+          <a:xfrm>
+            <a:off x="777240" y="4133087"/>
+            <a:ext cx="10607040" cy="457200"/>
+          </a:xfrm>
+          <a:prstGeom prst="rect">
+            <a:avLst/>
+          </a:prstGeom>
+          <a:noFill/>
+        </p:spPr>
+        <p:txBody>
+          <a:bodyPr wrap="square" lIns="9144" rIns="9144" tIns="9144" bIns="9144">
+            <a:spAutoFit/>
+          </a:bodyPr>
+          <a:lstStyle/>
+          <a:p>
+            <a:pPr>
+              <a:spcAft>
+                <a:spcPts val="800"/>
+              </a:spcAft>
+            </a:pPr>
+            <a:r>
+              <a:rPr sz="2100" b="0">
+                <a:solidFill>
+                  <a:srgbClr val="F4F8FF"/>
+                </a:solidFill>
+                <a:latin typeface="Microsoft JhengHei"/>
+                <a:ea typeface="Microsoft JhengHei"/>
+              </a:rPr>
+              <a:t>04  定價測試、單場成本與獲客成本</a:t>
+            </a:r>
+          </a:p>
+        </p:txBody>
+      </p:sp>
+      <p:sp>
+        <p:nvSpPr>
+          <p:cNvPr id="11" name="TextBox 10"/>
+          <p:cNvSpPr txBox="1"/>
+          <p:nvPr/>
+        </p:nvSpPr>
+        <p:spPr>
+          <a:xfrm>
+            <a:off x="777240" y="4764024"/>
+            <a:ext cx="10607040" cy="457200"/>
+          </a:xfrm>
+          <a:prstGeom prst="rect">
+            <a:avLst/>
+          </a:prstGeom>
+          <a:noFill/>
+        </p:spPr>
+        <p:txBody>
+          <a:bodyPr wrap="square" lIns="9144" rIns="9144" tIns="9144" bIns="9144">
+            <a:spAutoFit/>
+          </a:bodyPr>
+          <a:lstStyle/>
+          <a:p>
+            <a:pPr>
+              <a:spcAft>
+                <a:spcPts val="800"/>
+              </a:spcAft>
+            </a:pPr>
+            <a:r>
+              <a:rPr sz="2100" b="0">
+                <a:solidFill>
+                  <a:srgbClr val="F4F8FF"/>
+                </a:solidFill>
+                <a:latin typeface="Microsoft JhengHei"/>
+                <a:ea typeface="Microsoft JhengHei"/>
+              </a:rPr>
+              <a:t>05  募資金額、現金預算、估值及使用條件</a:t>
             </a:r>
           </a:p>
         </p:txBody>
@@ -13127,7 +17331,7 @@
                 <a:latin typeface="Microsoft JhengHei"/>
                 <a:ea typeface="Microsoft JhengHei"/>
               </a:rPr>
-              <a:t>募資討論稿・2026.09.14｜商業方案／數值假設待確認</a:t>
+              <a:t>募資討論稿・2026.09.16｜商業方案／數值假設待確認</a:t>
             </a:r>
           </a:p>
         </p:txBody>
@@ -13936,7 +18140,7 @@
                 <a:latin typeface="Microsoft JhengHei"/>
                 <a:ea typeface="Microsoft JhengHei"/>
               </a:rPr>
-              <a:t>募資討論稿・2026.09.14｜商業方案／數值假設待確認</a:t>
+              <a:t>募資討論稿・2026.09.16｜商業方案／數值假設待確認</a:t>
             </a:r>
           </a:p>
         </p:txBody>
@@ -14310,7 +18514,7 @@
                 <a:latin typeface="Microsoft JhengHei"/>
                 <a:ea typeface="Microsoft JhengHei"/>
               </a:rPr>
-              <a:t>募資討論稿・2026.09.14｜商業方案／數值假設待確認</a:t>
+              <a:t>募資討論稿・2026.09.16｜商業方案／數值假設待確認</a:t>
             </a:r>
           </a:p>
         </p:txBody>
@@ -15119,7 +19323,7 @@
                 <a:latin typeface="Microsoft JhengHei"/>
                 <a:ea typeface="Microsoft JhengHei"/>
               </a:rPr>
-              <a:t>募資討論稿・2026.09.14｜商業方案／數值假設待確認</a:t>
+              <a:t>募資討論稿・2026.09.16｜商業方案／數值假設待確認</a:t>
             </a:r>
           </a:p>
         </p:txBody>
@@ -15918,7 +20122,7 @@
                 <a:latin typeface="Microsoft JhengHei"/>
                 <a:ea typeface="Microsoft JhengHei"/>
               </a:rPr>
-              <a:t>募資討論稿・2026.09.14｜商業方案／數值假設待確認</a:t>
+              <a:t>募資討論稿・2026.09.16｜商業方案／數值假設待確認</a:t>
             </a:r>
           </a:p>
         </p:txBody>
@@ -16768,7 +20972,7 @@
                 <a:latin typeface="Microsoft JhengHei"/>
                 <a:ea typeface="Microsoft JhengHei"/>
               </a:rPr>
-              <a:t>募資討論稿・2026.09.14｜商業方案／數值假設待確認</a:t>
+              <a:t>募資討論稿・2026.09.16｜商業方案／數值假設待確認</a:t>
             </a:r>
           </a:p>
         </p:txBody>
@@ -17611,7 +21815,7 @@
                 <a:latin typeface="Microsoft JhengHei"/>
                 <a:ea typeface="Microsoft JhengHei"/>
               </a:rPr>
-              <a:t>募資討論稿・2026.09.14｜商業方案／數值假設待確認</a:t>
+              <a:t>募資討論稿・2026.09.16｜商業方案／數值假設待確認</a:t>
             </a:r>
           </a:p>
         </p:txBody>
